--- a/public/slides/aa174a/lecture_5.pptx
+++ b/public/slides/aa174a/lecture_5.pptx
@@ -185,9 +185,142 @@
 <file path=ppt/revisionInfo.xml><?xml version="1.0" encoding="utf-8"?>
 <p1510:revInfo xmlns:a="http://schemas.openxmlformats.org/drawingml/2006/main" xmlns:r="http://schemas.openxmlformats.org/officeDocument/2006/relationships" xmlns:p1510="http://schemas.microsoft.com/office/powerpoint/2015/10/main">
   <p1510:revLst>
-    <p1510:client id="{734554E4-4F0A-CA47-89C7-D48567B9143C}" v="3" dt="2025-10-08T22:25:16.776"/>
+    <p1510:client id="{FE67CEC9-5974-D34F-A852-DE0557972F99}" v="1" dt="2026-08-13T22:47:13.880"/>
   </p1510:revLst>
 </p1510:revInfo>
+</file>
+
+<file path=ppt/changesInfos/changesInfo1.xml><?xml version="1.0" encoding="utf-8"?>
+<pc:chgInfo xmlns:a="http://schemas.openxmlformats.org/drawingml/2006/main" xmlns:r="http://schemas.openxmlformats.org/officeDocument/2006/relationships" xmlns:ac="http://schemas.microsoft.com/office/drawing/2013/main/command" xmlns:pc="http://schemas.microsoft.com/office/powerpoint/2013/main/command">
+  <pc:docChgLst>
+    <pc:chgData name="Daniele Gammelli" userId="292b8a31-f1ba-4b4c-b196-a231dc095d13" providerId="ADAL" clId="{6E670754-AB6A-5789-AA0A-6F6FD9CE3EEA}"/>
+    <pc:docChg chg="modSld">
+      <pc:chgData name="Daniele Gammelli" userId="292b8a31-f1ba-4b4c-b196-a231dc095d13" providerId="ADAL" clId="{6E670754-AB6A-5789-AA0A-6F6FD9CE3EEA}" dt="2026-08-13T22:47:27.221" v="16" actId="20577"/>
+      <pc:docMkLst>
+        <pc:docMk/>
+      </pc:docMkLst>
+      <pc:sldChg chg="modNotesTx">
+        <pc:chgData name="Daniele Gammelli" userId="292b8a31-f1ba-4b4c-b196-a231dc095d13" providerId="ADAL" clId="{6E670754-AB6A-5789-AA0A-6F6FD9CE3EEA}" dt="2026-08-13T22:46:32.845" v="2" actId="20577"/>
+        <pc:sldMkLst>
+          <pc:docMk/>
+          <pc:sldMk cId="0" sldId="262"/>
+        </pc:sldMkLst>
+      </pc:sldChg>
+      <pc:sldChg chg="modNotesTx">
+        <pc:chgData name="Daniele Gammelli" userId="292b8a31-f1ba-4b4c-b196-a231dc095d13" providerId="ADAL" clId="{6E670754-AB6A-5789-AA0A-6F6FD9CE3EEA}" dt="2026-08-13T22:46:35.606" v="3" actId="20577"/>
+        <pc:sldMkLst>
+          <pc:docMk/>
+          <pc:sldMk cId="0" sldId="263"/>
+        </pc:sldMkLst>
+      </pc:sldChg>
+      <pc:sldChg chg="modNotesTx">
+        <pc:chgData name="Daniele Gammelli" userId="292b8a31-f1ba-4b4c-b196-a231dc095d13" providerId="ADAL" clId="{6E670754-AB6A-5789-AA0A-6F6FD9CE3EEA}" dt="2026-08-13T22:46:51.686" v="9" actId="20577"/>
+        <pc:sldMkLst>
+          <pc:docMk/>
+          <pc:sldMk cId="0" sldId="266"/>
+        </pc:sldMkLst>
+      </pc:sldChg>
+      <pc:sldChg chg="modNotesTx">
+        <pc:chgData name="Daniele Gammelli" userId="292b8a31-f1ba-4b4c-b196-a231dc095d13" providerId="ADAL" clId="{6E670754-AB6A-5789-AA0A-6F6FD9CE3EEA}" dt="2026-08-13T22:46:27.697" v="0" actId="20577"/>
+        <pc:sldMkLst>
+          <pc:docMk/>
+          <pc:sldMk cId="1571545577" sldId="296"/>
+        </pc:sldMkLst>
+      </pc:sldChg>
+      <pc:sldChg chg="modNotesTx">
+        <pc:chgData name="Daniele Gammelli" userId="292b8a31-f1ba-4b4c-b196-a231dc095d13" providerId="ADAL" clId="{6E670754-AB6A-5789-AA0A-6F6FD9CE3EEA}" dt="2026-08-13T22:46:30.779" v="1" actId="20577"/>
+        <pc:sldMkLst>
+          <pc:docMk/>
+          <pc:sldMk cId="80239633" sldId="297"/>
+        </pc:sldMkLst>
+      </pc:sldChg>
+      <pc:sldChg chg="modNotesTx">
+        <pc:chgData name="Daniele Gammelli" userId="292b8a31-f1ba-4b4c-b196-a231dc095d13" providerId="ADAL" clId="{6E670754-AB6A-5789-AA0A-6F6FD9CE3EEA}" dt="2026-08-13T22:46:58.222" v="10" actId="20577"/>
+        <pc:sldMkLst>
+          <pc:docMk/>
+          <pc:sldMk cId="2293138134" sldId="329"/>
+        </pc:sldMkLst>
+      </pc:sldChg>
+      <pc:sldChg chg="modNotesTx">
+        <pc:chgData name="Daniele Gammelli" userId="292b8a31-f1ba-4b4c-b196-a231dc095d13" providerId="ADAL" clId="{6E670754-AB6A-5789-AA0A-6F6FD9CE3EEA}" dt="2026-08-13T22:47:27.221" v="16" actId="20577"/>
+        <pc:sldMkLst>
+          <pc:docMk/>
+          <pc:sldMk cId="450946619" sldId="331"/>
+        </pc:sldMkLst>
+      </pc:sldChg>
+      <pc:sldChg chg="modNotesTx">
+        <pc:chgData name="Daniele Gammelli" userId="292b8a31-f1ba-4b4c-b196-a231dc095d13" providerId="ADAL" clId="{6E670754-AB6A-5789-AA0A-6F6FD9CE3EEA}" dt="2026-08-13T22:46:46.827" v="7" actId="20577"/>
+        <pc:sldMkLst>
+          <pc:docMk/>
+          <pc:sldMk cId="309462042" sldId="346"/>
+        </pc:sldMkLst>
+      </pc:sldChg>
+      <pc:sldChg chg="modNotesTx">
+        <pc:chgData name="Daniele Gammelli" userId="292b8a31-f1ba-4b4c-b196-a231dc095d13" providerId="ADAL" clId="{6E670754-AB6A-5789-AA0A-6F6FD9CE3EEA}" dt="2026-08-13T22:46:38.512" v="4" actId="20577"/>
+        <pc:sldMkLst>
+          <pc:docMk/>
+          <pc:sldMk cId="3550627275" sldId="359"/>
+        </pc:sldMkLst>
+      </pc:sldChg>
+      <pc:sldChg chg="modNotesTx">
+        <pc:chgData name="Daniele Gammelli" userId="292b8a31-f1ba-4b4c-b196-a231dc095d13" providerId="ADAL" clId="{6E670754-AB6A-5789-AA0A-6F6FD9CE3EEA}" dt="2026-08-13T22:46:41.646" v="5" actId="20577"/>
+        <pc:sldMkLst>
+          <pc:docMk/>
+          <pc:sldMk cId="683792164" sldId="360"/>
+        </pc:sldMkLst>
+      </pc:sldChg>
+      <pc:sldChg chg="modNotesTx">
+        <pc:chgData name="Daniele Gammelli" userId="292b8a31-f1ba-4b4c-b196-a231dc095d13" providerId="ADAL" clId="{6E670754-AB6A-5789-AA0A-6F6FD9CE3EEA}" dt="2026-08-13T22:46:44.710" v="6" actId="20577"/>
+        <pc:sldMkLst>
+          <pc:docMk/>
+          <pc:sldMk cId="658440458" sldId="361"/>
+        </pc:sldMkLst>
+      </pc:sldChg>
+      <pc:sldChg chg="modNotesTx">
+        <pc:chgData name="Daniele Gammelli" userId="292b8a31-f1ba-4b4c-b196-a231dc095d13" providerId="ADAL" clId="{6E670754-AB6A-5789-AA0A-6F6FD9CE3EEA}" dt="2026-08-13T22:46:49.509" v="8" actId="20577"/>
+        <pc:sldMkLst>
+          <pc:docMk/>
+          <pc:sldMk cId="1937771770" sldId="363"/>
+        </pc:sldMkLst>
+      </pc:sldChg>
+      <pc:sldChg chg="modNotesTx">
+        <pc:chgData name="Daniele Gammelli" userId="292b8a31-f1ba-4b4c-b196-a231dc095d13" providerId="ADAL" clId="{6E670754-AB6A-5789-AA0A-6F6FD9CE3EEA}" dt="2026-08-13T22:47:02.744" v="11" actId="20577"/>
+        <pc:sldMkLst>
+          <pc:docMk/>
+          <pc:sldMk cId="3410039294" sldId="367"/>
+        </pc:sldMkLst>
+      </pc:sldChg>
+      <pc:sldChg chg="modNotesTx">
+        <pc:chgData name="Daniele Gammelli" userId="292b8a31-f1ba-4b4c-b196-a231dc095d13" providerId="ADAL" clId="{6E670754-AB6A-5789-AA0A-6F6FD9CE3EEA}" dt="2026-08-13T22:47:06.999" v="12" actId="20577"/>
+        <pc:sldMkLst>
+          <pc:docMk/>
+          <pc:sldMk cId="1617080547" sldId="368"/>
+        </pc:sldMkLst>
+      </pc:sldChg>
+      <pc:sldChg chg="modNotesTx">
+        <pc:chgData name="Daniele Gammelli" userId="292b8a31-f1ba-4b4c-b196-a231dc095d13" providerId="ADAL" clId="{6E670754-AB6A-5789-AA0A-6F6FD9CE3EEA}" dt="2026-08-13T22:47:09.712" v="13" actId="20577"/>
+        <pc:sldMkLst>
+          <pc:docMk/>
+          <pc:sldMk cId="2461020592" sldId="369"/>
+        </pc:sldMkLst>
+      </pc:sldChg>
+      <pc:sldChg chg="modNotesTx">
+        <pc:chgData name="Daniele Gammelli" userId="292b8a31-f1ba-4b4c-b196-a231dc095d13" providerId="ADAL" clId="{6E670754-AB6A-5789-AA0A-6F6FD9CE3EEA}" dt="2026-08-13T22:47:19.723" v="14" actId="20577"/>
+        <pc:sldMkLst>
+          <pc:docMk/>
+          <pc:sldMk cId="2141111929" sldId="370"/>
+        </pc:sldMkLst>
+      </pc:sldChg>
+      <pc:sldChg chg="modNotesTx">
+        <pc:chgData name="Daniele Gammelli" userId="292b8a31-f1ba-4b4c-b196-a231dc095d13" providerId="ADAL" clId="{6E670754-AB6A-5789-AA0A-6F6FD9CE3EEA}" dt="2026-08-13T22:47:24.357" v="15" actId="20577"/>
+        <pc:sldMkLst>
+          <pc:docMk/>
+          <pc:sldMk cId="294883171" sldId="371"/>
+        </pc:sldMkLst>
+      </pc:sldChg>
+    </pc:docChg>
+  </pc:docChgLst>
+</pc:chgInfo>
 </file>
 
 <file path=ppt/notesMasters/notesMaster1.xml><?xml version="1.0" encoding="utf-8"?>
@@ -272,7 +405,7 @@
           <a:p>
             <a:fld id="{EBD6F028-2067-3740-AA48-A91E93570B1D}" type="datetimeFigureOut">
               <a:rPr lang="en-US" smtClean="0"/>
-              <a:t>12/20/2025</a:t>
+              <a:t>8/13/26</a:t>
             </a:fld>
             <a:endParaRPr lang="en-US"/>
           </a:p>
@@ -684,48 +817,7 @@
               <a:tabLst/>
               <a:defRPr/>
             </a:pPr>
-            <a:r>
-              <a:rPr lang="it" sz="1200" kern="1200" dirty="0">
-                <a:solidFill>
-                  <a:schemeClr val="tx1"/>
-                </a:solidFill>
-                <a:effectLst/>
-                <a:latin typeface="+mn-lt"/>
-                <a:ea typeface="+mn-ea"/>
-                <a:cs typeface="+mn-cs"/>
-              </a:rPr>
-              <a:t>f(\x^*+\Delta \x) - f(\x^*) \approx \nabla f(\x^*)^\prime\Delta \x</a:t>
-            </a:r>
-          </a:p>
-          <a:p>
-            <a:r>
-              <a:rPr lang="en-US" dirty="0"/>
-              <a:t>f(\x^*+\Delta \x) - f(\x^*) \</a:t>
-            </a:r>
-            <a:r>
-              <a:rPr lang="en-US" dirty="0" err="1"/>
-              <a:t>approx</a:t>
-            </a:r>
-            <a:r>
-              <a:rPr lang="en-US" dirty="0"/>
-              <a:t> \</a:t>
-            </a:r>
-            <a:r>
-              <a:rPr lang="en-US" dirty="0" err="1"/>
-              <a:t>nabla</a:t>
-            </a:r>
-            <a:r>
-              <a:rPr lang="en-US" dirty="0"/>
-              <a:t> f(\x^*)^\prime\Delta \x +\</a:t>
-            </a:r>
-            <a:r>
-              <a:rPr lang="en-US" dirty="0" err="1"/>
-              <a:t>frac</a:t>
-            </a:r>
-            <a:r>
-              <a:rPr lang="en-US" dirty="0"/>
-              <a:t>{1}{2}\Delta \x ^{\prime} \nabla^2f(\x^*)\Delta \x </a:t>
-            </a:r>
+            <a:endParaRPr lang="en-US" dirty="0"/>
           </a:p>
         </p:txBody>
       </p:sp>
@@ -809,112 +901,7 @@
           <a:bodyPr/>
           <a:lstStyle/>
           <a:p>
-            <a:r>
-              <a:rPr lang="en-US" dirty="0"/>
-              <a:t>\</a:t>
-            </a:r>
-            <a:r>
-              <a:rPr lang="en-US" dirty="0" err="1"/>
-              <a:t>nabla</a:t>
-            </a:r>
-            <a:r>
-              <a:rPr lang="en-US" dirty="0"/>
-              <a:t> f(\x^*)^\prime\Delta \x = \sum_{</a:t>
-            </a:r>
-            <a:r>
-              <a:rPr lang="en-US" dirty="0" err="1"/>
-              <a:t>i</a:t>
-            </a:r>
-            <a:r>
-              <a:rPr lang="en-US" dirty="0"/>
-              <a:t>=1}^n \</a:t>
-            </a:r>
-            <a:r>
-              <a:rPr lang="en-US" dirty="0" err="1"/>
-              <a:t>frac</a:t>
-            </a:r>
-            <a:r>
-              <a:rPr lang="en-US" dirty="0"/>
-              <a:t>{\partial f(\x^*)}{\partial </a:t>
-            </a:r>
-            <a:r>
-              <a:rPr lang="en-US" dirty="0" err="1"/>
-              <a:t>x_i</a:t>
-            </a:r>
-            <a:r>
-              <a:rPr lang="en-US" dirty="0"/>
-              <a:t>}\Delta </a:t>
-            </a:r>
-            <a:r>
-              <a:rPr lang="en-US" dirty="0" err="1"/>
-              <a:t>x_i</a:t>
-            </a:r>
-            <a:r>
-              <a:rPr lang="en-US" dirty="0"/>
-              <a:t> \</a:t>
-            </a:r>
-            <a:r>
-              <a:rPr lang="en-US" dirty="0" err="1"/>
-              <a:t>geq</a:t>
-            </a:r>
-            <a:r>
-              <a:rPr lang="en-US" dirty="0"/>
-              <a:t> 0</a:t>
-            </a:r>
-          </a:p>
-          <a:p>
-            <a:r>
-              <a:rPr lang="en-US" dirty="0"/>
-              <a:t>\</a:t>
-            </a:r>
-            <a:r>
-              <a:rPr lang="en-US" dirty="0" err="1"/>
-              <a:t>frac</a:t>
-            </a:r>
-            <a:r>
-              <a:rPr lang="en-US" dirty="0"/>
-              <a:t>{\partial f(\x^*)}{\partial </a:t>
-            </a:r>
-            <a:r>
-              <a:rPr lang="en-US" dirty="0" err="1"/>
-              <a:t>x_i</a:t>
-            </a:r>
-            <a:r>
-              <a:rPr lang="en-US" dirty="0"/>
-              <a:t>}\</a:t>
-            </a:r>
-            <a:r>
-              <a:rPr lang="en-US" dirty="0" err="1"/>
-              <a:t>geq</a:t>
-            </a:r>
-            <a:r>
-              <a:rPr lang="en-US" dirty="0"/>
-              <a:t> 0, \quad \text{and} \quad \</a:t>
-            </a:r>
-            <a:r>
-              <a:rPr lang="en-US" dirty="0" err="1"/>
-              <a:t>frac</a:t>
-            </a:r>
-            <a:r>
-              <a:rPr lang="en-US" dirty="0"/>
-              <a:t>{\partial f(\x^*)}{\partial </a:t>
-            </a:r>
-            <a:r>
-              <a:rPr lang="en-US" dirty="0" err="1"/>
-              <a:t>x_i</a:t>
-            </a:r>
-            <a:r>
-              <a:rPr lang="en-US" dirty="0"/>
-              <a:t>} \</a:t>
-            </a:r>
-            <a:r>
-              <a:rPr lang="en-US" dirty="0" err="1"/>
-              <a:t>leq</a:t>
-            </a:r>
-            <a:r>
-              <a:rPr lang="en-US" dirty="0"/>
-              <a:t> 0</a:t>
-            </a:r>
+            <a:endParaRPr lang="en-US" dirty="0"/>
           </a:p>
         </p:txBody>
       </p:sp>
@@ -998,38 +985,6 @@
           <a:bodyPr/>
           <a:lstStyle/>
           <a:p>
-            <a:r>
-              <a:rPr lang="en-US" dirty="0"/>
-              <a:t>f(\x^{k+1})\</a:t>
-            </a:r>
-            <a:r>
-              <a:rPr lang="en-US" dirty="0" err="1"/>
-              <a:t>leq</a:t>
-            </a:r>
-            <a:r>
-              <a:rPr lang="en-US" dirty="0"/>
-              <a:t> f(\</a:t>
-            </a:r>
-            <a:r>
-              <a:rPr lang="en-US" dirty="0" err="1"/>
-              <a:t>x^k</a:t>
-            </a:r>
-            <a:r>
-              <a:rPr lang="en-US" dirty="0"/>
-              <a:t>), \</a:t>
-            </a:r>
-            <a:r>
-              <a:rPr lang="en-US" dirty="0" err="1"/>
-              <a:t>qquad</a:t>
-            </a:r>
-            <a:r>
-              <a:rPr lang="en-US" dirty="0"/>
-              <a:t> k=0, 1, \</a:t>
-            </a:r>
-            <a:r>
-              <a:rPr lang="en-US" dirty="0" err="1"/>
-              <a:t>ldots</a:t>
-            </a:r>
             <a:endParaRPr lang="en-US" dirty="0"/>
           </a:p>
         </p:txBody>
@@ -1114,236 +1069,6 @@
           <a:bodyPr/>
           <a:lstStyle/>
           <a:p>
-            <a:pPr marL="0" marR="0" lvl="0" indent="0" algn="l" defTabSz="914400" rtl="0" eaLnBrk="1" fontAlgn="auto" latinLnBrk="0" hangingPunct="1">
-              <a:lnSpc>
-                <a:spcPct val="100000"/>
-              </a:lnSpc>
-              <a:spcBef>
-                <a:spcPts val="0"/>
-              </a:spcBef>
-              <a:spcAft>
-                <a:spcPts val="0"/>
-              </a:spcAft>
-              <a:buClrTx/>
-              <a:buSzTx/>
-              <a:buFontTx/>
-              <a:buNone/>
-              <a:tabLst/>
-              <a:defRPr/>
-            </a:pPr>
-            <a:r>
-              <a:rPr lang="en-US" sz="1200" kern="1200" dirty="0">
-                <a:solidFill>
-                  <a:schemeClr val="tx1"/>
-                </a:solidFill>
-                <a:effectLst/>
-                <a:latin typeface="+mn-lt"/>
-                <a:ea typeface="+mn-ea"/>
-                <a:cs typeface="+mn-cs"/>
-              </a:rPr>
-              <a:t>\x_{\alpha} = \x - \alpha \</a:t>
-            </a:r>
-            <a:r>
-              <a:rPr lang="en-US" sz="1200" kern="1200" dirty="0" err="1">
-                <a:solidFill>
-                  <a:schemeClr val="tx1"/>
-                </a:solidFill>
-                <a:effectLst/>
-                <a:latin typeface="+mn-lt"/>
-                <a:ea typeface="+mn-ea"/>
-                <a:cs typeface="+mn-cs"/>
-              </a:rPr>
-              <a:t>nabla</a:t>
-            </a:r>
-            <a:r>
-              <a:rPr lang="en-US" sz="1200" kern="1200" dirty="0">
-                <a:solidFill>
-                  <a:schemeClr val="tx1"/>
-                </a:solidFill>
-                <a:effectLst/>
-                <a:latin typeface="+mn-lt"/>
-                <a:ea typeface="+mn-ea"/>
-                <a:cs typeface="+mn-cs"/>
-              </a:rPr>
-              <a:t> f(\x), \</a:t>
-            </a:r>
-            <a:r>
-              <a:rPr lang="en-US" sz="1200" kern="1200" dirty="0" err="1">
-                <a:solidFill>
-                  <a:schemeClr val="tx1"/>
-                </a:solidFill>
-                <a:effectLst/>
-                <a:latin typeface="+mn-lt"/>
-                <a:ea typeface="+mn-ea"/>
-                <a:cs typeface="+mn-cs"/>
-              </a:rPr>
-              <a:t>qquad</a:t>
-            </a:r>
-            <a:r>
-              <a:rPr lang="en-US" sz="1200" kern="1200" dirty="0">
-                <a:solidFill>
-                  <a:schemeClr val="tx1"/>
-                </a:solidFill>
-                <a:effectLst/>
-                <a:latin typeface="+mn-lt"/>
-                <a:ea typeface="+mn-ea"/>
-                <a:cs typeface="+mn-cs"/>
-              </a:rPr>
-              <a:t> \</a:t>
-            </a:r>
-            <a:r>
-              <a:rPr lang="en-US" sz="1200" kern="1200" dirty="0" err="1">
-                <a:solidFill>
-                  <a:schemeClr val="tx1"/>
-                </a:solidFill>
-                <a:effectLst/>
-                <a:latin typeface="+mn-lt"/>
-                <a:ea typeface="+mn-ea"/>
-                <a:cs typeface="+mn-cs"/>
-              </a:rPr>
-              <a:t>forall</a:t>
-            </a:r>
-            <a:r>
-              <a:rPr lang="en-US" sz="1200" kern="1200" dirty="0">
-                <a:solidFill>
-                  <a:schemeClr val="tx1"/>
-                </a:solidFill>
-                <a:effectLst/>
-                <a:latin typeface="+mn-lt"/>
-                <a:ea typeface="+mn-ea"/>
-                <a:cs typeface="+mn-cs"/>
-              </a:rPr>
-              <a:t> \alpha \</a:t>
-            </a:r>
-            <a:r>
-              <a:rPr lang="en-US" sz="1200" kern="1200" dirty="0" err="1">
-                <a:solidFill>
-                  <a:schemeClr val="tx1"/>
-                </a:solidFill>
-                <a:effectLst/>
-                <a:latin typeface="+mn-lt"/>
-                <a:ea typeface="+mn-ea"/>
-                <a:cs typeface="+mn-cs"/>
-              </a:rPr>
-              <a:t>geq</a:t>
-            </a:r>
-            <a:r>
-              <a:rPr lang="en-US" sz="1200" kern="1200" dirty="0">
-                <a:solidFill>
-                  <a:schemeClr val="tx1"/>
-                </a:solidFill>
-                <a:effectLst/>
-                <a:latin typeface="+mn-lt"/>
-                <a:ea typeface="+mn-ea"/>
-                <a:cs typeface="+mn-cs"/>
-              </a:rPr>
-              <a:t> 0</a:t>
-            </a:r>
-          </a:p>
-          <a:p>
-            <a:pPr marL="0" marR="0" lvl="0" indent="0" algn="l" defTabSz="914400" rtl="0" eaLnBrk="1" fontAlgn="auto" latinLnBrk="0" hangingPunct="1">
-              <a:lnSpc>
-                <a:spcPct val="100000"/>
-              </a:lnSpc>
-              <a:spcBef>
-                <a:spcPts val="0"/>
-              </a:spcBef>
-              <a:spcAft>
-                <a:spcPts val="0"/>
-              </a:spcAft>
-              <a:buClrTx/>
-              <a:buSzTx/>
-              <a:buFontTx/>
-              <a:buNone/>
-              <a:tabLst/>
-              <a:defRPr/>
-            </a:pPr>
-            <a:r>
-              <a:rPr lang="en-US" sz="1200" kern="1200" dirty="0">
-                <a:solidFill>
-                  <a:schemeClr val="tx1"/>
-                </a:solidFill>
-                <a:effectLst/>
-                <a:latin typeface="+mn-lt"/>
-                <a:ea typeface="+mn-ea"/>
-                <a:cs typeface="+mn-cs"/>
-              </a:rPr>
-              <a:t>f(\x_{\alpha})\</a:t>
-            </a:r>
-            <a:r>
-              <a:rPr lang="en-US" sz="1200" kern="1200" dirty="0" err="1">
-                <a:solidFill>
-                  <a:schemeClr val="tx1"/>
-                </a:solidFill>
-                <a:effectLst/>
-                <a:latin typeface="+mn-lt"/>
-                <a:ea typeface="+mn-ea"/>
-                <a:cs typeface="+mn-cs"/>
-              </a:rPr>
-              <a:t>approx</a:t>
-            </a:r>
-            <a:r>
-              <a:rPr lang="en-US" sz="1200" kern="1200" dirty="0">
-                <a:solidFill>
-                  <a:schemeClr val="tx1"/>
-                </a:solidFill>
-                <a:effectLst/>
-                <a:latin typeface="+mn-lt"/>
-                <a:ea typeface="+mn-ea"/>
-                <a:cs typeface="+mn-cs"/>
-              </a:rPr>
-              <a:t> f(\x) + \</a:t>
-            </a:r>
-            <a:r>
-              <a:rPr lang="en-US" sz="1200" kern="1200" dirty="0" err="1">
-                <a:solidFill>
-                  <a:schemeClr val="tx1"/>
-                </a:solidFill>
-                <a:effectLst/>
-                <a:latin typeface="+mn-lt"/>
-                <a:ea typeface="+mn-ea"/>
-                <a:cs typeface="+mn-cs"/>
-              </a:rPr>
-              <a:t>nabla</a:t>
-            </a:r>
-            <a:r>
-              <a:rPr lang="en-US" sz="1200" kern="1200" dirty="0">
-                <a:solidFill>
-                  <a:schemeClr val="tx1"/>
-                </a:solidFill>
-                <a:effectLst/>
-                <a:latin typeface="+mn-lt"/>
-                <a:ea typeface="+mn-ea"/>
-                <a:cs typeface="+mn-cs"/>
-              </a:rPr>
-              <a:t> f(\x)^{\prime} (\x_{\alpha}- \x)  = f(\x) - \alpha \| \</a:t>
-            </a:r>
-            <a:r>
-              <a:rPr lang="en-US" sz="1200" kern="1200" dirty="0" err="1">
-                <a:solidFill>
-                  <a:schemeClr val="tx1"/>
-                </a:solidFill>
-                <a:effectLst/>
-                <a:latin typeface="+mn-lt"/>
-                <a:ea typeface="+mn-ea"/>
-                <a:cs typeface="+mn-cs"/>
-              </a:rPr>
-              <a:t>nabla</a:t>
-            </a:r>
-            <a:r>
-              <a:rPr lang="en-US" sz="1200" kern="1200" dirty="0">
-                <a:solidFill>
-                  <a:schemeClr val="tx1"/>
-                </a:solidFill>
-                <a:effectLst/>
-                <a:latin typeface="+mn-lt"/>
-                <a:ea typeface="+mn-ea"/>
-                <a:cs typeface="+mn-cs"/>
-              </a:rPr>
-              <a:t> f(\x)\|^2</a:t>
-            </a:r>
-          </a:p>
-          <a:p>
             <a:endParaRPr lang="en-US" dirty="0"/>
           </a:p>
         </p:txBody>
@@ -1435,249 +1160,6 @@
               </a:spcAft>
               <a:buNone/>
             </a:pPr>
-            <a:r>
-              <a:rPr lang="en" sz="1200" b="1" dirty="0"/>
-              <a:t>Google </a:t>
-            </a:r>
-            <a:r>
-              <a:rPr lang="en" sz="1200" b="1" dirty="0" err="1"/>
-              <a:t>colab</a:t>
-            </a:r>
-            <a:r>
-              <a:rPr lang="en" sz="1200" dirty="0"/>
-              <a:t> instructions:</a:t>
-            </a:r>
-            <a:endParaRPr sz="1200" dirty="0"/>
-          </a:p>
-          <a:p>
-            <a:pPr marL="457200" lvl="0" indent="-298450" algn="l" rtl="0">
-              <a:spcBef>
-                <a:spcPts val="0"/>
-              </a:spcBef>
-              <a:spcAft>
-                <a:spcPts val="0"/>
-              </a:spcAft>
-              <a:buSzPts val="1100"/>
-              <a:buChar char="-"/>
-            </a:pPr>
-            <a:r>
-              <a:rPr lang="en" sz="1200" dirty="0"/>
-              <a:t>Increase </a:t>
-            </a:r>
-            <a:r>
-              <a:rPr lang="en" sz="1150" b="1" dirty="0" err="1">
-                <a:solidFill>
-                  <a:schemeClr val="dk1"/>
-                </a:solidFill>
-                <a:highlight>
-                  <a:srgbClr val="F7F7F7"/>
-                </a:highlight>
-                <a:latin typeface="Courier New"/>
-                <a:ea typeface="Courier New"/>
-                <a:cs typeface="Courier New"/>
-                <a:sym typeface="Courier New"/>
-              </a:rPr>
-              <a:t>stepsize</a:t>
-            </a:r>
-            <a:r>
-              <a:rPr lang="en" sz="1150" b="1" dirty="0">
-                <a:solidFill>
-                  <a:schemeClr val="dk1"/>
-                </a:solidFill>
-                <a:highlight>
-                  <a:srgbClr val="F7F7F7"/>
-                </a:highlight>
-                <a:latin typeface="Courier New"/>
-                <a:ea typeface="Courier New"/>
-                <a:cs typeface="Courier New"/>
-                <a:sym typeface="Courier New"/>
-              </a:rPr>
-              <a:t> = </a:t>
-            </a:r>
-            <a:r>
-              <a:rPr lang="en" sz="1150" b="1" dirty="0">
-                <a:solidFill>
-                  <a:srgbClr val="098156"/>
-                </a:solidFill>
-                <a:highlight>
-                  <a:srgbClr val="F7F7F7"/>
-                </a:highlight>
-                <a:latin typeface="Courier New"/>
-                <a:ea typeface="Courier New"/>
-                <a:cs typeface="Courier New"/>
-                <a:sym typeface="Courier New"/>
-              </a:rPr>
-              <a:t>0.4 </a:t>
-            </a:r>
-            <a:r>
-              <a:rPr lang="en" sz="1200" dirty="0">
-                <a:solidFill>
-                  <a:schemeClr val="dk1"/>
-                </a:solidFill>
-              </a:rPr>
-              <a:t>(oscillations)</a:t>
-            </a:r>
-            <a:endParaRPr sz="1200" dirty="0">
-              <a:solidFill>
-                <a:schemeClr val="dk1"/>
-              </a:solidFill>
-            </a:endParaRPr>
-          </a:p>
-          <a:p>
-            <a:pPr marL="457200" lvl="0" indent="-298450" algn="l" rtl="0">
-              <a:spcBef>
-                <a:spcPts val="0"/>
-              </a:spcBef>
-              <a:spcAft>
-                <a:spcPts val="0"/>
-              </a:spcAft>
-              <a:buSzPts val="1100"/>
-              <a:buChar char="-"/>
-            </a:pPr>
-            <a:r>
-              <a:rPr lang="en" sz="1200" dirty="0">
-                <a:solidFill>
-                  <a:schemeClr val="dk1"/>
-                </a:solidFill>
-              </a:rPr>
-              <a:t>decrease </a:t>
-            </a:r>
-            <a:r>
-              <a:rPr lang="en" sz="1150" b="1" dirty="0" err="1">
-                <a:solidFill>
-                  <a:schemeClr val="dk1"/>
-                </a:solidFill>
-                <a:highlight>
-                  <a:srgbClr val="F7F7F7"/>
-                </a:highlight>
-                <a:latin typeface="Courier New"/>
-                <a:ea typeface="Courier New"/>
-                <a:cs typeface="Courier New"/>
-                <a:sym typeface="Courier New"/>
-              </a:rPr>
-              <a:t>stepsize</a:t>
-            </a:r>
-            <a:r>
-              <a:rPr lang="en" sz="1150" b="1">
-                <a:solidFill>
-                  <a:schemeClr val="dk1"/>
-                </a:solidFill>
-                <a:highlight>
-                  <a:srgbClr val="F7F7F7"/>
-                </a:highlight>
-                <a:latin typeface="Courier New"/>
-                <a:ea typeface="Courier New"/>
-                <a:cs typeface="Courier New"/>
-                <a:sym typeface="Courier New"/>
-              </a:rPr>
-              <a:t> = </a:t>
-            </a:r>
-            <a:r>
-              <a:rPr lang="en" sz="1150" b="1">
-                <a:solidFill>
-                  <a:srgbClr val="098156"/>
-                </a:solidFill>
-                <a:highlight>
-                  <a:srgbClr val="F7F7F7"/>
-                </a:highlight>
-                <a:latin typeface="Courier New"/>
-                <a:ea typeface="Courier New"/>
-                <a:cs typeface="Courier New"/>
-                <a:sym typeface="Courier New"/>
-              </a:rPr>
-              <a:t>0.01 </a:t>
-            </a:r>
-            <a:r>
-              <a:rPr lang="en" sz="1200">
-                <a:solidFill>
-                  <a:schemeClr val="dk1"/>
-                </a:solidFill>
-              </a:rPr>
-              <a:t>(convergence is slow)</a:t>
-            </a:r>
-            <a:endParaRPr sz="1150" b="1">
-              <a:solidFill>
-                <a:srgbClr val="098156"/>
-              </a:solidFill>
-              <a:highlight>
-                <a:srgbClr val="F7F7F7"/>
-              </a:highlight>
-              <a:latin typeface="Courier New"/>
-              <a:ea typeface="Courier New"/>
-              <a:cs typeface="Courier New"/>
-              <a:sym typeface="Courier New"/>
-            </a:endParaRPr>
-          </a:p>
-          <a:p>
-            <a:pPr marL="457200" lvl="0" indent="0" algn="l" rtl="0">
-              <a:spcBef>
-                <a:spcPts val="0"/>
-              </a:spcBef>
-              <a:spcAft>
-                <a:spcPts val="0"/>
-              </a:spcAft>
-              <a:buNone/>
-            </a:pPr>
-            <a:endParaRPr dirty="0"/>
-          </a:p>
-          <a:p>
-            <a:pPr marL="457200" lvl="0" indent="0" algn="l" rtl="0">
-              <a:spcBef>
-                <a:spcPts val="0"/>
-              </a:spcBef>
-              <a:spcAft>
-                <a:spcPts val="0"/>
-              </a:spcAft>
-              <a:buNone/>
-            </a:pPr>
-            <a:endParaRPr dirty="0"/>
-          </a:p>
-          <a:p>
-            <a:pPr marL="0" lvl="0" indent="0" algn="l" rtl="0">
-              <a:spcBef>
-                <a:spcPts val="0"/>
-              </a:spcBef>
-              <a:spcAft>
-                <a:spcPts val="0"/>
-              </a:spcAft>
-              <a:buNone/>
-            </a:pPr>
-            <a:r>
-              <a:rPr lang="en" dirty="0"/>
-              <a:t>x_{k+1}=</a:t>
-            </a:r>
-            <a:r>
-              <a:rPr lang="en" dirty="0" err="1"/>
-              <a:t>x_k</a:t>
-            </a:r>
-            <a:r>
-              <a:rPr lang="en" dirty="0"/>
-              <a:t>-\alpha\</a:t>
-            </a:r>
-            <a:r>
-              <a:rPr lang="en" dirty="0" err="1"/>
-              <a:t>cdot</a:t>
-            </a:r>
-            <a:r>
-              <a:rPr lang="en" dirty="0"/>
-              <a:t> \</a:t>
-            </a:r>
-            <a:r>
-              <a:rPr lang="en" dirty="0" err="1"/>
-              <a:t>nabla</a:t>
-            </a:r>
-            <a:r>
-              <a:rPr lang="en" dirty="0"/>
-              <a:t> f(</a:t>
-            </a:r>
-            <a:r>
-              <a:rPr lang="en" dirty="0" err="1"/>
-              <a:t>x_k</a:t>
-            </a:r>
-            <a:r>
-              <a:rPr lang="en" dirty="0"/>
-              <a:t>)</a:t>
-            </a:r>
             <a:endParaRPr dirty="0"/>
           </a:p>
         </p:txBody>
@@ -1963,610 +1445,6 @@
           <a:bodyPr/>
           <a:lstStyle/>
           <a:p>
-            <a:pPr marL="0" lvl="0" indent="0" algn="l" rtl="0">
-              <a:spcBef>
-                <a:spcPts val="0"/>
-              </a:spcBef>
-              <a:spcAft>
-                <a:spcPts val="0"/>
-              </a:spcAft>
-              <a:buSzPts val="1100"/>
-              <a:buNone/>
-            </a:pPr>
-            <a:r>
-              <a:rPr lang="en-US" sz="1200" b="1" dirty="0">
-                <a:solidFill>
-                  <a:schemeClr val="dk1"/>
-                </a:solidFill>
-                <a:latin typeface="Calibri"/>
-                <a:ea typeface="Calibri"/>
-                <a:cs typeface="Calibri"/>
-                <a:sym typeface="Calibri"/>
-              </a:rPr>
-              <a:t>Google </a:t>
-            </a:r>
-            <a:r>
-              <a:rPr lang="en-US" sz="1200" b="1" dirty="0" err="1">
-                <a:solidFill>
-                  <a:schemeClr val="dk1"/>
-                </a:solidFill>
-                <a:latin typeface="Calibri"/>
-                <a:ea typeface="Calibri"/>
-                <a:cs typeface="Calibri"/>
-                <a:sym typeface="Calibri"/>
-              </a:rPr>
-              <a:t>colab</a:t>
-            </a:r>
-            <a:r>
-              <a:rPr lang="en-US" sz="1200" dirty="0">
-                <a:solidFill>
-                  <a:schemeClr val="dk1"/>
-                </a:solidFill>
-                <a:latin typeface="Calibri"/>
-                <a:ea typeface="Calibri"/>
-                <a:cs typeface="Calibri"/>
-                <a:sym typeface="Calibri"/>
-              </a:rPr>
-              <a:t>: play with the iteration slider.</a:t>
-            </a:r>
-          </a:p>
-          <a:p>
-            <a:pPr marL="0" lvl="0" indent="0" algn="l" rtl="0">
-              <a:spcBef>
-                <a:spcPts val="0"/>
-              </a:spcBef>
-              <a:spcAft>
-                <a:spcPts val="0"/>
-              </a:spcAft>
-              <a:buSzPts val="1100"/>
-              <a:buNone/>
-            </a:pPr>
-            <a:r>
-              <a:rPr lang="en-US" sz="1200" dirty="0">
-                <a:solidFill>
-                  <a:schemeClr val="dk1"/>
-                </a:solidFill>
-                <a:latin typeface="Calibri"/>
-                <a:ea typeface="Calibri"/>
-                <a:cs typeface="Calibri"/>
-                <a:sym typeface="Calibri"/>
-              </a:rPr>
-              <a:t>Note: right arrow on keyboard to go one iteration at a time.</a:t>
-            </a:r>
-          </a:p>
-          <a:p>
-            <a:pPr marL="0" lvl="0" indent="0" algn="l" rtl="0">
-              <a:spcBef>
-                <a:spcPts val="0"/>
-              </a:spcBef>
-              <a:spcAft>
-                <a:spcPts val="0"/>
-              </a:spcAft>
-              <a:buClr>
-                <a:schemeClr val="dk1"/>
-              </a:buClr>
-              <a:buSzPts val="1100"/>
-              <a:buFont typeface="Arial"/>
-              <a:buNone/>
-            </a:pPr>
-            <a:r>
-              <a:rPr lang="en-US" sz="1200" dirty="0">
-                <a:solidFill>
-                  <a:schemeClr val="dk1"/>
-                </a:solidFill>
-                <a:latin typeface="Calibri"/>
-                <a:ea typeface="Calibri"/>
-                <a:cs typeface="Calibri"/>
-                <a:sym typeface="Calibri"/>
-              </a:rPr>
-              <a:t>- try iteration 0</a:t>
-            </a:r>
-          </a:p>
-          <a:p>
-            <a:pPr marL="0" lvl="0" indent="0" algn="l" rtl="0">
-              <a:spcBef>
-                <a:spcPts val="0"/>
-              </a:spcBef>
-              <a:spcAft>
-                <a:spcPts val="0"/>
-              </a:spcAft>
-              <a:buClr>
-                <a:schemeClr val="dk1"/>
-              </a:buClr>
-              <a:buSzPts val="1100"/>
-              <a:buFont typeface="Arial"/>
-              <a:buNone/>
-            </a:pPr>
-            <a:r>
-              <a:rPr lang="en-US" sz="1200" dirty="0">
-                <a:solidFill>
-                  <a:schemeClr val="dk1"/>
-                </a:solidFill>
-                <a:latin typeface="Calibri"/>
-                <a:ea typeface="Calibri"/>
-                <a:cs typeface="Calibri"/>
-                <a:sym typeface="Calibri"/>
-              </a:rPr>
-              <a:t>- try iteration 1 (should do flips)</a:t>
-            </a:r>
-          </a:p>
-          <a:p>
-            <a:pPr marL="0" lvl="0" indent="0" algn="l" rtl="0">
-              <a:spcBef>
-                <a:spcPts val="0"/>
-              </a:spcBef>
-              <a:spcAft>
-                <a:spcPts val="0"/>
-              </a:spcAft>
-              <a:buClr>
-                <a:schemeClr val="dk1"/>
-              </a:buClr>
-              <a:buSzPts val="1100"/>
-              <a:buFont typeface="Arial"/>
-              <a:buNone/>
-            </a:pPr>
-            <a:r>
-              <a:rPr lang="en-US" sz="1200" dirty="0">
-                <a:solidFill>
-                  <a:schemeClr val="dk1"/>
-                </a:solidFill>
-                <a:latin typeface="Calibri"/>
-                <a:ea typeface="Calibri"/>
-                <a:cs typeface="Calibri"/>
-                <a:sym typeface="Calibri"/>
-              </a:rPr>
-              <a:t>- try iteration 9 (should do flips)</a:t>
-            </a:r>
-          </a:p>
-          <a:p>
-            <a:pPr marL="0" lvl="0" indent="0" algn="l" rtl="0">
-              <a:spcBef>
-                <a:spcPts val="0"/>
-              </a:spcBef>
-              <a:spcAft>
-                <a:spcPts val="0"/>
-              </a:spcAft>
-              <a:buClr>
-                <a:schemeClr val="dk1"/>
-              </a:buClr>
-              <a:buSzPts val="1100"/>
-              <a:buFont typeface="Arial"/>
-              <a:buNone/>
-            </a:pPr>
-            <a:r>
-              <a:rPr lang="en-US" sz="1200" dirty="0">
-                <a:solidFill>
-                  <a:schemeClr val="dk1"/>
-                </a:solidFill>
-                <a:latin typeface="Calibri"/>
-                <a:ea typeface="Calibri"/>
-                <a:cs typeface="Calibri"/>
-                <a:sym typeface="Calibri"/>
-              </a:rPr>
-              <a:t>- try iteration 35 (good)</a:t>
-            </a:r>
-          </a:p>
-          <a:p>
-            <a:pPr marL="0" lvl="0" indent="0" algn="l" rtl="0">
-              <a:spcBef>
-                <a:spcPts val="0"/>
-              </a:spcBef>
-              <a:spcAft>
-                <a:spcPts val="0"/>
-              </a:spcAft>
-              <a:buClr>
-                <a:schemeClr val="dk1"/>
-              </a:buClr>
-              <a:buSzPts val="1100"/>
-              <a:buFont typeface="Arial"/>
-              <a:buNone/>
-            </a:pPr>
-            <a:r>
-              <a:rPr lang="en-US" sz="1200" dirty="0">
-                <a:solidFill>
-                  <a:schemeClr val="dk1"/>
-                </a:solidFill>
-                <a:latin typeface="Calibri"/>
-                <a:ea typeface="Calibri"/>
-                <a:cs typeface="Calibri"/>
-                <a:sym typeface="Calibri"/>
-              </a:rPr>
-              <a:t>- try iteration 41 (good)</a:t>
-            </a:r>
-          </a:p>
-          <a:p>
-            <a:endParaRPr lang="en-US" sz="1200" kern="1200" dirty="0">
-              <a:solidFill>
-                <a:schemeClr val="tx1"/>
-              </a:solidFill>
-              <a:effectLst/>
-              <a:latin typeface="+mn-lt"/>
-              <a:ea typeface="+mn-ea"/>
-              <a:cs typeface="+mn-cs"/>
-            </a:endParaRPr>
-          </a:p>
-          <a:p>
-            <a:endParaRPr lang="en-US" sz="1200" kern="1200" dirty="0">
-              <a:solidFill>
-                <a:schemeClr val="tx1"/>
-              </a:solidFill>
-              <a:effectLst/>
-              <a:latin typeface="+mn-lt"/>
-              <a:ea typeface="+mn-ea"/>
-              <a:cs typeface="+mn-cs"/>
-            </a:endParaRPr>
-          </a:p>
-          <a:p>
-            <a:r>
-              <a:rPr lang="en-US" sz="1200" kern="1200" dirty="0">
-                <a:solidFill>
-                  <a:schemeClr val="tx1"/>
-                </a:solidFill>
-                <a:effectLst/>
-                <a:latin typeface="+mn-lt"/>
-                <a:ea typeface="+mn-ea"/>
-                <a:cs typeface="+mn-cs"/>
-              </a:rPr>
-              <a:t>    \begin{</a:t>
-            </a:r>
-            <a:r>
-              <a:rPr lang="en-US" sz="1200" kern="1200" dirty="0" err="1">
-                <a:solidFill>
-                  <a:schemeClr val="tx1"/>
-                </a:solidFill>
-                <a:effectLst/>
-                <a:latin typeface="+mn-lt"/>
-                <a:ea typeface="+mn-ea"/>
-                <a:cs typeface="+mn-cs"/>
-              </a:rPr>
-              <a:t>bmatrix</a:t>
-            </a:r>
-            <a:r>
-              <a:rPr lang="en-US" sz="1200" kern="1200" dirty="0">
-                <a:solidFill>
-                  <a:schemeClr val="tx1"/>
-                </a:solidFill>
-                <a:effectLst/>
-                <a:latin typeface="+mn-lt"/>
-                <a:ea typeface="+mn-ea"/>
-                <a:cs typeface="+mn-cs"/>
-              </a:rPr>
-              <a:t>}</a:t>
-            </a:r>
-          </a:p>
-          <a:p>
-            <a:r>
-              <a:rPr lang="en-US" sz="1200" kern="1200" dirty="0">
-                <a:solidFill>
-                  <a:schemeClr val="tx1"/>
-                </a:solidFill>
-                <a:effectLst/>
-                <a:latin typeface="+mn-lt"/>
-                <a:ea typeface="+mn-ea"/>
-                <a:cs typeface="+mn-cs"/>
-              </a:rPr>
-              <a:t>      \dot x \\ \dot </a:t>
-            </a:r>
-            <a:r>
-              <a:rPr lang="en-US" sz="1200" kern="1200" dirty="0" err="1">
-                <a:solidFill>
-                  <a:schemeClr val="tx1"/>
-                </a:solidFill>
-                <a:effectLst/>
-                <a:latin typeface="+mn-lt"/>
-                <a:ea typeface="+mn-ea"/>
-                <a:cs typeface="+mn-cs"/>
-              </a:rPr>
-              <a:t>v_x</a:t>
-            </a:r>
-            <a:r>
-              <a:rPr lang="en-US" sz="1200" kern="1200" dirty="0">
-                <a:solidFill>
-                  <a:schemeClr val="tx1"/>
-                </a:solidFill>
-                <a:effectLst/>
-                <a:latin typeface="+mn-lt"/>
-                <a:ea typeface="+mn-ea"/>
-                <a:cs typeface="+mn-cs"/>
-              </a:rPr>
-              <a:t> \\ \dot y \\ \dot </a:t>
-            </a:r>
-            <a:r>
-              <a:rPr lang="en-US" sz="1200" kern="1200" dirty="0" err="1">
-                <a:solidFill>
-                  <a:schemeClr val="tx1"/>
-                </a:solidFill>
-                <a:effectLst/>
-                <a:latin typeface="+mn-lt"/>
-                <a:ea typeface="+mn-ea"/>
-                <a:cs typeface="+mn-cs"/>
-              </a:rPr>
-              <a:t>v_y</a:t>
-            </a:r>
-            <a:r>
-              <a:rPr lang="en-US" sz="1200" kern="1200" dirty="0">
-                <a:solidFill>
-                  <a:schemeClr val="tx1"/>
-                </a:solidFill>
-                <a:effectLst/>
-                <a:latin typeface="+mn-lt"/>
-                <a:ea typeface="+mn-ea"/>
-                <a:cs typeface="+mn-cs"/>
-              </a:rPr>
-              <a:t> \\ \dot \phi \\ \dot \omega</a:t>
-            </a:r>
-          </a:p>
-          <a:p>
-            <a:r>
-              <a:rPr lang="en-US" sz="1200" kern="1200" dirty="0">
-                <a:solidFill>
-                  <a:schemeClr val="tx1"/>
-                </a:solidFill>
-                <a:effectLst/>
-                <a:latin typeface="+mn-lt"/>
-                <a:ea typeface="+mn-ea"/>
-                <a:cs typeface="+mn-cs"/>
-              </a:rPr>
-              <a:t>    \end{</a:t>
-            </a:r>
-            <a:r>
-              <a:rPr lang="en-US" sz="1200" kern="1200" dirty="0" err="1">
-                <a:solidFill>
-                  <a:schemeClr val="tx1"/>
-                </a:solidFill>
-                <a:effectLst/>
-                <a:latin typeface="+mn-lt"/>
-                <a:ea typeface="+mn-ea"/>
-                <a:cs typeface="+mn-cs"/>
-              </a:rPr>
-              <a:t>bmatrix</a:t>
-            </a:r>
-            <a:r>
-              <a:rPr lang="en-US" sz="1200" kern="1200" dirty="0">
-                <a:solidFill>
-                  <a:schemeClr val="tx1"/>
-                </a:solidFill>
-                <a:effectLst/>
-                <a:latin typeface="+mn-lt"/>
-                <a:ea typeface="+mn-ea"/>
-                <a:cs typeface="+mn-cs"/>
-              </a:rPr>
-              <a:t>} =</a:t>
-            </a:r>
-          </a:p>
-          <a:p>
-            <a:r>
-              <a:rPr lang="en-US" sz="1200" kern="1200" dirty="0">
-                <a:solidFill>
-                  <a:schemeClr val="tx1"/>
-                </a:solidFill>
-                <a:effectLst/>
-                <a:latin typeface="+mn-lt"/>
-                <a:ea typeface="+mn-ea"/>
-                <a:cs typeface="+mn-cs"/>
-              </a:rPr>
-              <a:t>    \begin{</a:t>
-            </a:r>
-            <a:r>
-              <a:rPr lang="en-US" sz="1200" kern="1200" dirty="0" err="1">
-                <a:solidFill>
-                  <a:schemeClr val="tx1"/>
-                </a:solidFill>
-                <a:effectLst/>
-                <a:latin typeface="+mn-lt"/>
-                <a:ea typeface="+mn-ea"/>
-                <a:cs typeface="+mn-cs"/>
-              </a:rPr>
-              <a:t>bmatrix</a:t>
-            </a:r>
-            <a:r>
-              <a:rPr lang="en-US" sz="1200" kern="1200" dirty="0">
-                <a:solidFill>
-                  <a:schemeClr val="tx1"/>
-                </a:solidFill>
-                <a:effectLst/>
-                <a:latin typeface="+mn-lt"/>
-                <a:ea typeface="+mn-ea"/>
-                <a:cs typeface="+mn-cs"/>
-              </a:rPr>
-              <a:t>}</a:t>
-            </a:r>
-          </a:p>
-          <a:p>
-            <a:r>
-              <a:rPr lang="en-US" sz="1200" kern="1200" dirty="0">
-                <a:solidFill>
-                  <a:schemeClr val="tx1"/>
-                </a:solidFill>
-                <a:effectLst/>
-                <a:latin typeface="+mn-lt"/>
-                <a:ea typeface="+mn-ea"/>
-                <a:cs typeface="+mn-cs"/>
-              </a:rPr>
-              <a:t>      </a:t>
-            </a:r>
-            <a:r>
-              <a:rPr lang="en-US" sz="1200" kern="1200" dirty="0" err="1">
-                <a:solidFill>
-                  <a:schemeClr val="tx1"/>
-                </a:solidFill>
-                <a:effectLst/>
-                <a:latin typeface="+mn-lt"/>
-                <a:ea typeface="+mn-ea"/>
-                <a:cs typeface="+mn-cs"/>
-              </a:rPr>
-              <a:t>v_x</a:t>
-            </a:r>
-            <a:r>
-              <a:rPr lang="en-US" sz="1200" kern="1200" dirty="0">
-                <a:solidFill>
-                  <a:schemeClr val="tx1"/>
-                </a:solidFill>
-                <a:effectLst/>
-                <a:latin typeface="+mn-lt"/>
-                <a:ea typeface="+mn-ea"/>
-                <a:cs typeface="+mn-cs"/>
-              </a:rPr>
-              <a:t> \\ </a:t>
-            </a:r>
-          </a:p>
-          <a:p>
-            <a:r>
-              <a:rPr lang="en-US" sz="1200" kern="1200" dirty="0">
-                <a:solidFill>
-                  <a:schemeClr val="tx1"/>
-                </a:solidFill>
-                <a:effectLst/>
-                <a:latin typeface="+mn-lt"/>
-                <a:ea typeface="+mn-ea"/>
-                <a:cs typeface="+mn-cs"/>
-              </a:rPr>
-              <a:t>      \frac{-(T_1 + T_2) \sin\phi}{m} \\</a:t>
-            </a:r>
-          </a:p>
-          <a:p>
-            <a:r>
-              <a:rPr lang="en-US" sz="1200" kern="1200" dirty="0">
-                <a:solidFill>
-                  <a:schemeClr val="tx1"/>
-                </a:solidFill>
-                <a:effectLst/>
-                <a:latin typeface="+mn-lt"/>
-                <a:ea typeface="+mn-ea"/>
-                <a:cs typeface="+mn-cs"/>
-              </a:rPr>
-              <a:t>      </a:t>
-            </a:r>
-            <a:r>
-              <a:rPr lang="en-US" sz="1200" kern="1200" dirty="0" err="1">
-                <a:solidFill>
-                  <a:schemeClr val="tx1"/>
-                </a:solidFill>
-                <a:effectLst/>
-                <a:latin typeface="+mn-lt"/>
-                <a:ea typeface="+mn-ea"/>
-                <a:cs typeface="+mn-cs"/>
-              </a:rPr>
-              <a:t>v_y</a:t>
-            </a:r>
-            <a:r>
-              <a:rPr lang="en-US" sz="1200" kern="1200" dirty="0">
-                <a:solidFill>
-                  <a:schemeClr val="tx1"/>
-                </a:solidFill>
-                <a:effectLst/>
-                <a:latin typeface="+mn-lt"/>
-                <a:ea typeface="+mn-ea"/>
-                <a:cs typeface="+mn-cs"/>
-              </a:rPr>
-              <a:t> \\</a:t>
-            </a:r>
-          </a:p>
-          <a:p>
-            <a:r>
-              <a:rPr lang="en-US" sz="1200" kern="1200" dirty="0">
-                <a:solidFill>
-                  <a:schemeClr val="tx1"/>
-                </a:solidFill>
-                <a:effectLst/>
-                <a:latin typeface="+mn-lt"/>
-                <a:ea typeface="+mn-ea"/>
-                <a:cs typeface="+mn-cs"/>
-              </a:rPr>
-              <a:t>      \frac{(T_1 + T_2) \cos\phi}{m}  - g \\</a:t>
-            </a:r>
-          </a:p>
-          <a:p>
-            <a:r>
-              <a:rPr lang="en-US" sz="1200" kern="1200" dirty="0">
-                <a:solidFill>
-                  <a:schemeClr val="tx1"/>
-                </a:solidFill>
-                <a:effectLst/>
-                <a:latin typeface="+mn-lt"/>
-                <a:ea typeface="+mn-ea"/>
-                <a:cs typeface="+mn-cs"/>
-              </a:rPr>
-              <a:t>      \omega \\</a:t>
-            </a:r>
-          </a:p>
-          <a:p>
-            <a:r>
-              <a:rPr lang="en-US" sz="1200" kern="1200" dirty="0">
-                <a:solidFill>
-                  <a:schemeClr val="tx1"/>
-                </a:solidFill>
-                <a:effectLst/>
-                <a:latin typeface="+mn-lt"/>
-                <a:ea typeface="+mn-ea"/>
-                <a:cs typeface="+mn-cs"/>
-              </a:rPr>
-              <a:t>      \frac{(T_2 - T_1) \ell}{I_{</a:t>
-            </a:r>
-            <a:r>
-              <a:rPr lang="en-US" sz="1200" kern="1200" dirty="0" err="1">
-                <a:solidFill>
-                  <a:schemeClr val="tx1"/>
-                </a:solidFill>
-                <a:effectLst/>
-                <a:latin typeface="+mn-lt"/>
-                <a:ea typeface="+mn-ea"/>
-                <a:cs typeface="+mn-cs"/>
-              </a:rPr>
-              <a:t>zz</a:t>
-            </a:r>
-            <a:r>
-              <a:rPr lang="en-US" sz="1200" kern="1200" dirty="0">
-                <a:solidFill>
-                  <a:schemeClr val="tx1"/>
-                </a:solidFill>
-                <a:effectLst/>
-                <a:latin typeface="+mn-lt"/>
-                <a:ea typeface="+mn-ea"/>
-                <a:cs typeface="+mn-cs"/>
-              </a:rPr>
-              <a:t>}}</a:t>
-            </a:r>
-          </a:p>
-          <a:p>
-            <a:r>
-              <a:rPr lang="en-US" sz="1200" kern="1200" dirty="0">
-                <a:solidFill>
-                  <a:schemeClr val="tx1"/>
-                </a:solidFill>
-                <a:effectLst/>
-                <a:latin typeface="+mn-lt"/>
-                <a:ea typeface="+mn-ea"/>
-                <a:cs typeface="+mn-cs"/>
-              </a:rPr>
-              <a:t>    \end{</a:t>
-            </a:r>
-            <a:r>
-              <a:rPr lang="en-US" sz="1200" kern="1200" dirty="0" err="1">
-                <a:solidFill>
-                  <a:schemeClr val="tx1"/>
-                </a:solidFill>
-                <a:effectLst/>
-                <a:latin typeface="+mn-lt"/>
-                <a:ea typeface="+mn-ea"/>
-                <a:cs typeface="+mn-cs"/>
-              </a:rPr>
-              <a:t>bmatrix</a:t>
-            </a:r>
-            <a:r>
-              <a:rPr lang="en-US" sz="1200" kern="1200" dirty="0">
-                <a:solidFill>
-                  <a:schemeClr val="tx1"/>
-                </a:solidFill>
-                <a:effectLst/>
-                <a:latin typeface="+mn-lt"/>
-                <a:ea typeface="+mn-ea"/>
-                <a:cs typeface="+mn-cs"/>
-              </a:rPr>
-              <a:t>}, \quad T_1, T_2 \in [0, T_{\max}]</a:t>
-            </a:r>
-          </a:p>
-          <a:p>
             <a:endParaRPr lang="en-US" dirty="0"/>
           </a:p>
         </p:txBody>
@@ -2651,368 +1529,6 @@
           <a:bodyPr/>
           <a:lstStyle/>
           <a:p>
-            <a:pPr marL="171450" indent="-171450">
-              <a:buFont typeface="Arial" charset="0"/>
-              <a:buChar char="•"/>
-            </a:pPr>
-            <a:r>
-              <a:rPr lang="en-US" sz="1200" kern="1200" dirty="0">
-                <a:solidFill>
-                  <a:schemeClr val="tx1"/>
-                </a:solidFill>
-                <a:effectLst/>
-                <a:latin typeface="+mn-lt"/>
-                <a:ea typeface="+mn-ea"/>
-                <a:cs typeface="+mn-cs"/>
-              </a:rPr>
-              <a:t> A closer inspection of this system shows that it is possible to understand the</a:t>
-            </a:r>
-            <a:r>
-              <a:rPr lang="en-US" sz="1200" kern="1200" baseline="0" dirty="0">
-                <a:solidFill>
-                  <a:schemeClr val="tx1"/>
-                </a:solidFill>
-                <a:effectLst/>
-                <a:latin typeface="+mn-lt"/>
-                <a:ea typeface="+mn-ea"/>
-                <a:cs typeface="+mn-cs"/>
-              </a:rPr>
-              <a:t> </a:t>
-            </a:r>
-            <a:r>
-              <a:rPr lang="en-US" sz="1200" kern="1200" dirty="0">
-                <a:solidFill>
-                  <a:schemeClr val="tx1"/>
-                </a:solidFill>
-                <a:effectLst/>
-                <a:latin typeface="+mn-lt"/>
-                <a:ea typeface="+mn-ea"/>
-                <a:cs typeface="+mn-cs"/>
-              </a:rPr>
-              <a:t>trajectories of the system by exploiting the particular structure of the dynamics.</a:t>
-            </a:r>
-          </a:p>
-          <a:p>
-            <a:pPr marL="171450" indent="-171450">
-              <a:buFont typeface="Arial" charset="0"/>
-              <a:buChar char="•"/>
-            </a:pPr>
-            <a:endParaRPr lang="en-US" sz="1200" kern="1200" dirty="0">
-              <a:solidFill>
-                <a:schemeClr val="tx1"/>
-              </a:solidFill>
-              <a:effectLst/>
-              <a:latin typeface="+mn-lt"/>
-              <a:ea typeface="+mn-ea"/>
-              <a:cs typeface="+mn-cs"/>
-            </a:endParaRPr>
-          </a:p>
-          <a:p>
-            <a:pPr marL="0" marR="0" indent="0" algn="l" defTabSz="914400" rtl="0" eaLnBrk="1" fontAlgn="auto" latinLnBrk="0" hangingPunct="1">
-              <a:lnSpc>
-                <a:spcPct val="100000"/>
-              </a:lnSpc>
-              <a:spcBef>
-                <a:spcPts val="0"/>
-              </a:spcBef>
-              <a:spcAft>
-                <a:spcPts val="0"/>
-              </a:spcAft>
-              <a:buClrTx/>
-              <a:buSzTx/>
-              <a:buFontTx/>
-              <a:buNone/>
-              <a:tabLst/>
-              <a:defRPr/>
-            </a:pPr>
-            <a:endParaRPr lang="en-US" sz="1200" kern="1200" dirty="0">
-              <a:solidFill>
-                <a:schemeClr val="tx1"/>
-              </a:solidFill>
-              <a:effectLst/>
-              <a:latin typeface="+mn-lt"/>
-              <a:ea typeface="+mn-ea"/>
-              <a:cs typeface="+mn-cs"/>
-            </a:endParaRPr>
-          </a:p>
-          <a:p>
-            <a:pPr marL="0" marR="0" indent="0" algn="l" defTabSz="914400" rtl="0" eaLnBrk="1" fontAlgn="auto" latinLnBrk="0" hangingPunct="1">
-              <a:lnSpc>
-                <a:spcPct val="100000"/>
-              </a:lnSpc>
-              <a:spcBef>
-                <a:spcPts val="0"/>
-              </a:spcBef>
-              <a:spcAft>
-                <a:spcPts val="0"/>
-              </a:spcAft>
-              <a:buClrTx/>
-              <a:buSzTx/>
-              <a:buFontTx/>
-              <a:buNone/>
-              <a:tabLst/>
-              <a:defRPr/>
-            </a:pPr>
-            <a:endParaRPr lang="en-US" sz="1200" kern="1200" dirty="0">
-              <a:solidFill>
-                <a:schemeClr val="tx1"/>
-              </a:solidFill>
-              <a:effectLst/>
-              <a:latin typeface="+mn-lt"/>
-              <a:ea typeface="+mn-ea"/>
-              <a:cs typeface="+mn-cs"/>
-            </a:endParaRPr>
-          </a:p>
-          <a:p>
-            <a:pPr marL="0" marR="0" indent="0" algn="l" defTabSz="914400" rtl="0" eaLnBrk="1" fontAlgn="auto" latinLnBrk="0" hangingPunct="1">
-              <a:lnSpc>
-                <a:spcPct val="100000"/>
-              </a:lnSpc>
-              <a:spcBef>
-                <a:spcPts val="0"/>
-              </a:spcBef>
-              <a:spcAft>
-                <a:spcPts val="0"/>
-              </a:spcAft>
-              <a:buClrTx/>
-              <a:buSzTx/>
-              <a:buFontTx/>
-              <a:buNone/>
-              <a:tabLst/>
-              <a:defRPr/>
-            </a:pPr>
-            <a:r>
-              <a:rPr lang="en-US" sz="1200" kern="1200" dirty="0">
-                <a:solidFill>
-                  <a:schemeClr val="tx1"/>
-                </a:solidFill>
-                <a:effectLst/>
-                <a:latin typeface="+mn-lt"/>
-                <a:ea typeface="+mn-ea"/>
-                <a:cs typeface="+mn-cs"/>
-              </a:rPr>
-              <a:t>Omega/v = tan \zeta,</a:t>
-            </a:r>
-            <a:r>
-              <a:rPr lang="en-US" sz="1200" kern="1200" baseline="0" dirty="0">
-                <a:solidFill>
-                  <a:schemeClr val="tx1"/>
-                </a:solidFill>
-                <a:effectLst/>
-                <a:latin typeface="+mn-lt"/>
-                <a:ea typeface="+mn-ea"/>
-                <a:cs typeface="+mn-cs"/>
-              </a:rPr>
-              <a:t> and we obtain this mode</a:t>
-            </a:r>
-            <a:endParaRPr lang="en-US" sz="1200" kern="1200" dirty="0">
-              <a:solidFill>
-                <a:schemeClr val="tx1"/>
-              </a:solidFill>
-              <a:effectLst/>
-              <a:latin typeface="+mn-lt"/>
-              <a:ea typeface="+mn-ea"/>
-              <a:cs typeface="+mn-cs"/>
-            </a:endParaRPr>
-          </a:p>
-          <a:p>
-            <a:pPr marL="0" marR="0" indent="0" algn="l" defTabSz="914400" rtl="0" eaLnBrk="1" fontAlgn="auto" latinLnBrk="0" hangingPunct="1">
-              <a:lnSpc>
-                <a:spcPct val="100000"/>
-              </a:lnSpc>
-              <a:spcBef>
-                <a:spcPts val="0"/>
-              </a:spcBef>
-              <a:spcAft>
-                <a:spcPts val="0"/>
-              </a:spcAft>
-              <a:buClrTx/>
-              <a:buSzTx/>
-              <a:buFontTx/>
-              <a:buNone/>
-              <a:tabLst/>
-              <a:defRPr/>
-            </a:pPr>
-            <a:endParaRPr lang="en-US" sz="1200" kern="1200" dirty="0">
-              <a:solidFill>
-                <a:schemeClr val="tx1"/>
-              </a:solidFill>
-              <a:effectLst/>
-              <a:latin typeface="+mn-lt"/>
-              <a:ea typeface="+mn-ea"/>
-              <a:cs typeface="+mn-cs"/>
-            </a:endParaRPr>
-          </a:p>
-          <a:p>
-            <a:pPr marL="0" marR="0" lvl="0" indent="0" algn="l" defTabSz="914400" rtl="0" eaLnBrk="1" fontAlgn="auto" latinLnBrk="0" hangingPunct="1">
-              <a:lnSpc>
-                <a:spcPct val="100000"/>
-              </a:lnSpc>
-              <a:spcBef>
-                <a:spcPts val="0"/>
-              </a:spcBef>
-              <a:spcAft>
-                <a:spcPts val="0"/>
-              </a:spcAft>
-              <a:buClrTx/>
-              <a:buSzTx/>
-              <a:buFontTx/>
-              <a:buNone/>
-              <a:tabLst/>
-              <a:defRPr/>
-            </a:pPr>
-            <a:r>
-              <a:rPr lang="en-US" sz="1200" kern="1200" dirty="0">
-                <a:solidFill>
-                  <a:schemeClr val="tx1"/>
-                </a:solidFill>
-                <a:effectLst/>
-                <a:latin typeface="+mn-lt"/>
-                <a:ea typeface="+mn-ea"/>
-                <a:cs typeface="+mn-cs"/>
-              </a:rPr>
-              <a:t>\dot{x} = \cos \theta \, v\</a:t>
-            </a:r>
-            <a:r>
-              <a:rPr lang="en-US" sz="1200" kern="1200" dirty="0" err="1">
-                <a:solidFill>
-                  <a:schemeClr val="tx1"/>
-                </a:solidFill>
-                <a:effectLst/>
-                <a:latin typeface="+mn-lt"/>
-                <a:ea typeface="+mn-ea"/>
-                <a:cs typeface="+mn-cs"/>
-              </a:rPr>
-              <a:t>qquad</a:t>
-            </a:r>
-            <a:r>
-              <a:rPr lang="en-US" sz="1200" kern="1200" dirty="0">
-                <a:solidFill>
-                  <a:schemeClr val="tx1"/>
-                </a:solidFill>
-                <a:effectLst/>
-                <a:latin typeface="+mn-lt"/>
-                <a:ea typeface="+mn-ea"/>
-                <a:cs typeface="+mn-cs"/>
-              </a:rPr>
-              <a:t> \dot{y} = \sin \theta \, v, \</a:t>
-            </a:r>
-            <a:r>
-              <a:rPr lang="en-US" sz="1200" kern="1200" dirty="0" err="1">
-                <a:solidFill>
-                  <a:schemeClr val="tx1"/>
-                </a:solidFill>
-                <a:effectLst/>
-                <a:latin typeface="+mn-lt"/>
-                <a:ea typeface="+mn-ea"/>
-                <a:cs typeface="+mn-cs"/>
-              </a:rPr>
-              <a:t>qquad</a:t>
-            </a:r>
-            <a:r>
-              <a:rPr lang="en-US" sz="1200" kern="1200" dirty="0">
-                <a:solidFill>
-                  <a:schemeClr val="tx1"/>
-                </a:solidFill>
-                <a:effectLst/>
-                <a:latin typeface="+mn-lt"/>
-                <a:ea typeface="+mn-ea"/>
-                <a:cs typeface="+mn-cs"/>
-              </a:rPr>
-              <a:t> \dot{\theta} = \frac{v}{L}\tan \phi </a:t>
-            </a:r>
-          </a:p>
-          <a:p>
-            <a:endParaRPr lang="pt-BR" dirty="0"/>
-          </a:p>
-          <a:p>
-            <a:endParaRPr lang="pt-BR" dirty="0"/>
-          </a:p>
-          <a:p>
-            <a:r>
-              <a:rPr lang="pt-BR" dirty="0"/>
-              <a:t>\</a:t>
-            </a:r>
-            <a:r>
-              <a:rPr lang="pt-BR" dirty="0" err="1"/>
-              <a:t>dot</a:t>
-            </a:r>
-            <a:r>
-              <a:rPr lang="pt-BR" dirty="0"/>
-              <a:t>{\</a:t>
-            </a:r>
-            <a:r>
-              <a:rPr lang="pt-BR" dirty="0" err="1"/>
-              <a:t>x</a:t>
-            </a:r>
-            <a:r>
-              <a:rPr lang="pt-BR" dirty="0"/>
-              <a:t>} = \ad(\</a:t>
-            </a:r>
-            <a:r>
-              <a:rPr lang="pt-BR" dirty="0" err="1"/>
-              <a:t>x</a:t>
-            </a:r>
-            <a:r>
-              <a:rPr lang="pt-BR" dirty="0"/>
-              <a:t>, \</a:t>
-            </a:r>
-            <a:r>
-              <a:rPr lang="pt-BR" dirty="0" err="1"/>
-              <a:t>uc</a:t>
-            </a:r>
-            <a:r>
-              <a:rPr lang="pt-BR" dirty="0"/>
-              <a:t>), \</a:t>
-            </a:r>
-            <a:r>
-              <a:rPr lang="pt-BR" dirty="0" err="1"/>
-              <a:t>qquad</a:t>
-            </a:r>
-            <a:r>
-              <a:rPr lang="pt-BR" dirty="0"/>
-              <a:t> \</a:t>
-            </a:r>
-            <a:r>
-              <a:rPr lang="pt-BR" dirty="0" err="1"/>
-              <a:t>x</a:t>
-            </a:r>
-            <a:r>
-              <a:rPr lang="pt-BR" dirty="0"/>
-              <a:t>(0) = \x_0,\</a:t>
-            </a:r>
-            <a:r>
-              <a:rPr lang="pt-BR" dirty="0" err="1"/>
-              <a:t>qquad</a:t>
-            </a:r>
-            <a:r>
-              <a:rPr lang="pt-BR" dirty="0"/>
-              <a:t> \</a:t>
-            </a:r>
-            <a:r>
-              <a:rPr lang="pt-BR" dirty="0" err="1"/>
-              <a:t>x</a:t>
-            </a:r>
-            <a:r>
-              <a:rPr lang="pt-BR" dirty="0"/>
-              <a:t>(</a:t>
-            </a:r>
-            <a:r>
-              <a:rPr lang="pt-BR" dirty="0" err="1"/>
-              <a:t>t_f</a:t>
-            </a:r>
-            <a:r>
-              <a:rPr lang="pt-BR" dirty="0"/>
-              <a:t>) = \</a:t>
-            </a:r>
-            <a:r>
-              <a:rPr lang="pt-BR" dirty="0" err="1"/>
-              <a:t>x_f</a:t>
-            </a:r>
-            <a:r>
-              <a:rPr lang="pt-BR" dirty="0"/>
-              <a:t> </a:t>
-            </a:r>
             <a:endParaRPr lang="en-US" dirty="0"/>
           </a:p>
         </p:txBody>
@@ -3024,7 +1540,7 @@
             <a:spLocks noGrp="1"/>
           </p:cNvSpPr>
           <p:nvPr>
-            <p:ph type="sldNum" sz="quarter" idx="10"/>
+            <p:ph type="sldNum" sz="quarter" idx="5"/>
           </p:nvPr>
         </p:nvSpPr>
         <p:spPr/>
@@ -3034,7 +1550,7 @@
           <a:p>
             <a:fld id="{63B2D7EC-928D-0645-AAE8-498D7443D60E}" type="slidenum">
               <a:rPr lang="en-US" smtClean="0"/>
-              <a:t>22</a:t>
+              <a:t>21</a:t>
             </a:fld>
             <a:endParaRPr lang="en-US"/>
           </a:p>
@@ -3043,7 +1559,7 @@
     </p:spTree>
     <p:extLst>
       <p:ext uri="{BB962C8B-B14F-4D97-AF65-F5344CB8AC3E}">
-        <p14:creationId xmlns:p14="http://schemas.microsoft.com/office/powerpoint/2010/main" val="1532091701"/>
+        <p14:creationId xmlns:p14="http://schemas.microsoft.com/office/powerpoint/2010/main" val="2272202144"/>
       </p:ext>
     </p:extLst>
   </p:cSld>
@@ -3097,613 +1613,10 @@
           <a:bodyPr/>
           <a:lstStyle/>
           <a:p>
-            <a:pPr marL="171450" marR="0" indent="-171450" algn="l" defTabSz="914400" rtl="0" eaLnBrk="1" fontAlgn="auto" latinLnBrk="0" hangingPunct="1">
-              <a:lnSpc>
-                <a:spcPct val="100000"/>
-              </a:lnSpc>
-              <a:spcBef>
-                <a:spcPts val="0"/>
-              </a:spcBef>
-              <a:spcAft>
-                <a:spcPts val="0"/>
-              </a:spcAft>
-              <a:buClrTx/>
-              <a:buSzTx/>
+            <a:pPr marL="171450" indent="-171450">
               <a:buFont typeface="Arial" charset="0"/>
               <a:buChar char="•"/>
-              <a:tabLst/>
-              <a:defRPr/>
             </a:pPr>
-            <a:endParaRPr lang="en-US" sz="1200" kern="1200" dirty="0">
-              <a:solidFill>
-                <a:schemeClr val="tx1"/>
-              </a:solidFill>
-              <a:effectLst/>
-              <a:latin typeface="+mn-lt"/>
-              <a:ea typeface="+mn-ea"/>
-              <a:cs typeface="+mn-cs"/>
-            </a:endParaRPr>
-          </a:p>
-          <a:p>
-            <a:pPr marL="171450" marR="0" indent="-171450" algn="l" defTabSz="914400" rtl="0" eaLnBrk="1" fontAlgn="auto" latinLnBrk="0" hangingPunct="1">
-              <a:lnSpc>
-                <a:spcPct val="100000"/>
-              </a:lnSpc>
-              <a:spcBef>
-                <a:spcPts val="0"/>
-              </a:spcBef>
-              <a:spcAft>
-                <a:spcPts val="0"/>
-              </a:spcAft>
-              <a:buClrTx/>
-              <a:buSzTx/>
-              <a:buFont typeface="Arial" charset="0"/>
-              <a:buChar char="•"/>
-              <a:tabLst/>
-              <a:defRPr/>
-            </a:pPr>
-            <a:r>
-              <a:rPr lang="en-US" sz="1200" kern="1200" dirty="0">
-                <a:solidFill>
-                  <a:schemeClr val="tx1"/>
-                </a:solidFill>
-                <a:effectLst/>
-                <a:latin typeface="+mn-lt"/>
-                <a:ea typeface="+mn-ea"/>
-                <a:cs typeface="+mn-cs"/>
-              </a:rPr>
-              <a:t>Suppose that we are given a trajectory for the rear wheels of the system, </a:t>
-            </a:r>
-            <a:r>
-              <a:rPr lang="en-US" sz="1200" kern="1200" dirty="0" err="1">
-                <a:solidFill>
-                  <a:schemeClr val="tx1"/>
-                </a:solidFill>
-                <a:effectLst/>
-                <a:latin typeface="+mn-lt"/>
-                <a:ea typeface="+mn-ea"/>
-                <a:cs typeface="+mn-cs"/>
-              </a:rPr>
-              <a:t>xd</a:t>
-            </a:r>
-            <a:r>
-              <a:rPr lang="en-US" sz="1200" kern="1200" dirty="0">
-                <a:solidFill>
-                  <a:schemeClr val="tx1"/>
-                </a:solidFill>
-                <a:effectLst/>
-                <a:latin typeface="+mn-lt"/>
-                <a:ea typeface="+mn-ea"/>
-                <a:cs typeface="+mn-cs"/>
-              </a:rPr>
-              <a:t> (t) and</a:t>
-            </a:r>
-            <a:r>
-              <a:rPr lang="en-US" sz="1200" kern="1200" baseline="0" dirty="0">
-                <a:solidFill>
-                  <a:schemeClr val="tx1"/>
-                </a:solidFill>
-                <a:effectLst/>
-                <a:latin typeface="+mn-lt"/>
-                <a:ea typeface="+mn-ea"/>
-                <a:cs typeface="+mn-cs"/>
-              </a:rPr>
-              <a:t> </a:t>
-            </a:r>
-            <a:r>
-              <a:rPr lang="en-US" sz="1200" kern="1200" dirty="0">
-                <a:solidFill>
-                  <a:schemeClr val="tx1"/>
-                </a:solidFill>
-                <a:effectLst/>
-                <a:latin typeface="+mn-lt"/>
-                <a:ea typeface="+mn-ea"/>
-                <a:cs typeface="+mn-cs"/>
-              </a:rPr>
-              <a:t>yd (t).</a:t>
-            </a:r>
-          </a:p>
-          <a:p>
-            <a:pPr marL="0" marR="0" indent="0" algn="l" defTabSz="914400" rtl="0" eaLnBrk="1" fontAlgn="auto" latinLnBrk="0" hangingPunct="1">
-              <a:lnSpc>
-                <a:spcPct val="100000"/>
-              </a:lnSpc>
-              <a:spcBef>
-                <a:spcPts val="0"/>
-              </a:spcBef>
-              <a:spcAft>
-                <a:spcPts val="0"/>
-              </a:spcAft>
-              <a:buClrTx/>
-              <a:buSzTx/>
-              <a:buFontTx/>
-              <a:buNone/>
-              <a:tabLst/>
-              <a:defRPr/>
-            </a:pPr>
-            <a:endParaRPr lang="en-US" sz="1200" kern="1200" dirty="0">
-              <a:solidFill>
-                <a:schemeClr val="tx1"/>
-              </a:solidFill>
-              <a:effectLst/>
-              <a:latin typeface="+mn-lt"/>
-              <a:ea typeface="+mn-ea"/>
-              <a:cs typeface="+mn-cs"/>
-            </a:endParaRPr>
-          </a:p>
-          <a:p>
-            <a:r>
-              <a:rPr lang="en-US" sz="1200" kern="1200" dirty="0">
-                <a:solidFill>
-                  <a:schemeClr val="tx1"/>
-                </a:solidFill>
-                <a:effectLst/>
-                <a:latin typeface="+mn-lt"/>
-                <a:ea typeface="+mn-ea"/>
-                <a:cs typeface="+mn-cs"/>
-              </a:rPr>
-              <a:t> \dot{\theta} = \frac{v}{L}\tan \phi \</a:t>
-            </a:r>
-            <a:r>
-              <a:rPr lang="en-US" sz="1200" kern="1200" dirty="0" err="1">
-                <a:solidFill>
-                  <a:schemeClr val="tx1"/>
-                </a:solidFill>
-                <a:effectLst/>
-                <a:latin typeface="+mn-lt"/>
-                <a:ea typeface="+mn-ea"/>
-                <a:cs typeface="+mn-cs"/>
-              </a:rPr>
-              <a:t>qquad</a:t>
-            </a:r>
-            <a:r>
-              <a:rPr lang="en-US" sz="1200" kern="1200" dirty="0">
-                <a:solidFill>
-                  <a:schemeClr val="tx1"/>
-                </a:solidFill>
-                <a:effectLst/>
-                <a:latin typeface="+mn-lt"/>
-                <a:ea typeface="+mn-ea"/>
-                <a:cs typeface="+mn-cs"/>
-              </a:rPr>
-              <a:t> \</a:t>
-            </a:r>
-            <a:r>
-              <a:rPr lang="en-US" sz="1200" kern="1200" dirty="0" err="1">
-                <a:solidFill>
-                  <a:schemeClr val="tx1"/>
-                </a:solidFill>
-                <a:effectLst/>
-                <a:latin typeface="+mn-lt"/>
-                <a:ea typeface="+mn-ea"/>
-                <a:cs typeface="+mn-cs"/>
-              </a:rPr>
-              <a:t>Rightarrow</a:t>
-            </a:r>
-            <a:r>
-              <a:rPr lang="en-US" sz="1200" kern="1200" dirty="0">
-                <a:solidFill>
-                  <a:schemeClr val="tx1"/>
-                </a:solidFill>
-                <a:effectLst/>
-                <a:latin typeface="+mn-lt"/>
-                <a:ea typeface="+mn-ea"/>
-                <a:cs typeface="+mn-cs"/>
-              </a:rPr>
-              <a:t> \</a:t>
-            </a:r>
-            <a:r>
-              <a:rPr lang="en-US" sz="1200" kern="1200" dirty="0" err="1">
-                <a:solidFill>
-                  <a:schemeClr val="tx1"/>
-                </a:solidFill>
-                <a:effectLst/>
-                <a:latin typeface="+mn-lt"/>
-                <a:ea typeface="+mn-ea"/>
-                <a:cs typeface="+mn-cs"/>
-              </a:rPr>
-              <a:t>qquad</a:t>
-            </a:r>
-            <a:r>
-              <a:rPr lang="en-US" sz="1200" kern="1200" dirty="0">
-                <a:solidFill>
-                  <a:schemeClr val="tx1"/>
-                </a:solidFill>
-                <a:effectLst/>
-                <a:latin typeface="+mn-lt"/>
-                <a:ea typeface="+mn-ea"/>
-                <a:cs typeface="+mn-cs"/>
-              </a:rPr>
-              <a:t> \phi = \tan^{-1}\left(\frac{L\,\dot{\theta}}{v} \right)</a:t>
-            </a:r>
-          </a:p>
-          <a:p>
-            <a:pPr marL="0" marR="0" indent="0" algn="l" defTabSz="914400" rtl="0" eaLnBrk="1" fontAlgn="auto" latinLnBrk="0" hangingPunct="1">
-              <a:lnSpc>
-                <a:spcPct val="100000"/>
-              </a:lnSpc>
-              <a:spcBef>
-                <a:spcPts val="0"/>
-              </a:spcBef>
-              <a:spcAft>
-                <a:spcPts val="0"/>
-              </a:spcAft>
-              <a:buClrTx/>
-              <a:buSzTx/>
-              <a:buFontTx/>
-              <a:buNone/>
-              <a:tabLst/>
-              <a:defRPr/>
-            </a:pPr>
-            <a:endParaRPr lang="en-US" sz="1200" kern="1200" dirty="0">
-              <a:solidFill>
-                <a:schemeClr val="tx1"/>
-              </a:solidFill>
-              <a:effectLst/>
-              <a:latin typeface="+mn-lt"/>
-              <a:ea typeface="+mn-ea"/>
-              <a:cs typeface="+mn-cs"/>
-            </a:endParaRPr>
-          </a:p>
-          <a:p>
-            <a:pPr marL="0" marR="0" indent="0" algn="l" defTabSz="914400" rtl="0" eaLnBrk="1" fontAlgn="auto" latinLnBrk="0" hangingPunct="1">
-              <a:lnSpc>
-                <a:spcPct val="100000"/>
-              </a:lnSpc>
-              <a:spcBef>
-                <a:spcPts val="0"/>
-              </a:spcBef>
-              <a:spcAft>
-                <a:spcPts val="0"/>
-              </a:spcAft>
-              <a:buClrTx/>
-              <a:buSzTx/>
-              <a:buFontTx/>
-              <a:buNone/>
-              <a:tabLst/>
-              <a:defRPr/>
-            </a:pPr>
-            <a:r>
-              <a:rPr lang="en-US" sz="1200" kern="1200" dirty="0">
-                <a:solidFill>
-                  <a:schemeClr val="tx1"/>
-                </a:solidFill>
-                <a:effectLst/>
-                <a:latin typeface="+mn-lt"/>
-                <a:ea typeface="+mn-ea"/>
-                <a:cs typeface="+mn-cs"/>
-              </a:rPr>
-              <a:t>dot{x} = v\cos\theta \</a:t>
-            </a:r>
-            <a:r>
-              <a:rPr lang="en-US" sz="1200" kern="1200" dirty="0" err="1">
-                <a:solidFill>
-                  <a:schemeClr val="tx1"/>
-                </a:solidFill>
-                <a:effectLst/>
-                <a:latin typeface="+mn-lt"/>
-                <a:ea typeface="+mn-ea"/>
-                <a:cs typeface="+mn-cs"/>
-              </a:rPr>
-              <a:t>qquad</a:t>
-            </a:r>
-            <a:r>
-              <a:rPr lang="en-US" sz="1200" kern="1200" dirty="0">
-                <a:solidFill>
-                  <a:schemeClr val="tx1"/>
-                </a:solidFill>
-                <a:effectLst/>
-                <a:latin typeface="+mn-lt"/>
-                <a:ea typeface="+mn-ea"/>
-                <a:cs typeface="+mn-cs"/>
-              </a:rPr>
-              <a:t>  \</a:t>
-            </a:r>
-            <a:r>
-              <a:rPr lang="en-US" sz="1200" kern="1200" dirty="0" err="1">
-                <a:solidFill>
-                  <a:schemeClr val="tx1"/>
-                </a:solidFill>
-                <a:effectLst/>
-                <a:latin typeface="+mn-lt"/>
-                <a:ea typeface="+mn-ea"/>
-                <a:cs typeface="+mn-cs"/>
-              </a:rPr>
-              <a:t>Rightarrow</a:t>
-            </a:r>
-            <a:r>
-              <a:rPr lang="en-US" sz="1200" kern="1200" dirty="0">
-                <a:solidFill>
-                  <a:schemeClr val="tx1"/>
-                </a:solidFill>
-                <a:effectLst/>
-                <a:latin typeface="+mn-lt"/>
-                <a:ea typeface="+mn-ea"/>
-                <a:cs typeface="+mn-cs"/>
-              </a:rPr>
-              <a:t>  \</a:t>
-            </a:r>
-            <a:r>
-              <a:rPr lang="en-US" sz="1200" kern="1200" dirty="0" err="1">
-                <a:solidFill>
-                  <a:schemeClr val="tx1"/>
-                </a:solidFill>
-                <a:effectLst/>
-                <a:latin typeface="+mn-lt"/>
-                <a:ea typeface="+mn-ea"/>
-                <a:cs typeface="+mn-cs"/>
-              </a:rPr>
-              <a:t>qquad</a:t>
-            </a:r>
-            <a:r>
-              <a:rPr lang="en-US" sz="1200" kern="1200" dirty="0">
-                <a:solidFill>
-                  <a:schemeClr val="tx1"/>
-                </a:solidFill>
-                <a:effectLst/>
-                <a:latin typeface="+mn-lt"/>
-                <a:ea typeface="+mn-ea"/>
-                <a:cs typeface="+mn-cs"/>
-              </a:rPr>
-              <a:t> v = \dot{x} / \cos\theta \</a:t>
-            </a:r>
-            <a:r>
-              <a:rPr lang="en-US" sz="1200" kern="1200" dirty="0" err="1">
-                <a:solidFill>
-                  <a:schemeClr val="tx1"/>
-                </a:solidFill>
-                <a:effectLst/>
-                <a:latin typeface="+mn-lt"/>
-                <a:ea typeface="+mn-ea"/>
-                <a:cs typeface="+mn-cs"/>
-              </a:rPr>
-              <a:t>qquad</a:t>
-            </a:r>
-            <a:r>
-              <a:rPr lang="en-US" sz="1200" kern="1200" dirty="0">
-                <a:solidFill>
-                  <a:schemeClr val="tx1"/>
-                </a:solidFill>
-                <a:effectLst/>
-                <a:latin typeface="+mn-lt"/>
-                <a:ea typeface="+mn-ea"/>
-                <a:cs typeface="+mn-cs"/>
-              </a:rPr>
-              <a:t> (\text{or } v =\dot{y} / \sin\theta  )</a:t>
-            </a:r>
-          </a:p>
-          <a:p>
-            <a:pPr marL="0" marR="0" indent="0" algn="l" defTabSz="914400" rtl="0" eaLnBrk="1" fontAlgn="auto" latinLnBrk="0" hangingPunct="1">
-              <a:lnSpc>
-                <a:spcPct val="100000"/>
-              </a:lnSpc>
-              <a:spcBef>
-                <a:spcPts val="0"/>
-              </a:spcBef>
-              <a:spcAft>
-                <a:spcPts val="0"/>
-              </a:spcAft>
-              <a:buClrTx/>
-              <a:buSzTx/>
-              <a:buFontTx/>
-              <a:buNone/>
-              <a:tabLst/>
-              <a:defRPr/>
-            </a:pPr>
-            <a:endParaRPr lang="en-US" sz="1200" kern="1200" dirty="0">
-              <a:solidFill>
-                <a:schemeClr val="tx1"/>
-              </a:solidFill>
-              <a:effectLst/>
-              <a:latin typeface="+mn-lt"/>
-              <a:ea typeface="+mn-ea"/>
-              <a:cs typeface="+mn-cs"/>
-            </a:endParaRPr>
-          </a:p>
-          <a:p>
-            <a:pPr marL="0" marR="0" indent="0" algn="l" defTabSz="914400" rtl="0" eaLnBrk="1" fontAlgn="auto" latinLnBrk="0" hangingPunct="1">
-              <a:lnSpc>
-                <a:spcPct val="100000"/>
-              </a:lnSpc>
-              <a:spcBef>
-                <a:spcPts val="0"/>
-              </a:spcBef>
-              <a:spcAft>
-                <a:spcPts val="0"/>
-              </a:spcAft>
-              <a:buClrTx/>
-              <a:buSzTx/>
-              <a:buFontTx/>
-              <a:buNone/>
-              <a:tabLst/>
-              <a:defRPr/>
-            </a:pPr>
-            <a:endParaRPr lang="en-US" sz="1200" kern="1200" dirty="0">
-              <a:solidFill>
-                <a:schemeClr val="tx1"/>
-              </a:solidFill>
-              <a:effectLst/>
-              <a:latin typeface="+mn-lt"/>
-              <a:ea typeface="+mn-ea"/>
-              <a:cs typeface="+mn-cs"/>
-            </a:endParaRPr>
-          </a:p>
-          <a:p>
-            <a:pPr marL="0" marR="0" indent="0" algn="l" defTabSz="914400" rtl="0" eaLnBrk="1" fontAlgn="auto" latinLnBrk="0" hangingPunct="1">
-              <a:lnSpc>
-                <a:spcPct val="100000"/>
-              </a:lnSpc>
-              <a:spcBef>
-                <a:spcPts val="0"/>
-              </a:spcBef>
-              <a:spcAft>
-                <a:spcPts val="0"/>
-              </a:spcAft>
-              <a:buClrTx/>
-              <a:buSzTx/>
-              <a:buFontTx/>
-              <a:buNone/>
-              <a:tabLst/>
-              <a:defRPr/>
-            </a:pPr>
-            <a:r>
-              <a:rPr lang="en-US" sz="1200" kern="1200" dirty="0">
-                <a:solidFill>
-                  <a:schemeClr val="tx1"/>
-                </a:solidFill>
-                <a:effectLst/>
-                <a:latin typeface="+mn-lt"/>
-                <a:ea typeface="+mn-ea"/>
-                <a:cs typeface="+mn-cs"/>
-              </a:rPr>
-              <a:t>\</a:t>
-            </a:r>
-            <a:r>
-              <a:rPr lang="en-US" sz="1200" kern="1200" dirty="0" err="1">
-                <a:solidFill>
-                  <a:schemeClr val="tx1"/>
-                </a:solidFill>
-                <a:effectLst/>
-                <a:latin typeface="+mn-lt"/>
-                <a:ea typeface="+mn-ea"/>
-                <a:cs typeface="+mn-cs"/>
-              </a:rPr>
-              <a:t>frac</a:t>
-            </a:r>
-            <a:r>
-              <a:rPr lang="en-US" sz="1200" kern="1200" dirty="0">
-                <a:solidFill>
-                  <a:schemeClr val="tx1"/>
-                </a:solidFill>
-                <a:effectLst/>
-                <a:latin typeface="+mn-lt"/>
-                <a:ea typeface="+mn-ea"/>
-                <a:cs typeface="+mn-cs"/>
-              </a:rPr>
-              <a:t>{\dot{y}}{\dot{x}} = \</a:t>
-            </a:r>
-            <a:r>
-              <a:rPr lang="en-US" sz="1200" kern="1200" dirty="0" err="1">
-                <a:solidFill>
-                  <a:schemeClr val="tx1"/>
-                </a:solidFill>
-                <a:effectLst/>
-                <a:latin typeface="+mn-lt"/>
-                <a:ea typeface="+mn-ea"/>
-                <a:cs typeface="+mn-cs"/>
-              </a:rPr>
-              <a:t>frac</a:t>
-            </a:r>
-            <a:r>
-              <a:rPr lang="en-US" sz="1200" kern="1200" dirty="0">
-                <a:solidFill>
-                  <a:schemeClr val="tx1"/>
-                </a:solidFill>
-                <a:effectLst/>
-                <a:latin typeface="+mn-lt"/>
-                <a:ea typeface="+mn-ea"/>
-                <a:cs typeface="+mn-cs"/>
-              </a:rPr>
-              <a:t>{\sin \theta}{\cos\theta}\</a:t>
-            </a:r>
-            <a:r>
-              <a:rPr lang="en-US" sz="1200" kern="1200" dirty="0" err="1">
-                <a:solidFill>
-                  <a:schemeClr val="tx1"/>
-                </a:solidFill>
-                <a:effectLst/>
-                <a:latin typeface="+mn-lt"/>
-                <a:ea typeface="+mn-ea"/>
-                <a:cs typeface="+mn-cs"/>
-              </a:rPr>
-              <a:t>qquad</a:t>
-            </a:r>
-            <a:r>
-              <a:rPr lang="en-US" sz="1200" kern="1200" dirty="0">
-                <a:solidFill>
-                  <a:schemeClr val="tx1"/>
-                </a:solidFill>
-                <a:effectLst/>
-                <a:latin typeface="+mn-lt"/>
-                <a:ea typeface="+mn-ea"/>
-                <a:cs typeface="+mn-cs"/>
-              </a:rPr>
-              <a:t>  \</a:t>
-            </a:r>
-            <a:r>
-              <a:rPr lang="en-US" sz="1200" kern="1200" dirty="0" err="1">
-                <a:solidFill>
-                  <a:schemeClr val="tx1"/>
-                </a:solidFill>
-                <a:effectLst/>
-                <a:latin typeface="+mn-lt"/>
-                <a:ea typeface="+mn-ea"/>
-                <a:cs typeface="+mn-cs"/>
-              </a:rPr>
-              <a:t>Rightarrow</a:t>
-            </a:r>
-            <a:r>
-              <a:rPr lang="en-US" sz="1200" kern="1200" dirty="0">
-                <a:solidFill>
-                  <a:schemeClr val="tx1"/>
-                </a:solidFill>
-                <a:effectLst/>
-                <a:latin typeface="+mn-lt"/>
-                <a:ea typeface="+mn-ea"/>
-                <a:cs typeface="+mn-cs"/>
-              </a:rPr>
-              <a:t>  \</a:t>
-            </a:r>
-            <a:r>
-              <a:rPr lang="en-US" sz="1200" kern="1200" dirty="0" err="1">
-                <a:solidFill>
-                  <a:schemeClr val="tx1"/>
-                </a:solidFill>
-                <a:effectLst/>
-                <a:latin typeface="+mn-lt"/>
-                <a:ea typeface="+mn-ea"/>
-                <a:cs typeface="+mn-cs"/>
-              </a:rPr>
-              <a:t>qquad</a:t>
-            </a:r>
-            <a:r>
-              <a:rPr lang="en-US" sz="1200" kern="1200" dirty="0">
-                <a:solidFill>
-                  <a:schemeClr val="tx1"/>
-                </a:solidFill>
-                <a:effectLst/>
-                <a:latin typeface="+mn-lt"/>
-                <a:ea typeface="+mn-ea"/>
-                <a:cs typeface="+mn-cs"/>
-              </a:rPr>
-              <a:t> \theta  = \tan^{-1} \left( \</a:t>
-            </a:r>
-            <a:r>
-              <a:rPr lang="en-US" sz="1200" kern="1200" dirty="0" err="1">
-                <a:solidFill>
-                  <a:schemeClr val="tx1"/>
-                </a:solidFill>
-                <a:effectLst/>
-                <a:latin typeface="+mn-lt"/>
-                <a:ea typeface="+mn-ea"/>
-                <a:cs typeface="+mn-cs"/>
-              </a:rPr>
-              <a:t>frac</a:t>
-            </a:r>
-            <a:r>
-              <a:rPr lang="en-US" sz="1200" kern="1200" dirty="0">
-                <a:solidFill>
-                  <a:schemeClr val="tx1"/>
-                </a:solidFill>
-                <a:effectLst/>
-                <a:latin typeface="+mn-lt"/>
-                <a:ea typeface="+mn-ea"/>
-                <a:cs typeface="+mn-cs"/>
-              </a:rPr>
-              <a:t>{\dot{y}}{\dot{x}}\right)</a:t>
-            </a:r>
-          </a:p>
-          <a:p>
             <a:endParaRPr lang="en-US" dirty="0"/>
           </a:p>
         </p:txBody>
@@ -3725,7 +1638,7 @@
           <a:p>
             <a:fld id="{63B2D7EC-928D-0645-AAE8-498D7443D60E}" type="slidenum">
               <a:rPr lang="en-US" smtClean="0"/>
-              <a:t>23</a:t>
+              <a:t>22</a:t>
             </a:fld>
             <a:endParaRPr lang="en-US"/>
           </a:p>
@@ -3734,7 +1647,7 @@
     </p:spTree>
     <p:extLst>
       <p:ext uri="{BB962C8B-B14F-4D97-AF65-F5344CB8AC3E}">
-        <p14:creationId xmlns:p14="http://schemas.microsoft.com/office/powerpoint/2010/main" val="765794251"/>
+        <p14:creationId xmlns:p14="http://schemas.microsoft.com/office/powerpoint/2010/main" val="1532091701"/>
       </p:ext>
     </p:extLst>
   </p:cSld>
@@ -3876,141 +1789,6 @@
           <a:bodyPr/>
           <a:lstStyle/>
           <a:p>
-            <a:pPr marL="0" marR="0" lvl="0" indent="0" algn="l" defTabSz="914400" rtl="0" eaLnBrk="1" fontAlgn="auto" latinLnBrk="0" hangingPunct="1">
-              <a:lnSpc>
-                <a:spcPct val="100000"/>
-              </a:lnSpc>
-              <a:spcBef>
-                <a:spcPts val="0"/>
-              </a:spcBef>
-              <a:spcAft>
-                <a:spcPts val="0"/>
-              </a:spcAft>
-              <a:buClrTx/>
-              <a:buSzTx/>
-              <a:buFontTx/>
-              <a:buNone/>
-              <a:tabLst/>
-              <a:defRPr/>
-            </a:pPr>
-            <a:r>
-              <a:rPr lang="en-US" sz="1200" kern="1200" dirty="0">
-                <a:solidFill>
-                  <a:schemeClr val="tx1"/>
-                </a:solidFill>
-                <a:effectLst/>
-                <a:latin typeface="+mn-lt"/>
-                <a:ea typeface="+mn-ea"/>
-                <a:cs typeface="+mn-cs"/>
-              </a:rPr>
-              <a:t> Hence all of the state variables and the inputs can be determined by the trajectory of</a:t>
-            </a:r>
-            <a:r>
-              <a:rPr lang="en-US" sz="1200" kern="1200" baseline="0" dirty="0">
-                <a:solidFill>
-                  <a:schemeClr val="tx1"/>
-                </a:solidFill>
-                <a:effectLst/>
-                <a:latin typeface="+mn-lt"/>
-                <a:ea typeface="+mn-ea"/>
-                <a:cs typeface="+mn-cs"/>
-              </a:rPr>
-              <a:t> </a:t>
-            </a:r>
-            <a:r>
-              <a:rPr lang="en-US" sz="1200" kern="1200" dirty="0">
-                <a:solidFill>
-                  <a:schemeClr val="tx1"/>
-                </a:solidFill>
-                <a:effectLst/>
-                <a:latin typeface="+mn-lt"/>
-                <a:ea typeface="+mn-ea"/>
-                <a:cs typeface="+mn-cs"/>
-              </a:rPr>
-              <a:t>the rear wheels and its derivatives. This property of a system is known as differential</a:t>
-            </a:r>
-            <a:r>
-              <a:rPr lang="en-US" sz="1200" kern="1200" baseline="0" dirty="0">
-                <a:solidFill>
-                  <a:schemeClr val="tx1"/>
-                </a:solidFill>
-                <a:effectLst/>
-                <a:latin typeface="+mn-lt"/>
-                <a:ea typeface="+mn-ea"/>
-                <a:cs typeface="+mn-cs"/>
-              </a:rPr>
-              <a:t> </a:t>
-            </a:r>
-            <a:r>
-              <a:rPr lang="en-US" sz="1200" kern="1200" dirty="0">
-                <a:solidFill>
-                  <a:schemeClr val="tx1"/>
-                </a:solidFill>
-                <a:effectLst/>
-                <a:latin typeface="+mn-lt"/>
-                <a:ea typeface="+mn-ea"/>
-                <a:cs typeface="+mn-cs"/>
-              </a:rPr>
-              <a:t>flatness .</a:t>
-            </a:r>
-          </a:p>
-          <a:p>
-            <a:pPr marL="0" marR="0" lvl="0" indent="0" algn="l" defTabSz="914400" rtl="0" eaLnBrk="1" fontAlgn="auto" latinLnBrk="0" hangingPunct="1">
-              <a:lnSpc>
-                <a:spcPct val="100000"/>
-              </a:lnSpc>
-              <a:spcBef>
-                <a:spcPts val="0"/>
-              </a:spcBef>
-              <a:spcAft>
-                <a:spcPts val="0"/>
-              </a:spcAft>
-              <a:buClrTx/>
-              <a:buSzTx/>
-              <a:buFontTx/>
-              <a:buNone/>
-              <a:tabLst/>
-              <a:defRPr/>
-            </a:pPr>
-            <a:endParaRPr lang="en-US" sz="1200" dirty="0">
-              <a:latin typeface="Source Sans Pro" panose="020B0503030403020204" pitchFamily="34" charset="0"/>
-              <a:ea typeface="Source Sans Pro" panose="020B0503030403020204" pitchFamily="34" charset="0"/>
-            </a:endParaRPr>
-          </a:p>
-          <a:p>
-            <a:pPr marL="0" marR="0" lvl="0" indent="0" algn="l" defTabSz="914400" rtl="0" eaLnBrk="1" fontAlgn="auto" latinLnBrk="0" hangingPunct="1">
-              <a:lnSpc>
-                <a:spcPct val="100000"/>
-              </a:lnSpc>
-              <a:spcBef>
-                <a:spcPts val="0"/>
-              </a:spcBef>
-              <a:spcAft>
-                <a:spcPts val="0"/>
-              </a:spcAft>
-              <a:buClrTx/>
-              <a:buSzTx/>
-              <a:buFontTx/>
-              <a:buNone/>
-              <a:tabLst/>
-              <a:defRPr/>
-            </a:pPr>
-            <a:r>
-              <a:rPr lang="en-US" sz="1200" dirty="0">
-                <a:latin typeface="Source Sans Pro" panose="020B0503030403020204" pitchFamily="34" charset="0"/>
-                <a:ea typeface="Source Sans Pro" panose="020B0503030403020204" pitchFamily="34" charset="0"/>
-              </a:rPr>
-              <a:t>In words, a system is differentially flat if we can find a set of outputs (technically equal in number to the number of inputs) such that all states and inputs can be determined from these outputs </a:t>
-            </a:r>
-            <a:r>
-              <a:rPr lang="en-US" sz="1200" i="1" dirty="0">
-                <a:latin typeface="Source Sans Pro" panose="020B0503030403020204" pitchFamily="34" charset="0"/>
-                <a:ea typeface="Source Sans Pro" panose="020B0503030403020204" pitchFamily="34" charset="0"/>
-              </a:rPr>
-              <a:t>without integration</a:t>
-            </a:r>
-          </a:p>
-          <a:p>
             <a:endParaRPr lang="en-US" dirty="0"/>
           </a:p>
         </p:txBody>
@@ -4022,7 +1800,7 @@
             <a:spLocks noGrp="1"/>
           </p:cNvSpPr>
           <p:nvPr>
-            <p:ph type="sldNum" sz="quarter" idx="5"/>
+            <p:ph type="sldNum" sz="quarter" idx="10"/>
           </p:nvPr>
         </p:nvSpPr>
         <p:spPr/>
@@ -4032,7 +1810,7 @@
           <a:p>
             <a:fld id="{63B2D7EC-928D-0645-AAE8-498D7443D60E}" type="slidenum">
               <a:rPr lang="en-US" smtClean="0"/>
-              <a:t>24</a:t>
+              <a:t>23</a:t>
             </a:fld>
             <a:endParaRPr lang="en-US"/>
           </a:p>
@@ -4041,7 +1819,7 @@
     </p:spTree>
     <p:extLst>
       <p:ext uri="{BB962C8B-B14F-4D97-AF65-F5344CB8AC3E}">
-        <p14:creationId xmlns:p14="http://schemas.microsoft.com/office/powerpoint/2010/main" val="29850225"/>
+        <p14:creationId xmlns:p14="http://schemas.microsoft.com/office/powerpoint/2010/main" val="765794251"/>
       </p:ext>
     </p:extLst>
   </p:cSld>
@@ -4080,6 +1858,90 @@
         </p:nvSpPr>
         <p:spPr/>
       </p:sp>
+      <p:sp>
+        <p:nvSpPr>
+          <p:cNvPr id="3" name="Notes Placeholder 2"/>
+          <p:cNvSpPr>
+            <a:spLocks noGrp="1"/>
+          </p:cNvSpPr>
+          <p:nvPr>
+            <p:ph type="body" idx="1"/>
+          </p:nvPr>
+        </p:nvSpPr>
+        <p:spPr/>
+        <p:txBody>
+          <a:bodyPr/>
+          <a:lstStyle/>
+          <a:p>
+            <a:endParaRPr lang="en-US" dirty="0"/>
+          </a:p>
+        </p:txBody>
+      </p:sp>
+      <p:sp>
+        <p:nvSpPr>
+          <p:cNvPr id="4" name="Slide Number Placeholder 3"/>
+          <p:cNvSpPr>
+            <a:spLocks noGrp="1"/>
+          </p:cNvSpPr>
+          <p:nvPr>
+            <p:ph type="sldNum" sz="quarter" idx="5"/>
+          </p:nvPr>
+        </p:nvSpPr>
+        <p:spPr/>
+        <p:txBody>
+          <a:bodyPr/>
+          <a:lstStyle/>
+          <a:p>
+            <a:fld id="{63B2D7EC-928D-0645-AAE8-498D7443D60E}" type="slidenum">
+              <a:rPr lang="en-US" smtClean="0"/>
+              <a:t>24</a:t>
+            </a:fld>
+            <a:endParaRPr lang="en-US"/>
+          </a:p>
+        </p:txBody>
+      </p:sp>
+    </p:spTree>
+    <p:extLst>
+      <p:ext uri="{BB962C8B-B14F-4D97-AF65-F5344CB8AC3E}">
+        <p14:creationId xmlns:p14="http://schemas.microsoft.com/office/powerpoint/2010/main" val="29850225"/>
+      </p:ext>
+    </p:extLst>
+  </p:cSld>
+  <p:clrMapOvr>
+    <a:masterClrMapping/>
+  </p:clrMapOvr>
+</p:notes>
+</file>
+
+<file path=ppt/notesSlides/notesSlide22.xml><?xml version="1.0" encoding="utf-8"?>
+<p:notes xmlns:a="http://schemas.openxmlformats.org/drawingml/2006/main" xmlns:r="http://schemas.openxmlformats.org/officeDocument/2006/relationships" xmlns:p="http://schemas.openxmlformats.org/presentationml/2006/main">
+  <p:cSld>
+    <p:spTree>
+      <p:nvGrpSpPr>
+        <p:cNvPr id="1" name=""/>
+        <p:cNvGrpSpPr/>
+        <p:nvPr/>
+      </p:nvGrpSpPr>
+      <p:grpSpPr>
+        <a:xfrm>
+          <a:off x="0" y="0"/>
+          <a:ext cx="0" cy="0"/>
+          <a:chOff x="0" y="0"/>
+          <a:chExt cx="0" cy="0"/>
+        </a:xfrm>
+      </p:grpSpPr>
+      <p:sp>
+        <p:nvSpPr>
+          <p:cNvPr id="2" name="Slide Image Placeholder 1"/>
+          <p:cNvSpPr>
+            <a:spLocks noGrp="1" noRot="1" noChangeAspect="1"/>
+          </p:cNvSpPr>
+          <p:nvPr>
+            <p:ph type="sldImg"/>
+          </p:nvPr>
+        </p:nvSpPr>
+        <p:spPr/>
+      </p:sp>
       <mc:AlternateContent xmlns:mc="http://schemas.openxmlformats.org/markup-compatibility/2006" xmlns:a14="http://schemas.microsoft.com/office/drawing/2010/main">
         <mc:Choice Requires="a14">
           <p:sp>
@@ -4096,84 +1958,6 @@
             <p:txBody>
               <a:bodyPr/>
               <a:lstStyle/>
-              <a:p>
-                <a:pPr marL="0" marR="0" lvl="0" indent="0" algn="l" defTabSz="914400" rtl="0" eaLnBrk="1" fontAlgn="auto" latinLnBrk="0" hangingPunct="1">
-                  <a:lnSpc>
-                    <a:spcPct val="100000"/>
-                  </a:lnSpc>
-                  <a:spcBef>
-                    <a:spcPts val="0"/>
-                  </a:spcBef>
-                  <a:spcAft>
-                    <a:spcPts val="0"/>
-                  </a:spcAft>
-                  <a:buClrTx/>
-                  <a:buSzTx/>
-                  <a:buFontTx/>
-                  <a:buNone/>
-                  <a:tabLst/>
-                  <a:defRPr/>
-                </a:pPr>
-                <a:r>
-                  <a:rPr lang="en-US" dirty="0"/>
-                  <a:t>Flat outputs are “magic coordinates” that make the system look like a chain of integrators.</a:t>
-                </a:r>
-                <a:r>
-                  <a:rPr lang="en-US" baseline="0" dirty="0"/>
-                  <a:t> </a:t>
-                </a:r>
-                <a:r>
-                  <a:rPr lang="en-US" dirty="0"/>
-                  <a:t>Once you express the system in terms of them, </a:t>
-                </a:r>
-                <a:r>
-                  <a:rPr lang="en-US" b="1" dirty="0"/>
-                  <a:t>trajectory planning and control</a:t>
-                </a:r>
-                <a:r>
-                  <a:rPr lang="en-US" dirty="0"/>
-                  <a:t> become much simpler — you can design trajectories for z</a:t>
-                </a:r>
-                <a14:m>
-                  <m:oMath xmlns:m="http://schemas.openxmlformats.org/officeDocument/2006/math">
-                    <m:d>
-                      <m:dPr>
-                        <m:ctrlPr>
-                          <a:rPr lang="ar-AE" sz="1200" i="1" kern="1200">
-                            <a:solidFill>
-                              <a:schemeClr val="tx1"/>
-                            </a:solidFill>
-                            <a:latin typeface="Cambria Math" panose="02040503050406030204" pitchFamily="18" charset="0"/>
-                            <a:ea typeface="+mn-ea"/>
-                            <a:cs typeface="+mn-cs"/>
-                          </a:rPr>
-                        </m:ctrlPr>
-                      </m:dPr>
-                      <m:e>
-                        <m:r>
-                          <a:rPr lang="ar-AE" sz="1200" i="1" kern="1200">
-                            <a:solidFill>
-                              <a:schemeClr val="tx1"/>
-                            </a:solidFill>
-                            <a:latin typeface="Cambria Math" panose="02040503050406030204" pitchFamily="18" charset="0"/>
-                            <a:ea typeface="+mn-ea"/>
-                            <a:cs typeface="+mn-cs"/>
-                          </a:rPr>
-                          <m:t>𝑡</m:t>
-                        </m:r>
-                      </m:e>
-                    </m:d>
-                  </m:oMath>
-                </a14:m>
-                <a:r>
-                  <a:rPr lang="ar-AE" dirty="0"/>
-                  <a:t>, </a:t>
-                </a:r>
-                <a:r>
-                  <a:rPr lang="en-US" dirty="0"/>
-                  <a:t>then algebraically recover all required states and inputs.</a:t>
-                </a:r>
-              </a:p>
               <a:p>
                 <a:endParaRPr lang="en-US" dirty="0"/>
               </a:p>
@@ -4296,1515 +2080,6 @@
 </p:notes>
 </file>
 
-<file path=ppt/notesSlides/notesSlide22.xml><?xml version="1.0" encoding="utf-8"?>
-<p:notes xmlns:a="http://schemas.openxmlformats.org/drawingml/2006/main" xmlns:r="http://schemas.openxmlformats.org/officeDocument/2006/relationships" xmlns:p="http://schemas.openxmlformats.org/presentationml/2006/main">
-  <p:cSld>
-    <p:spTree>
-      <p:nvGrpSpPr>
-        <p:cNvPr id="1" name=""/>
-        <p:cNvGrpSpPr/>
-        <p:nvPr/>
-      </p:nvGrpSpPr>
-      <p:grpSpPr>
-        <a:xfrm>
-          <a:off x="0" y="0"/>
-          <a:ext cx="0" cy="0"/>
-          <a:chOff x="0" y="0"/>
-          <a:chExt cx="0" cy="0"/>
-        </a:xfrm>
-      </p:grpSpPr>
-      <p:sp>
-        <p:nvSpPr>
-          <p:cNvPr id="2" name="Slide Image Placeholder 1"/>
-          <p:cNvSpPr>
-            <a:spLocks noGrp="1" noRot="1" noChangeAspect="1"/>
-          </p:cNvSpPr>
-          <p:nvPr>
-            <p:ph type="sldImg"/>
-          </p:nvPr>
-        </p:nvSpPr>
-        <p:spPr/>
-      </p:sp>
-      <p:sp>
-        <p:nvSpPr>
-          <p:cNvPr id="3" name="Notes Placeholder 2"/>
-          <p:cNvSpPr>
-            <a:spLocks noGrp="1"/>
-          </p:cNvSpPr>
-          <p:nvPr>
-            <p:ph type="body" idx="1"/>
-          </p:nvPr>
-        </p:nvSpPr>
-        <p:spPr/>
-        <p:txBody>
-          <a:bodyPr/>
-          <a:lstStyle/>
-          <a:p>
-            <a:pPr marL="171450" indent="-171450">
-              <a:buFont typeface="Arial" charset="0"/>
-              <a:buChar char="•"/>
-            </a:pPr>
-            <a:r>
-              <a:rPr lang="en-US" sz="1200" kern="1200" dirty="0">
-                <a:solidFill>
-                  <a:schemeClr val="tx1"/>
-                </a:solidFill>
-                <a:effectLst/>
-                <a:latin typeface="+mn-lt"/>
-                <a:ea typeface="+mn-ea"/>
-                <a:cs typeface="+mn-cs"/>
-              </a:rPr>
-              <a:t>We can parameterize the flat output trajectory</a:t>
-            </a:r>
-            <a:r>
-              <a:rPr lang="en-US" sz="1200" kern="1200" baseline="0" dirty="0">
-                <a:solidFill>
-                  <a:schemeClr val="tx1"/>
-                </a:solidFill>
-                <a:effectLst/>
-                <a:latin typeface="+mn-lt"/>
-                <a:ea typeface="+mn-ea"/>
-                <a:cs typeface="+mn-cs"/>
-              </a:rPr>
-              <a:t> </a:t>
-            </a:r>
-            <a:r>
-              <a:rPr lang="en-US" sz="1200" kern="1200" dirty="0">
-                <a:solidFill>
-                  <a:schemeClr val="tx1"/>
-                </a:solidFill>
-                <a:effectLst/>
-                <a:latin typeface="+mn-lt"/>
-                <a:ea typeface="+mn-ea"/>
-                <a:cs typeface="+mn-cs"/>
-              </a:rPr>
-              <a:t>using a set of smooth basis functions</a:t>
-            </a:r>
-          </a:p>
-          <a:p>
-            <a:pPr marL="171450" indent="-171450">
-              <a:buFont typeface="Arial" charset="0"/>
-              <a:buChar char="•"/>
-            </a:pPr>
-            <a:r>
-              <a:rPr lang="en-US" dirty="0"/>
-              <a:t>No ODEs need to be integrated in order to compute the feasible trajectories for a differentially flat system</a:t>
-            </a:r>
-            <a:endParaRPr lang="is-IS" sz="1200" kern="1200" dirty="0">
-              <a:solidFill>
-                <a:schemeClr val="tx1"/>
-              </a:solidFill>
-              <a:effectLst/>
-              <a:latin typeface="+mn-lt"/>
-              <a:ea typeface="+mn-ea"/>
-              <a:cs typeface="+mn-cs"/>
-            </a:endParaRPr>
-          </a:p>
-          <a:p>
-            <a:endParaRPr lang="is-IS" sz="1200" kern="1200" dirty="0">
-              <a:solidFill>
-                <a:schemeClr val="tx1"/>
-              </a:solidFill>
-              <a:effectLst/>
-              <a:latin typeface="+mn-lt"/>
-              <a:ea typeface="+mn-ea"/>
-              <a:cs typeface="+mn-cs"/>
-            </a:endParaRPr>
-          </a:p>
-          <a:p>
-            <a:pPr marL="0" marR="0" lvl="0" indent="0" algn="l" defTabSz="914400" rtl="0" eaLnBrk="1" fontAlgn="auto" latinLnBrk="0" hangingPunct="1">
-              <a:lnSpc>
-                <a:spcPct val="100000"/>
-              </a:lnSpc>
-              <a:spcBef>
-                <a:spcPts val="0"/>
-              </a:spcBef>
-              <a:spcAft>
-                <a:spcPts val="0"/>
-              </a:spcAft>
-              <a:buClrTx/>
-              <a:buSzTx/>
-              <a:buFontTx/>
-              <a:buNone/>
-              <a:tabLst/>
-              <a:defRPr/>
-            </a:pPr>
-            <a:r>
-              <a:rPr lang="en-US" sz="1200" kern="1200" dirty="0">
-                <a:solidFill>
-                  <a:schemeClr val="tx1"/>
-                </a:solidFill>
-                <a:effectLst/>
-                <a:latin typeface="+mn-lt"/>
-                <a:ea typeface="+mn-ea"/>
-                <a:cs typeface="+mn-cs"/>
-              </a:rPr>
-              <a:t>\</a:t>
-            </a:r>
-            <a:r>
-              <a:rPr lang="en-US" sz="1200" kern="1200" dirty="0" err="1">
-                <a:solidFill>
-                  <a:schemeClr val="tx1"/>
-                </a:solidFill>
-                <a:effectLst/>
-                <a:latin typeface="+mn-lt"/>
-                <a:ea typeface="+mn-ea"/>
-                <a:cs typeface="+mn-cs"/>
-              </a:rPr>
-              <a:t>newcommand</a:t>
-            </a:r>
-            <a:r>
-              <a:rPr lang="en-US" sz="1200" kern="1200" dirty="0">
-                <a:solidFill>
-                  <a:schemeClr val="tx1"/>
-                </a:solidFill>
-                <a:effectLst/>
-                <a:latin typeface="+mn-lt"/>
-                <a:ea typeface="+mn-ea"/>
-                <a:cs typeface="+mn-cs"/>
-              </a:rPr>
-              <a:t>{\z}{\</a:t>
-            </a:r>
-            <a:r>
-              <a:rPr lang="en-US" sz="1200" kern="1200" dirty="0" err="1">
-                <a:solidFill>
-                  <a:schemeClr val="tx1"/>
-                </a:solidFill>
-                <a:effectLst/>
-                <a:latin typeface="+mn-lt"/>
-                <a:ea typeface="+mn-ea"/>
-                <a:cs typeface="+mn-cs"/>
-              </a:rPr>
-              <a:t>mathbf</a:t>
-            </a:r>
-            <a:r>
-              <a:rPr lang="en-US" sz="1200" kern="1200" dirty="0">
-                <a:solidFill>
-                  <a:schemeClr val="tx1"/>
-                </a:solidFill>
-                <a:effectLst/>
-                <a:latin typeface="+mn-lt"/>
-                <a:ea typeface="+mn-ea"/>
-                <a:cs typeface="+mn-cs"/>
-              </a:rPr>
-              <a:t>{z}}</a:t>
-            </a:r>
-          </a:p>
-          <a:p>
-            <a:endParaRPr lang="is-IS" sz="1200" kern="1200" dirty="0">
-              <a:solidFill>
-                <a:schemeClr val="tx1"/>
-              </a:solidFill>
-              <a:effectLst/>
-              <a:latin typeface="+mn-lt"/>
-              <a:ea typeface="+mn-ea"/>
-              <a:cs typeface="+mn-cs"/>
-            </a:endParaRPr>
-          </a:p>
-          <a:p>
-            <a:r>
-              <a:rPr lang="en-US" sz="1200" kern="1200" dirty="0">
-                <a:solidFill>
-                  <a:schemeClr val="tx1"/>
-                </a:solidFill>
-                <a:effectLst/>
-                <a:latin typeface="+mn-lt"/>
-                <a:ea typeface="+mn-ea"/>
-                <a:cs typeface="+mn-cs"/>
-              </a:rPr>
-              <a:t>\begin{</a:t>
-            </a:r>
-            <a:r>
-              <a:rPr lang="en-US" sz="1200" kern="1200" dirty="0" err="1">
-                <a:solidFill>
-                  <a:schemeClr val="tx1"/>
-                </a:solidFill>
-                <a:effectLst/>
-                <a:latin typeface="+mn-lt"/>
-                <a:ea typeface="+mn-ea"/>
-                <a:cs typeface="+mn-cs"/>
-              </a:rPr>
-              <a:t>bmatrix</a:t>
-            </a:r>
-            <a:r>
-              <a:rPr lang="en-US" sz="1200" kern="1200" dirty="0">
-                <a:solidFill>
-                  <a:schemeClr val="tx1"/>
-                </a:solidFill>
-                <a:effectLst/>
-                <a:latin typeface="+mn-lt"/>
-                <a:ea typeface="+mn-ea"/>
-                <a:cs typeface="+mn-cs"/>
-              </a:rPr>
-              <a:t>}</a:t>
-            </a:r>
-          </a:p>
-          <a:p>
-            <a:r>
-              <a:rPr lang="en-US" sz="1200" kern="1200" dirty="0">
-                <a:solidFill>
-                  <a:schemeClr val="tx1"/>
-                </a:solidFill>
-                <a:effectLst/>
-                <a:latin typeface="+mn-lt"/>
-                <a:ea typeface="+mn-ea"/>
-                <a:cs typeface="+mn-cs"/>
-              </a:rPr>
-              <a:t>    \psi_{1}(t_0) &amp; \psi_{2}(t_0) &amp;  \dots  &amp; \psi_{N}(t_0) \\</a:t>
-            </a:r>
-          </a:p>
-          <a:p>
-            <a:r>
-              <a:rPr lang="en-US" sz="1200" kern="1200" dirty="0">
-                <a:solidFill>
-                  <a:schemeClr val="tx1"/>
-                </a:solidFill>
-                <a:effectLst/>
-                <a:latin typeface="+mn-lt"/>
-                <a:ea typeface="+mn-ea"/>
-                <a:cs typeface="+mn-cs"/>
-              </a:rPr>
-              <a:t>    \dot{\psi}_{1}(t_0) &amp; \dot{\psi}_{2}(t_0) &amp;  \dots  &amp; \dot{\psi}_{N}(t_0) \\</a:t>
-            </a:r>
-          </a:p>
-          <a:p>
-            <a:r>
-              <a:rPr lang="en-US" sz="1200" kern="1200" dirty="0">
-                <a:solidFill>
-                  <a:schemeClr val="tx1"/>
-                </a:solidFill>
-                <a:effectLst/>
-                <a:latin typeface="+mn-lt"/>
-                <a:ea typeface="+mn-ea"/>
-                <a:cs typeface="+mn-cs"/>
-              </a:rPr>
-              <a:t>    \</a:t>
-            </a:r>
-            <a:r>
-              <a:rPr lang="en-US" sz="1200" kern="1200" dirty="0" err="1">
-                <a:solidFill>
-                  <a:schemeClr val="tx1"/>
-                </a:solidFill>
-                <a:effectLst/>
-                <a:latin typeface="+mn-lt"/>
-                <a:ea typeface="+mn-ea"/>
-                <a:cs typeface="+mn-cs"/>
-              </a:rPr>
-              <a:t>vdots</a:t>
-            </a:r>
-            <a:r>
-              <a:rPr lang="en-US" sz="1200" kern="1200" dirty="0">
-                <a:solidFill>
-                  <a:schemeClr val="tx1"/>
-                </a:solidFill>
-                <a:effectLst/>
-                <a:latin typeface="+mn-lt"/>
-                <a:ea typeface="+mn-ea"/>
-                <a:cs typeface="+mn-cs"/>
-              </a:rPr>
-              <a:t> &amp; \</a:t>
-            </a:r>
-            <a:r>
-              <a:rPr lang="en-US" sz="1200" kern="1200" dirty="0" err="1">
-                <a:solidFill>
-                  <a:schemeClr val="tx1"/>
-                </a:solidFill>
-                <a:effectLst/>
-                <a:latin typeface="+mn-lt"/>
-                <a:ea typeface="+mn-ea"/>
-                <a:cs typeface="+mn-cs"/>
-              </a:rPr>
-              <a:t>vdots</a:t>
-            </a:r>
-            <a:r>
-              <a:rPr lang="en-US" sz="1200" kern="1200" dirty="0">
-                <a:solidFill>
-                  <a:schemeClr val="tx1"/>
-                </a:solidFill>
-                <a:effectLst/>
-                <a:latin typeface="+mn-lt"/>
-                <a:ea typeface="+mn-ea"/>
-                <a:cs typeface="+mn-cs"/>
-              </a:rPr>
-              <a:t> &amp; &amp;  \</a:t>
-            </a:r>
-            <a:r>
-              <a:rPr lang="en-US" sz="1200" kern="1200" dirty="0" err="1">
-                <a:solidFill>
-                  <a:schemeClr val="tx1"/>
-                </a:solidFill>
-                <a:effectLst/>
-                <a:latin typeface="+mn-lt"/>
-                <a:ea typeface="+mn-ea"/>
-                <a:cs typeface="+mn-cs"/>
-              </a:rPr>
-              <a:t>vdots</a:t>
-            </a:r>
-            <a:r>
-              <a:rPr lang="en-US" sz="1200" kern="1200" dirty="0">
-                <a:solidFill>
-                  <a:schemeClr val="tx1"/>
-                </a:solidFill>
-                <a:effectLst/>
-                <a:latin typeface="+mn-lt"/>
-                <a:ea typeface="+mn-ea"/>
-                <a:cs typeface="+mn-cs"/>
-              </a:rPr>
-              <a:t> \\</a:t>
-            </a:r>
-          </a:p>
-          <a:p>
-            <a:r>
-              <a:rPr lang="en-US" sz="1200" kern="1200" dirty="0">
-                <a:solidFill>
-                  <a:schemeClr val="tx1"/>
-                </a:solidFill>
-                <a:effectLst/>
-                <a:latin typeface="+mn-lt"/>
-                <a:ea typeface="+mn-ea"/>
-                <a:cs typeface="+mn-cs"/>
-              </a:rPr>
-              <a:t>    \psi_{1}^{(q)}(t_0) &amp; \psi_{2}^{(q)}(t_0) &amp;  \dots  &amp; \psi_{N}^{(q)}(t_0) \\</a:t>
-            </a:r>
-          </a:p>
-          <a:p>
-            <a:r>
-              <a:rPr lang="en-US" sz="1200" kern="1200" dirty="0">
-                <a:solidFill>
-                  <a:schemeClr val="tx1"/>
-                </a:solidFill>
-                <a:effectLst/>
-                <a:latin typeface="+mn-lt"/>
-                <a:ea typeface="+mn-ea"/>
-                <a:cs typeface="+mn-cs"/>
-              </a:rPr>
-              <a:t>        \psi_{1}(</a:t>
-            </a:r>
-            <a:r>
-              <a:rPr lang="en-US" sz="1200" kern="1200" dirty="0" err="1">
-                <a:solidFill>
-                  <a:schemeClr val="tx1"/>
-                </a:solidFill>
-                <a:effectLst/>
-                <a:latin typeface="+mn-lt"/>
-                <a:ea typeface="+mn-ea"/>
-                <a:cs typeface="+mn-cs"/>
-              </a:rPr>
-              <a:t>t_f</a:t>
-            </a:r>
-            <a:r>
-              <a:rPr lang="en-US" sz="1200" kern="1200" dirty="0">
-                <a:solidFill>
-                  <a:schemeClr val="tx1"/>
-                </a:solidFill>
-                <a:effectLst/>
-                <a:latin typeface="+mn-lt"/>
-                <a:ea typeface="+mn-ea"/>
-                <a:cs typeface="+mn-cs"/>
-              </a:rPr>
-              <a:t>) &amp; \psi_{2}(</a:t>
-            </a:r>
-            <a:r>
-              <a:rPr lang="en-US" sz="1200" kern="1200" dirty="0" err="1">
-                <a:solidFill>
-                  <a:schemeClr val="tx1"/>
-                </a:solidFill>
-                <a:effectLst/>
-                <a:latin typeface="+mn-lt"/>
-                <a:ea typeface="+mn-ea"/>
-                <a:cs typeface="+mn-cs"/>
-              </a:rPr>
-              <a:t>t_f</a:t>
-            </a:r>
-            <a:r>
-              <a:rPr lang="en-US" sz="1200" kern="1200" dirty="0">
-                <a:solidFill>
-                  <a:schemeClr val="tx1"/>
-                </a:solidFill>
-                <a:effectLst/>
-                <a:latin typeface="+mn-lt"/>
-                <a:ea typeface="+mn-ea"/>
-                <a:cs typeface="+mn-cs"/>
-              </a:rPr>
-              <a:t>) &amp;  \dots  &amp; \psi_{N}(</a:t>
-            </a:r>
-            <a:r>
-              <a:rPr lang="en-US" sz="1200" kern="1200" dirty="0" err="1">
-                <a:solidFill>
-                  <a:schemeClr val="tx1"/>
-                </a:solidFill>
-                <a:effectLst/>
-                <a:latin typeface="+mn-lt"/>
-                <a:ea typeface="+mn-ea"/>
-                <a:cs typeface="+mn-cs"/>
-              </a:rPr>
-              <a:t>t_f</a:t>
-            </a:r>
-            <a:r>
-              <a:rPr lang="en-US" sz="1200" kern="1200" dirty="0">
-                <a:solidFill>
-                  <a:schemeClr val="tx1"/>
-                </a:solidFill>
-                <a:effectLst/>
-                <a:latin typeface="+mn-lt"/>
-                <a:ea typeface="+mn-ea"/>
-                <a:cs typeface="+mn-cs"/>
-              </a:rPr>
-              <a:t>) \\</a:t>
-            </a:r>
-          </a:p>
-          <a:p>
-            <a:r>
-              <a:rPr lang="en-US" sz="1200" kern="1200" dirty="0">
-                <a:solidFill>
-                  <a:schemeClr val="tx1"/>
-                </a:solidFill>
-                <a:effectLst/>
-                <a:latin typeface="+mn-lt"/>
-                <a:ea typeface="+mn-ea"/>
-                <a:cs typeface="+mn-cs"/>
-              </a:rPr>
-              <a:t>    \dot{\psi}_{1}(</a:t>
-            </a:r>
-            <a:r>
-              <a:rPr lang="en-US" sz="1200" kern="1200" dirty="0" err="1">
-                <a:solidFill>
-                  <a:schemeClr val="tx1"/>
-                </a:solidFill>
-                <a:effectLst/>
-                <a:latin typeface="+mn-lt"/>
-                <a:ea typeface="+mn-ea"/>
-                <a:cs typeface="+mn-cs"/>
-              </a:rPr>
-              <a:t>t_f</a:t>
-            </a:r>
-            <a:r>
-              <a:rPr lang="en-US" sz="1200" kern="1200" dirty="0">
-                <a:solidFill>
-                  <a:schemeClr val="tx1"/>
-                </a:solidFill>
-                <a:effectLst/>
-                <a:latin typeface="+mn-lt"/>
-                <a:ea typeface="+mn-ea"/>
-                <a:cs typeface="+mn-cs"/>
-              </a:rPr>
-              <a:t>) &amp; \dot{\psi}_{2}(</a:t>
-            </a:r>
-            <a:r>
-              <a:rPr lang="en-US" sz="1200" kern="1200" dirty="0" err="1">
-                <a:solidFill>
-                  <a:schemeClr val="tx1"/>
-                </a:solidFill>
-                <a:effectLst/>
-                <a:latin typeface="+mn-lt"/>
-                <a:ea typeface="+mn-ea"/>
-                <a:cs typeface="+mn-cs"/>
-              </a:rPr>
-              <a:t>t_f</a:t>
-            </a:r>
-            <a:r>
-              <a:rPr lang="en-US" sz="1200" kern="1200" dirty="0">
-                <a:solidFill>
-                  <a:schemeClr val="tx1"/>
-                </a:solidFill>
-                <a:effectLst/>
-                <a:latin typeface="+mn-lt"/>
-                <a:ea typeface="+mn-ea"/>
-                <a:cs typeface="+mn-cs"/>
-              </a:rPr>
-              <a:t>) &amp;  \dots  &amp; \dot{\psi}_{N}(</a:t>
-            </a:r>
-            <a:r>
-              <a:rPr lang="en-US" sz="1200" kern="1200" dirty="0" err="1">
-                <a:solidFill>
-                  <a:schemeClr val="tx1"/>
-                </a:solidFill>
-                <a:effectLst/>
-                <a:latin typeface="+mn-lt"/>
-                <a:ea typeface="+mn-ea"/>
-                <a:cs typeface="+mn-cs"/>
-              </a:rPr>
-              <a:t>t_f</a:t>
-            </a:r>
-            <a:r>
-              <a:rPr lang="en-US" sz="1200" kern="1200" dirty="0">
-                <a:solidFill>
-                  <a:schemeClr val="tx1"/>
-                </a:solidFill>
-                <a:effectLst/>
-                <a:latin typeface="+mn-lt"/>
-                <a:ea typeface="+mn-ea"/>
-                <a:cs typeface="+mn-cs"/>
-              </a:rPr>
-              <a:t>) \\</a:t>
-            </a:r>
-          </a:p>
-          <a:p>
-            <a:r>
-              <a:rPr lang="en-US" sz="1200" kern="1200" dirty="0">
-                <a:solidFill>
-                  <a:schemeClr val="tx1"/>
-                </a:solidFill>
-                <a:effectLst/>
-                <a:latin typeface="+mn-lt"/>
-                <a:ea typeface="+mn-ea"/>
-                <a:cs typeface="+mn-cs"/>
-              </a:rPr>
-              <a:t>    \</a:t>
-            </a:r>
-            <a:r>
-              <a:rPr lang="en-US" sz="1200" kern="1200" dirty="0" err="1">
-                <a:solidFill>
-                  <a:schemeClr val="tx1"/>
-                </a:solidFill>
-                <a:effectLst/>
-                <a:latin typeface="+mn-lt"/>
-                <a:ea typeface="+mn-ea"/>
-                <a:cs typeface="+mn-cs"/>
-              </a:rPr>
-              <a:t>vdots</a:t>
-            </a:r>
-            <a:r>
-              <a:rPr lang="en-US" sz="1200" kern="1200" dirty="0">
-                <a:solidFill>
-                  <a:schemeClr val="tx1"/>
-                </a:solidFill>
-                <a:effectLst/>
-                <a:latin typeface="+mn-lt"/>
-                <a:ea typeface="+mn-ea"/>
-                <a:cs typeface="+mn-cs"/>
-              </a:rPr>
-              <a:t> &amp; \</a:t>
-            </a:r>
-            <a:r>
-              <a:rPr lang="en-US" sz="1200" kern="1200" dirty="0" err="1">
-                <a:solidFill>
-                  <a:schemeClr val="tx1"/>
-                </a:solidFill>
-                <a:effectLst/>
-                <a:latin typeface="+mn-lt"/>
-                <a:ea typeface="+mn-ea"/>
-                <a:cs typeface="+mn-cs"/>
-              </a:rPr>
-              <a:t>vdots</a:t>
-            </a:r>
-            <a:r>
-              <a:rPr lang="en-US" sz="1200" kern="1200" dirty="0">
-                <a:solidFill>
-                  <a:schemeClr val="tx1"/>
-                </a:solidFill>
-                <a:effectLst/>
-                <a:latin typeface="+mn-lt"/>
-                <a:ea typeface="+mn-ea"/>
-                <a:cs typeface="+mn-cs"/>
-              </a:rPr>
-              <a:t> &amp; &amp;  \</a:t>
-            </a:r>
-            <a:r>
-              <a:rPr lang="en-US" sz="1200" kern="1200" dirty="0" err="1">
-                <a:solidFill>
-                  <a:schemeClr val="tx1"/>
-                </a:solidFill>
-                <a:effectLst/>
-                <a:latin typeface="+mn-lt"/>
-                <a:ea typeface="+mn-ea"/>
-                <a:cs typeface="+mn-cs"/>
-              </a:rPr>
-              <a:t>vdots</a:t>
-            </a:r>
-            <a:r>
-              <a:rPr lang="en-US" sz="1200" kern="1200" dirty="0">
-                <a:solidFill>
-                  <a:schemeClr val="tx1"/>
-                </a:solidFill>
-                <a:effectLst/>
-                <a:latin typeface="+mn-lt"/>
-                <a:ea typeface="+mn-ea"/>
-                <a:cs typeface="+mn-cs"/>
-              </a:rPr>
-              <a:t> \\</a:t>
-            </a:r>
-          </a:p>
-          <a:p>
-            <a:r>
-              <a:rPr lang="en-US" sz="1200" kern="1200" dirty="0">
-                <a:solidFill>
-                  <a:schemeClr val="tx1"/>
-                </a:solidFill>
-                <a:effectLst/>
-                <a:latin typeface="+mn-lt"/>
-                <a:ea typeface="+mn-ea"/>
-                <a:cs typeface="+mn-cs"/>
-              </a:rPr>
-              <a:t>    \psi_{1}^{(q)}(</a:t>
-            </a:r>
-            <a:r>
-              <a:rPr lang="en-US" sz="1200" kern="1200" dirty="0" err="1">
-                <a:solidFill>
-                  <a:schemeClr val="tx1"/>
-                </a:solidFill>
-                <a:effectLst/>
-                <a:latin typeface="+mn-lt"/>
-                <a:ea typeface="+mn-ea"/>
-                <a:cs typeface="+mn-cs"/>
-              </a:rPr>
-              <a:t>t_f</a:t>
-            </a:r>
-            <a:r>
-              <a:rPr lang="en-US" sz="1200" kern="1200" dirty="0">
-                <a:solidFill>
-                  <a:schemeClr val="tx1"/>
-                </a:solidFill>
-                <a:effectLst/>
-                <a:latin typeface="+mn-lt"/>
-                <a:ea typeface="+mn-ea"/>
-                <a:cs typeface="+mn-cs"/>
-              </a:rPr>
-              <a:t>) &amp; \psi_{2}^{(q)}(</a:t>
-            </a:r>
-            <a:r>
-              <a:rPr lang="en-US" sz="1200" kern="1200" dirty="0" err="1">
-                <a:solidFill>
-                  <a:schemeClr val="tx1"/>
-                </a:solidFill>
-                <a:effectLst/>
-                <a:latin typeface="+mn-lt"/>
-                <a:ea typeface="+mn-ea"/>
-                <a:cs typeface="+mn-cs"/>
-              </a:rPr>
-              <a:t>t_f</a:t>
-            </a:r>
-            <a:r>
-              <a:rPr lang="en-US" sz="1200" kern="1200" dirty="0">
-                <a:solidFill>
-                  <a:schemeClr val="tx1"/>
-                </a:solidFill>
-                <a:effectLst/>
-                <a:latin typeface="+mn-lt"/>
-                <a:ea typeface="+mn-ea"/>
-                <a:cs typeface="+mn-cs"/>
-              </a:rPr>
-              <a:t>) &amp;  \dots  &amp; \psi_{N}^{(q)}(</a:t>
-            </a:r>
-            <a:r>
-              <a:rPr lang="en-US" sz="1200" kern="1200" dirty="0" err="1">
-                <a:solidFill>
-                  <a:schemeClr val="tx1"/>
-                </a:solidFill>
-                <a:effectLst/>
-                <a:latin typeface="+mn-lt"/>
-                <a:ea typeface="+mn-ea"/>
-                <a:cs typeface="+mn-cs"/>
-              </a:rPr>
-              <a:t>t_f</a:t>
-            </a:r>
-            <a:r>
-              <a:rPr lang="en-US" sz="1200" kern="1200" dirty="0">
-                <a:solidFill>
-                  <a:schemeClr val="tx1"/>
-                </a:solidFill>
-                <a:effectLst/>
-                <a:latin typeface="+mn-lt"/>
-                <a:ea typeface="+mn-ea"/>
-                <a:cs typeface="+mn-cs"/>
-              </a:rPr>
-              <a:t>) \\</a:t>
-            </a:r>
-          </a:p>
-          <a:p>
-            <a:r>
-              <a:rPr lang="en-US" sz="1200" kern="1200" dirty="0">
-                <a:solidFill>
-                  <a:schemeClr val="tx1"/>
-                </a:solidFill>
-                <a:effectLst/>
-                <a:latin typeface="+mn-lt"/>
-                <a:ea typeface="+mn-ea"/>
-                <a:cs typeface="+mn-cs"/>
-              </a:rPr>
-              <a:t>\end{</a:t>
-            </a:r>
-            <a:r>
-              <a:rPr lang="en-US" sz="1200" kern="1200" dirty="0" err="1">
-                <a:solidFill>
-                  <a:schemeClr val="tx1"/>
-                </a:solidFill>
-                <a:effectLst/>
-                <a:latin typeface="+mn-lt"/>
-                <a:ea typeface="+mn-ea"/>
-                <a:cs typeface="+mn-cs"/>
-              </a:rPr>
-              <a:t>bmatrix</a:t>
-            </a:r>
-            <a:r>
-              <a:rPr lang="en-US" sz="1200" kern="1200" dirty="0">
-                <a:solidFill>
-                  <a:schemeClr val="tx1"/>
-                </a:solidFill>
-                <a:effectLst/>
-                <a:latin typeface="+mn-lt"/>
-                <a:ea typeface="+mn-ea"/>
-                <a:cs typeface="+mn-cs"/>
-              </a:rPr>
-              <a:t>} </a:t>
-            </a:r>
-          </a:p>
-          <a:p>
-            <a:r>
-              <a:rPr lang="en-US" sz="1200" kern="1200" dirty="0">
-                <a:solidFill>
-                  <a:schemeClr val="tx1"/>
-                </a:solidFill>
-                <a:effectLst/>
-                <a:latin typeface="+mn-lt"/>
-                <a:ea typeface="+mn-ea"/>
-                <a:cs typeface="+mn-cs"/>
-              </a:rPr>
-              <a:t>\begin{</a:t>
-            </a:r>
-            <a:r>
-              <a:rPr lang="en-US" sz="1200" kern="1200" dirty="0" err="1">
-                <a:solidFill>
-                  <a:schemeClr val="tx1"/>
-                </a:solidFill>
-                <a:effectLst/>
-                <a:latin typeface="+mn-lt"/>
-                <a:ea typeface="+mn-ea"/>
-                <a:cs typeface="+mn-cs"/>
-              </a:rPr>
-              <a:t>bmatrix</a:t>
-            </a:r>
-            <a:r>
-              <a:rPr lang="en-US" sz="1200" kern="1200" dirty="0">
-                <a:solidFill>
-                  <a:schemeClr val="tx1"/>
-                </a:solidFill>
-                <a:effectLst/>
-                <a:latin typeface="+mn-lt"/>
-                <a:ea typeface="+mn-ea"/>
-                <a:cs typeface="+mn-cs"/>
-              </a:rPr>
-              <a:t>}</a:t>
-            </a:r>
-          </a:p>
-          <a:p>
-            <a:r>
-              <a:rPr lang="en-US" sz="1200" kern="1200" dirty="0">
-                <a:solidFill>
-                  <a:schemeClr val="tx1"/>
-                </a:solidFill>
-                <a:effectLst/>
-                <a:latin typeface="+mn-lt"/>
-                <a:ea typeface="+mn-ea"/>
-                <a:cs typeface="+mn-cs"/>
-              </a:rPr>
-              <a:t>    \alpha_{1} \\</a:t>
-            </a:r>
-          </a:p>
-          <a:p>
-            <a:r>
-              <a:rPr lang="en-US" sz="1200" kern="1200" dirty="0">
-                <a:solidFill>
-                  <a:schemeClr val="tx1"/>
-                </a:solidFill>
-                <a:effectLst/>
-                <a:latin typeface="+mn-lt"/>
-                <a:ea typeface="+mn-ea"/>
-                <a:cs typeface="+mn-cs"/>
-              </a:rPr>
-              <a:t>    \alpha_{2}\\</a:t>
-            </a:r>
-          </a:p>
-          <a:p>
-            <a:r>
-              <a:rPr lang="en-US" sz="1200" kern="1200" dirty="0">
-                <a:solidFill>
-                  <a:schemeClr val="tx1"/>
-                </a:solidFill>
-                <a:effectLst/>
-                <a:latin typeface="+mn-lt"/>
-                <a:ea typeface="+mn-ea"/>
-                <a:cs typeface="+mn-cs"/>
-              </a:rPr>
-              <a:t>    \</a:t>
-            </a:r>
-            <a:r>
-              <a:rPr lang="en-US" sz="1200" kern="1200" dirty="0" err="1">
-                <a:solidFill>
-                  <a:schemeClr val="tx1"/>
-                </a:solidFill>
-                <a:effectLst/>
-                <a:latin typeface="+mn-lt"/>
-                <a:ea typeface="+mn-ea"/>
-                <a:cs typeface="+mn-cs"/>
-              </a:rPr>
-              <a:t>vdots</a:t>
-            </a:r>
-            <a:r>
-              <a:rPr lang="en-US" sz="1200" kern="1200" dirty="0">
-                <a:solidFill>
-                  <a:schemeClr val="tx1"/>
-                </a:solidFill>
-                <a:effectLst/>
-                <a:latin typeface="+mn-lt"/>
-                <a:ea typeface="+mn-ea"/>
-                <a:cs typeface="+mn-cs"/>
-              </a:rPr>
-              <a:t> \\</a:t>
-            </a:r>
-          </a:p>
-          <a:p>
-            <a:r>
-              <a:rPr lang="en-US" sz="1200" kern="1200" dirty="0">
-                <a:solidFill>
-                  <a:schemeClr val="tx1"/>
-                </a:solidFill>
-                <a:effectLst/>
-                <a:latin typeface="+mn-lt"/>
-                <a:ea typeface="+mn-ea"/>
-                <a:cs typeface="+mn-cs"/>
-              </a:rPr>
-              <a:t>    \alpha_{N}</a:t>
-            </a:r>
-          </a:p>
-          <a:p>
-            <a:r>
-              <a:rPr lang="en-US" sz="1200" kern="1200" dirty="0">
-                <a:solidFill>
-                  <a:schemeClr val="tx1"/>
-                </a:solidFill>
-                <a:effectLst/>
-                <a:latin typeface="+mn-lt"/>
-                <a:ea typeface="+mn-ea"/>
-                <a:cs typeface="+mn-cs"/>
-              </a:rPr>
-              <a:t>\end{</a:t>
-            </a:r>
-            <a:r>
-              <a:rPr lang="en-US" sz="1200" kern="1200" dirty="0" err="1">
-                <a:solidFill>
-                  <a:schemeClr val="tx1"/>
-                </a:solidFill>
-                <a:effectLst/>
-                <a:latin typeface="+mn-lt"/>
-                <a:ea typeface="+mn-ea"/>
-                <a:cs typeface="+mn-cs"/>
-              </a:rPr>
-              <a:t>bmatrix</a:t>
-            </a:r>
-            <a:r>
-              <a:rPr lang="en-US" sz="1200" kern="1200" dirty="0">
-                <a:solidFill>
-                  <a:schemeClr val="tx1"/>
-                </a:solidFill>
-                <a:effectLst/>
-                <a:latin typeface="+mn-lt"/>
-                <a:ea typeface="+mn-ea"/>
-                <a:cs typeface="+mn-cs"/>
-              </a:rPr>
-              <a:t>} = </a:t>
-            </a:r>
-          </a:p>
-          <a:p>
-            <a:r>
-              <a:rPr lang="en-US" sz="1200" kern="1200" dirty="0">
-                <a:solidFill>
-                  <a:schemeClr val="tx1"/>
-                </a:solidFill>
-                <a:effectLst/>
-                <a:latin typeface="+mn-lt"/>
-                <a:ea typeface="+mn-ea"/>
-                <a:cs typeface="+mn-cs"/>
-              </a:rPr>
-              <a:t>\begin{</a:t>
-            </a:r>
-            <a:r>
-              <a:rPr lang="en-US" sz="1200" kern="1200" dirty="0" err="1">
-                <a:solidFill>
-                  <a:schemeClr val="tx1"/>
-                </a:solidFill>
-                <a:effectLst/>
-                <a:latin typeface="+mn-lt"/>
-                <a:ea typeface="+mn-ea"/>
-                <a:cs typeface="+mn-cs"/>
-              </a:rPr>
-              <a:t>bmatrix</a:t>
-            </a:r>
-            <a:r>
-              <a:rPr lang="en-US" sz="1200" kern="1200" dirty="0">
-                <a:solidFill>
-                  <a:schemeClr val="tx1"/>
-                </a:solidFill>
-                <a:effectLst/>
-                <a:latin typeface="+mn-lt"/>
-                <a:ea typeface="+mn-ea"/>
-                <a:cs typeface="+mn-cs"/>
-              </a:rPr>
-              <a:t>}</a:t>
-            </a:r>
-          </a:p>
-          <a:p>
-            <a:r>
-              <a:rPr lang="en-US" sz="1200" kern="1200" dirty="0">
-                <a:solidFill>
-                  <a:schemeClr val="tx1"/>
-                </a:solidFill>
-                <a:effectLst/>
-                <a:latin typeface="+mn-lt"/>
-                <a:ea typeface="+mn-ea"/>
-                <a:cs typeface="+mn-cs"/>
-              </a:rPr>
-              <a:t>    </a:t>
-            </a:r>
-            <a:r>
-              <a:rPr lang="en-US" sz="1200" kern="1200" dirty="0" err="1">
-                <a:solidFill>
-                  <a:schemeClr val="tx1"/>
-                </a:solidFill>
-                <a:effectLst/>
-                <a:latin typeface="+mn-lt"/>
-                <a:ea typeface="+mn-ea"/>
-                <a:cs typeface="+mn-cs"/>
-              </a:rPr>
-              <a:t>z_j</a:t>
-            </a:r>
-            <a:r>
-              <a:rPr lang="en-US" sz="1200" kern="1200" dirty="0">
-                <a:solidFill>
-                  <a:schemeClr val="tx1"/>
-                </a:solidFill>
-                <a:effectLst/>
-                <a:latin typeface="+mn-lt"/>
-                <a:ea typeface="+mn-ea"/>
-                <a:cs typeface="+mn-cs"/>
-              </a:rPr>
-              <a:t>(t_0)  \\</a:t>
-            </a:r>
-          </a:p>
-          <a:p>
-            <a:r>
-              <a:rPr lang="en-US" sz="1200" kern="1200" dirty="0">
-                <a:solidFill>
-                  <a:schemeClr val="tx1"/>
-                </a:solidFill>
-                <a:effectLst/>
-                <a:latin typeface="+mn-lt"/>
-                <a:ea typeface="+mn-ea"/>
-                <a:cs typeface="+mn-cs"/>
-              </a:rPr>
-              <a:t>    \dot{z}_j(t_0)  \\</a:t>
-            </a:r>
-          </a:p>
-          <a:p>
-            <a:r>
-              <a:rPr lang="en-US" sz="1200" kern="1200" dirty="0">
-                <a:solidFill>
-                  <a:schemeClr val="tx1"/>
-                </a:solidFill>
-                <a:effectLst/>
-                <a:latin typeface="+mn-lt"/>
-                <a:ea typeface="+mn-ea"/>
-                <a:cs typeface="+mn-cs"/>
-              </a:rPr>
-              <a:t>    \</a:t>
-            </a:r>
-            <a:r>
-              <a:rPr lang="en-US" sz="1200" kern="1200" dirty="0" err="1">
-                <a:solidFill>
-                  <a:schemeClr val="tx1"/>
-                </a:solidFill>
-                <a:effectLst/>
-                <a:latin typeface="+mn-lt"/>
-                <a:ea typeface="+mn-ea"/>
-                <a:cs typeface="+mn-cs"/>
-              </a:rPr>
-              <a:t>vdots</a:t>
-            </a:r>
-            <a:r>
-              <a:rPr lang="en-US" sz="1200" kern="1200" dirty="0">
-                <a:solidFill>
-                  <a:schemeClr val="tx1"/>
-                </a:solidFill>
-                <a:effectLst/>
-                <a:latin typeface="+mn-lt"/>
-                <a:ea typeface="+mn-ea"/>
-                <a:cs typeface="+mn-cs"/>
-              </a:rPr>
-              <a:t> \\</a:t>
-            </a:r>
-          </a:p>
-          <a:p>
-            <a:r>
-              <a:rPr lang="en-US" sz="1200" kern="1200" dirty="0">
-                <a:solidFill>
-                  <a:schemeClr val="tx1"/>
-                </a:solidFill>
-                <a:effectLst/>
-                <a:latin typeface="+mn-lt"/>
-                <a:ea typeface="+mn-ea"/>
-                <a:cs typeface="+mn-cs"/>
-              </a:rPr>
-              <a:t>    z^{(q)}_j(t_0)  \\</a:t>
-            </a:r>
-          </a:p>
-          <a:p>
-            <a:r>
-              <a:rPr lang="en-US" sz="1200" kern="1200" dirty="0">
-                <a:solidFill>
-                  <a:schemeClr val="tx1"/>
-                </a:solidFill>
-                <a:effectLst/>
-                <a:latin typeface="+mn-lt"/>
-                <a:ea typeface="+mn-ea"/>
-                <a:cs typeface="+mn-cs"/>
-              </a:rPr>
-              <a:t>        </a:t>
-            </a:r>
-            <a:r>
-              <a:rPr lang="en-US" sz="1200" kern="1200" dirty="0" err="1">
-                <a:solidFill>
-                  <a:schemeClr val="tx1"/>
-                </a:solidFill>
-                <a:effectLst/>
-                <a:latin typeface="+mn-lt"/>
-                <a:ea typeface="+mn-ea"/>
-                <a:cs typeface="+mn-cs"/>
-              </a:rPr>
-              <a:t>z_j</a:t>
-            </a:r>
-            <a:r>
-              <a:rPr lang="en-US" sz="1200" kern="1200" dirty="0">
-                <a:solidFill>
-                  <a:schemeClr val="tx1"/>
-                </a:solidFill>
-                <a:effectLst/>
-                <a:latin typeface="+mn-lt"/>
-                <a:ea typeface="+mn-ea"/>
-                <a:cs typeface="+mn-cs"/>
-              </a:rPr>
-              <a:t>(</a:t>
-            </a:r>
-            <a:r>
-              <a:rPr lang="en-US" sz="1200" kern="1200" dirty="0" err="1">
-                <a:solidFill>
-                  <a:schemeClr val="tx1"/>
-                </a:solidFill>
-                <a:effectLst/>
-                <a:latin typeface="+mn-lt"/>
-                <a:ea typeface="+mn-ea"/>
-                <a:cs typeface="+mn-cs"/>
-              </a:rPr>
-              <a:t>t_f</a:t>
-            </a:r>
-            <a:r>
-              <a:rPr lang="en-US" sz="1200" kern="1200" dirty="0">
-                <a:solidFill>
-                  <a:schemeClr val="tx1"/>
-                </a:solidFill>
-                <a:effectLst/>
-                <a:latin typeface="+mn-lt"/>
-                <a:ea typeface="+mn-ea"/>
-                <a:cs typeface="+mn-cs"/>
-              </a:rPr>
-              <a:t>)  \\</a:t>
-            </a:r>
-          </a:p>
-          <a:p>
-            <a:r>
-              <a:rPr lang="en-US" sz="1200" kern="1200" dirty="0">
-                <a:solidFill>
-                  <a:schemeClr val="tx1"/>
-                </a:solidFill>
-                <a:effectLst/>
-                <a:latin typeface="+mn-lt"/>
-                <a:ea typeface="+mn-ea"/>
-                <a:cs typeface="+mn-cs"/>
-              </a:rPr>
-              <a:t>    \dot{z}_j(</a:t>
-            </a:r>
-            <a:r>
-              <a:rPr lang="en-US" sz="1200" kern="1200" dirty="0" err="1">
-                <a:solidFill>
-                  <a:schemeClr val="tx1"/>
-                </a:solidFill>
-                <a:effectLst/>
-                <a:latin typeface="+mn-lt"/>
-                <a:ea typeface="+mn-ea"/>
-                <a:cs typeface="+mn-cs"/>
-              </a:rPr>
-              <a:t>t_f</a:t>
-            </a:r>
-            <a:r>
-              <a:rPr lang="en-US" sz="1200" kern="1200" dirty="0">
-                <a:solidFill>
-                  <a:schemeClr val="tx1"/>
-                </a:solidFill>
-                <a:effectLst/>
-                <a:latin typeface="+mn-lt"/>
-                <a:ea typeface="+mn-ea"/>
-                <a:cs typeface="+mn-cs"/>
-              </a:rPr>
-              <a:t>) \\</a:t>
-            </a:r>
-          </a:p>
-          <a:p>
-            <a:r>
-              <a:rPr lang="en-US" sz="1200" kern="1200" dirty="0">
-                <a:solidFill>
-                  <a:schemeClr val="tx1"/>
-                </a:solidFill>
-                <a:effectLst/>
-                <a:latin typeface="+mn-lt"/>
-                <a:ea typeface="+mn-ea"/>
-                <a:cs typeface="+mn-cs"/>
-              </a:rPr>
-              <a:t>    \</a:t>
-            </a:r>
-            <a:r>
-              <a:rPr lang="en-US" sz="1200" kern="1200" dirty="0" err="1">
-                <a:solidFill>
-                  <a:schemeClr val="tx1"/>
-                </a:solidFill>
-                <a:effectLst/>
-                <a:latin typeface="+mn-lt"/>
-                <a:ea typeface="+mn-ea"/>
-                <a:cs typeface="+mn-cs"/>
-              </a:rPr>
-              <a:t>vdots</a:t>
-            </a:r>
-            <a:r>
-              <a:rPr lang="en-US" sz="1200" kern="1200" dirty="0">
-                <a:solidFill>
-                  <a:schemeClr val="tx1"/>
-                </a:solidFill>
-                <a:effectLst/>
-                <a:latin typeface="+mn-lt"/>
-                <a:ea typeface="+mn-ea"/>
-                <a:cs typeface="+mn-cs"/>
-              </a:rPr>
-              <a:t>  \\</a:t>
-            </a:r>
-          </a:p>
-          <a:p>
-            <a:r>
-              <a:rPr lang="en-US" sz="1200" kern="1200" dirty="0">
-                <a:solidFill>
-                  <a:schemeClr val="tx1"/>
-                </a:solidFill>
-                <a:effectLst/>
-                <a:latin typeface="+mn-lt"/>
-                <a:ea typeface="+mn-ea"/>
-                <a:cs typeface="+mn-cs"/>
-              </a:rPr>
-              <a:t>    z^{(q)}_j(</a:t>
-            </a:r>
-            <a:r>
-              <a:rPr lang="en-US" sz="1200" kern="1200" dirty="0" err="1">
-                <a:solidFill>
-                  <a:schemeClr val="tx1"/>
-                </a:solidFill>
-                <a:effectLst/>
-                <a:latin typeface="+mn-lt"/>
-                <a:ea typeface="+mn-ea"/>
-                <a:cs typeface="+mn-cs"/>
-              </a:rPr>
-              <a:t>t_f</a:t>
-            </a:r>
-            <a:r>
-              <a:rPr lang="en-US" sz="1200" kern="1200" dirty="0">
-                <a:solidFill>
-                  <a:schemeClr val="tx1"/>
-                </a:solidFill>
-                <a:effectLst/>
-                <a:latin typeface="+mn-lt"/>
-                <a:ea typeface="+mn-ea"/>
-                <a:cs typeface="+mn-cs"/>
-              </a:rPr>
-              <a:t>)  \\</a:t>
-            </a:r>
-          </a:p>
-          <a:p>
-            <a:r>
-              <a:rPr lang="en-US" sz="1200" kern="1200" dirty="0">
-                <a:solidFill>
-                  <a:schemeClr val="tx1"/>
-                </a:solidFill>
-                <a:effectLst/>
-                <a:latin typeface="+mn-lt"/>
-                <a:ea typeface="+mn-ea"/>
-                <a:cs typeface="+mn-cs"/>
-              </a:rPr>
-              <a:t>\end{</a:t>
-            </a:r>
-            <a:r>
-              <a:rPr lang="en-US" sz="1200" kern="1200" dirty="0" err="1">
-                <a:solidFill>
-                  <a:schemeClr val="tx1"/>
-                </a:solidFill>
-                <a:effectLst/>
-                <a:latin typeface="+mn-lt"/>
-                <a:ea typeface="+mn-ea"/>
-                <a:cs typeface="+mn-cs"/>
-              </a:rPr>
-              <a:t>bmatrix</a:t>
-            </a:r>
-            <a:r>
-              <a:rPr lang="en-US" sz="1200" kern="1200" dirty="0">
-                <a:solidFill>
-                  <a:schemeClr val="tx1"/>
-                </a:solidFill>
-                <a:effectLst/>
-                <a:latin typeface="+mn-lt"/>
-                <a:ea typeface="+mn-ea"/>
-                <a:cs typeface="+mn-cs"/>
-              </a:rPr>
-              <a:t>} </a:t>
-            </a:r>
-          </a:p>
-          <a:p>
-            <a:endParaRPr lang="en-US" sz="1200" kern="1200" dirty="0">
-              <a:solidFill>
-                <a:schemeClr val="tx1"/>
-              </a:solidFill>
-              <a:effectLst/>
-              <a:latin typeface="+mn-lt"/>
-              <a:ea typeface="+mn-ea"/>
-              <a:cs typeface="+mn-cs"/>
-            </a:endParaRPr>
-          </a:p>
-          <a:p>
-            <a:endParaRPr lang="en-US" sz="1200" kern="1200" dirty="0">
-              <a:solidFill>
-                <a:schemeClr val="tx1"/>
-              </a:solidFill>
-              <a:effectLst/>
-              <a:latin typeface="+mn-lt"/>
-              <a:ea typeface="+mn-ea"/>
-              <a:cs typeface="+mn-cs"/>
-            </a:endParaRPr>
-          </a:p>
-          <a:p>
-            <a:br>
-              <a:rPr lang="en-US" sz="1200" kern="1200" dirty="0">
-                <a:solidFill>
-                  <a:schemeClr val="tx1"/>
-                </a:solidFill>
-                <a:effectLst/>
-                <a:latin typeface="+mn-lt"/>
-                <a:ea typeface="+mn-ea"/>
-                <a:cs typeface="+mn-cs"/>
-              </a:rPr>
-            </a:br>
-            <a:endParaRPr lang="en-US" sz="1200" kern="1200" dirty="0">
-              <a:solidFill>
-                <a:schemeClr val="tx1"/>
-              </a:solidFill>
-              <a:effectLst/>
-              <a:latin typeface="+mn-lt"/>
-              <a:ea typeface="+mn-ea"/>
-              <a:cs typeface="+mn-cs"/>
-            </a:endParaRPr>
-          </a:p>
-          <a:p>
-            <a:r>
-              <a:rPr lang="en-US" sz="1200" kern="1200" dirty="0" err="1">
-                <a:solidFill>
-                  <a:schemeClr val="tx1"/>
-                </a:solidFill>
-                <a:effectLst/>
-                <a:latin typeface="+mn-lt"/>
-                <a:ea typeface="+mn-ea"/>
-                <a:cs typeface="+mn-cs"/>
-              </a:rPr>
-              <a:t>z_j</a:t>
-            </a:r>
-            <a:r>
-              <a:rPr lang="en-US" sz="1200" kern="1200" dirty="0">
-                <a:solidFill>
-                  <a:schemeClr val="tx1"/>
-                </a:solidFill>
-                <a:effectLst/>
-                <a:latin typeface="+mn-lt"/>
-                <a:ea typeface="+mn-ea"/>
-                <a:cs typeface="+mn-cs"/>
-              </a:rPr>
-              <a:t>(t) = \sum_{</a:t>
-            </a:r>
-            <a:r>
-              <a:rPr lang="en-US" sz="1200" kern="1200" dirty="0" err="1">
-                <a:solidFill>
-                  <a:schemeClr val="tx1"/>
-                </a:solidFill>
-                <a:effectLst/>
-                <a:latin typeface="+mn-lt"/>
-                <a:ea typeface="+mn-ea"/>
-                <a:cs typeface="+mn-cs"/>
-              </a:rPr>
-              <a:t>i</a:t>
-            </a:r>
-            <a:r>
-              <a:rPr lang="en-US" sz="1200" kern="1200" dirty="0">
-                <a:solidFill>
-                  <a:schemeClr val="tx1"/>
-                </a:solidFill>
-                <a:effectLst/>
-                <a:latin typeface="+mn-lt"/>
-                <a:ea typeface="+mn-ea"/>
-                <a:cs typeface="+mn-cs"/>
-              </a:rPr>
-              <a:t>=1}^N \, \</a:t>
-            </a:r>
-            <a:r>
-              <a:rPr lang="en-US" sz="1200" kern="1200" dirty="0" err="1">
-                <a:solidFill>
-                  <a:schemeClr val="tx1"/>
-                </a:solidFill>
-                <a:effectLst/>
-                <a:latin typeface="+mn-lt"/>
-                <a:ea typeface="+mn-ea"/>
-                <a:cs typeface="+mn-cs"/>
-              </a:rPr>
-              <a:t>alpha_i</a:t>
-            </a:r>
-            <a:r>
-              <a:rPr lang="en-US" sz="1200" kern="1200" dirty="0">
-                <a:solidFill>
-                  <a:schemeClr val="tx1"/>
-                </a:solidFill>
-                <a:effectLst/>
-                <a:latin typeface="+mn-lt"/>
-                <a:ea typeface="+mn-ea"/>
-                <a:cs typeface="+mn-cs"/>
-              </a:rPr>
-              <a:t>^{[j]} \</a:t>
-            </a:r>
-            <a:r>
-              <a:rPr lang="en-US" sz="1200" kern="1200" dirty="0" err="1">
-                <a:solidFill>
-                  <a:schemeClr val="tx1"/>
-                </a:solidFill>
-                <a:effectLst/>
-                <a:latin typeface="+mn-lt"/>
-                <a:ea typeface="+mn-ea"/>
-                <a:cs typeface="+mn-cs"/>
-              </a:rPr>
-              <a:t>psi_i</a:t>
-            </a:r>
-            <a:r>
-              <a:rPr lang="en-US" sz="1200" kern="1200" dirty="0">
-                <a:solidFill>
-                  <a:schemeClr val="tx1"/>
-                </a:solidFill>
-                <a:effectLst/>
-                <a:latin typeface="+mn-lt"/>
-                <a:ea typeface="+mn-ea"/>
-                <a:cs typeface="+mn-cs"/>
-              </a:rPr>
-              <a:t>(t)</a:t>
-            </a:r>
-          </a:p>
-          <a:p>
-            <a:endParaRPr lang="en-US" sz="1200" kern="1200" dirty="0">
-              <a:solidFill>
-                <a:schemeClr val="tx1"/>
-              </a:solidFill>
-              <a:effectLst/>
-              <a:latin typeface="+mn-lt"/>
-              <a:ea typeface="+mn-ea"/>
-              <a:cs typeface="+mn-cs"/>
-            </a:endParaRPr>
-          </a:p>
-          <a:p>
-            <a:br>
-              <a:rPr lang="en-US" sz="1200" kern="1200" dirty="0">
-                <a:solidFill>
-                  <a:schemeClr val="tx1"/>
-                </a:solidFill>
-                <a:effectLst/>
-                <a:latin typeface="+mn-lt"/>
-                <a:ea typeface="+mn-ea"/>
-                <a:cs typeface="+mn-cs"/>
-              </a:rPr>
-            </a:br>
-            <a:endParaRPr lang="en-US" sz="1200" kern="1200" dirty="0">
-              <a:solidFill>
-                <a:schemeClr val="tx1"/>
-              </a:solidFill>
-              <a:effectLst/>
-              <a:latin typeface="+mn-lt"/>
-              <a:ea typeface="+mn-ea"/>
-              <a:cs typeface="+mn-cs"/>
-            </a:endParaRPr>
-          </a:p>
-          <a:p>
-            <a:pPr marL="0" marR="0" indent="0" algn="l" defTabSz="914400" rtl="0" eaLnBrk="1" fontAlgn="auto" latinLnBrk="0" hangingPunct="1">
-              <a:lnSpc>
-                <a:spcPct val="100000"/>
-              </a:lnSpc>
-              <a:spcBef>
-                <a:spcPts val="0"/>
-              </a:spcBef>
-              <a:spcAft>
-                <a:spcPts val="0"/>
-              </a:spcAft>
-              <a:buClrTx/>
-              <a:buSzTx/>
-              <a:buFontTx/>
-              <a:buNone/>
-              <a:tabLst/>
-              <a:defRPr/>
-            </a:pPr>
-            <a:endParaRPr lang="en-US" sz="1200" kern="1200" dirty="0">
-              <a:solidFill>
-                <a:schemeClr val="tx1"/>
-              </a:solidFill>
-              <a:effectLst/>
-              <a:latin typeface="+mn-lt"/>
-              <a:ea typeface="+mn-ea"/>
-              <a:cs typeface="+mn-cs"/>
-            </a:endParaRPr>
-          </a:p>
-          <a:p>
-            <a:endParaRPr lang="en-US" dirty="0"/>
-          </a:p>
-        </p:txBody>
-      </p:sp>
-      <p:sp>
-        <p:nvSpPr>
-          <p:cNvPr id="4" name="Slide Number Placeholder 3"/>
-          <p:cNvSpPr>
-            <a:spLocks noGrp="1"/>
-          </p:cNvSpPr>
-          <p:nvPr>
-            <p:ph type="sldNum" sz="quarter" idx="10"/>
-          </p:nvPr>
-        </p:nvSpPr>
-        <p:spPr/>
-        <p:txBody>
-          <a:bodyPr/>
-          <a:lstStyle/>
-          <a:p>
-            <a:fld id="{63B2D7EC-928D-0645-AAE8-498D7443D60E}" type="slidenum">
-              <a:rPr lang="en-US" smtClean="0"/>
-              <a:t>27</a:t>
-            </a:fld>
-            <a:endParaRPr lang="en-US"/>
-          </a:p>
-        </p:txBody>
-      </p:sp>
-    </p:spTree>
-    <p:extLst>
-      <p:ext uri="{BB962C8B-B14F-4D97-AF65-F5344CB8AC3E}">
-        <p14:creationId xmlns:p14="http://schemas.microsoft.com/office/powerpoint/2010/main" val="240609884"/>
-      </p:ext>
-    </p:extLst>
-  </p:cSld>
-  <p:clrMapOvr>
-    <a:masterClrMapping/>
-  </p:clrMapOvr>
-</p:notes>
-</file>
-
 <file path=ppt/notesSlides/notesSlide23.xml><?xml version="1.0" encoding="utf-8"?>
 <p:notes xmlns:a="http://schemas.openxmlformats.org/drawingml/2006/main" xmlns:r="http://schemas.openxmlformats.org/officeDocument/2006/relationships" xmlns:p="http://schemas.openxmlformats.org/presentationml/2006/main">
   <p:cSld>
@@ -5849,24 +2124,7 @@
           <a:bodyPr/>
           <a:lstStyle/>
           <a:p>
-            <a:pPr marL="171450" indent="-171450">
-              <a:buFont typeface="Arial" panose="020B0604020202020204" pitchFamily="34" charset="0"/>
-              <a:buChar char="•"/>
-            </a:pPr>
-            <a:r>
-              <a:rPr lang="en-US" dirty="0"/>
-              <a:t>path, a purely geometric description of the sequence of configurations achieved by the robot</a:t>
-            </a:r>
-          </a:p>
-          <a:p>
-            <a:pPr marL="171450" indent="-171450">
-              <a:buFont typeface="Arial" panose="020B0604020202020204" pitchFamily="34" charset="0"/>
-              <a:buChar char="•"/>
-            </a:pPr>
-            <a:r>
-              <a:rPr lang="en-US" dirty="0"/>
-              <a:t>time scaling, which specifies the times when those configurations are reached</a:t>
-            </a:r>
+            <a:endParaRPr lang="en-US" dirty="0"/>
           </a:p>
         </p:txBody>
       </p:sp>
@@ -5887,7 +2145,7 @@
           <a:p>
             <a:fld id="{63B2D7EC-928D-0645-AAE8-498D7443D60E}" type="slidenum">
               <a:rPr lang="en-US" smtClean="0"/>
-              <a:t>28</a:t>
+              <a:t>26</a:t>
             </a:fld>
             <a:endParaRPr lang="en-US"/>
           </a:p>
@@ -5896,7 +2154,7 @@
     </p:spTree>
     <p:extLst>
       <p:ext uri="{BB962C8B-B14F-4D97-AF65-F5344CB8AC3E}">
-        <p14:creationId xmlns:p14="http://schemas.microsoft.com/office/powerpoint/2010/main" val="2324825307"/>
+        <p14:creationId xmlns:p14="http://schemas.microsoft.com/office/powerpoint/2010/main" val="701331627"/>
       </p:ext>
     </p:extLst>
   </p:cSld>
@@ -5950,1279 +2208,177 @@
           <a:bodyPr/>
           <a:lstStyle/>
           <a:p>
-            <a:r>
-              <a:rPr lang="en-US" sz="1200" kern="1200" dirty="0">
-                <a:solidFill>
-                  <a:schemeClr val="tx1"/>
-                </a:solidFill>
-                <a:effectLst/>
-                <a:latin typeface="+mn-lt"/>
-                <a:ea typeface="+mn-ea"/>
-                <a:cs typeface="+mn-cs"/>
-              </a:rPr>
-              <a:t>    \begin{</a:t>
-            </a:r>
-            <a:r>
-              <a:rPr lang="en-US" sz="1200" kern="1200" dirty="0" err="1">
-                <a:solidFill>
-                  <a:schemeClr val="tx1"/>
-                </a:solidFill>
-                <a:effectLst/>
-                <a:latin typeface="+mn-lt"/>
-                <a:ea typeface="+mn-ea"/>
-                <a:cs typeface="+mn-cs"/>
-              </a:rPr>
-              <a:t>bmatrix</a:t>
-            </a:r>
-            <a:r>
-              <a:rPr lang="en-US" sz="1200" kern="1200" dirty="0">
-                <a:solidFill>
-                  <a:schemeClr val="tx1"/>
-                </a:solidFill>
-                <a:effectLst/>
-                <a:latin typeface="+mn-lt"/>
-                <a:ea typeface="+mn-ea"/>
-                <a:cs typeface="+mn-cs"/>
-              </a:rPr>
-              <a:t>}</a:t>
-            </a:r>
-          </a:p>
-          <a:p>
-            <a:r>
-              <a:rPr lang="en-US" sz="1200" kern="1200" dirty="0">
-                <a:solidFill>
-                  <a:schemeClr val="tx1"/>
-                </a:solidFill>
-                <a:effectLst/>
-                <a:latin typeface="+mn-lt"/>
-                <a:ea typeface="+mn-ea"/>
-                <a:cs typeface="+mn-cs"/>
-              </a:rPr>
-              <a:t>      \dot x \\ \dot </a:t>
-            </a:r>
-            <a:r>
-              <a:rPr lang="en-US" sz="1200" kern="1200" dirty="0" err="1">
-                <a:solidFill>
-                  <a:schemeClr val="tx1"/>
-                </a:solidFill>
-                <a:effectLst/>
-                <a:latin typeface="+mn-lt"/>
-                <a:ea typeface="+mn-ea"/>
-                <a:cs typeface="+mn-cs"/>
-              </a:rPr>
-              <a:t>v_x</a:t>
-            </a:r>
-            <a:r>
-              <a:rPr lang="en-US" sz="1200" kern="1200" dirty="0">
-                <a:solidFill>
-                  <a:schemeClr val="tx1"/>
-                </a:solidFill>
-                <a:effectLst/>
-                <a:latin typeface="+mn-lt"/>
-                <a:ea typeface="+mn-ea"/>
-                <a:cs typeface="+mn-cs"/>
-              </a:rPr>
-              <a:t> \\ \dot y \\ \dot </a:t>
-            </a:r>
-            <a:r>
-              <a:rPr lang="en-US" sz="1200" kern="1200" dirty="0" err="1">
-                <a:solidFill>
-                  <a:schemeClr val="tx1"/>
-                </a:solidFill>
-                <a:effectLst/>
-                <a:latin typeface="+mn-lt"/>
-                <a:ea typeface="+mn-ea"/>
-                <a:cs typeface="+mn-cs"/>
-              </a:rPr>
-              <a:t>v_y</a:t>
-            </a:r>
-            <a:r>
-              <a:rPr lang="en-US" sz="1200" kern="1200" dirty="0">
-                <a:solidFill>
-                  <a:schemeClr val="tx1"/>
-                </a:solidFill>
-                <a:effectLst/>
-                <a:latin typeface="+mn-lt"/>
-                <a:ea typeface="+mn-ea"/>
-                <a:cs typeface="+mn-cs"/>
-              </a:rPr>
-              <a:t> \\ \dot \phi \\ \dot \omega</a:t>
-            </a:r>
-          </a:p>
-          <a:p>
-            <a:r>
-              <a:rPr lang="en-US" sz="1200" kern="1200" dirty="0">
-                <a:solidFill>
-                  <a:schemeClr val="tx1"/>
-                </a:solidFill>
-                <a:effectLst/>
-                <a:latin typeface="+mn-lt"/>
-                <a:ea typeface="+mn-ea"/>
-                <a:cs typeface="+mn-cs"/>
-              </a:rPr>
-              <a:t>    \end{</a:t>
-            </a:r>
-            <a:r>
-              <a:rPr lang="en-US" sz="1200" kern="1200" dirty="0" err="1">
-                <a:solidFill>
-                  <a:schemeClr val="tx1"/>
-                </a:solidFill>
-                <a:effectLst/>
-                <a:latin typeface="+mn-lt"/>
-                <a:ea typeface="+mn-ea"/>
-                <a:cs typeface="+mn-cs"/>
-              </a:rPr>
-              <a:t>bmatrix</a:t>
-            </a:r>
-            <a:r>
-              <a:rPr lang="en-US" sz="1200" kern="1200" dirty="0">
-                <a:solidFill>
-                  <a:schemeClr val="tx1"/>
-                </a:solidFill>
-                <a:effectLst/>
-                <a:latin typeface="+mn-lt"/>
-                <a:ea typeface="+mn-ea"/>
-                <a:cs typeface="+mn-cs"/>
-              </a:rPr>
-              <a:t>} =</a:t>
-            </a:r>
-          </a:p>
-          <a:p>
-            <a:r>
-              <a:rPr lang="en-US" sz="1200" kern="1200" dirty="0">
-                <a:solidFill>
-                  <a:schemeClr val="tx1"/>
-                </a:solidFill>
-                <a:effectLst/>
-                <a:latin typeface="+mn-lt"/>
-                <a:ea typeface="+mn-ea"/>
-                <a:cs typeface="+mn-cs"/>
-              </a:rPr>
-              <a:t>    \begin{</a:t>
-            </a:r>
-            <a:r>
-              <a:rPr lang="en-US" sz="1200" kern="1200" dirty="0" err="1">
-                <a:solidFill>
-                  <a:schemeClr val="tx1"/>
-                </a:solidFill>
-                <a:effectLst/>
-                <a:latin typeface="+mn-lt"/>
-                <a:ea typeface="+mn-ea"/>
-                <a:cs typeface="+mn-cs"/>
-              </a:rPr>
-              <a:t>bmatrix</a:t>
-            </a:r>
-            <a:r>
-              <a:rPr lang="en-US" sz="1200" kern="1200" dirty="0">
-                <a:solidFill>
-                  <a:schemeClr val="tx1"/>
-                </a:solidFill>
-                <a:effectLst/>
-                <a:latin typeface="+mn-lt"/>
-                <a:ea typeface="+mn-ea"/>
-                <a:cs typeface="+mn-cs"/>
-              </a:rPr>
-              <a:t>}</a:t>
-            </a:r>
-          </a:p>
-          <a:p>
-            <a:r>
-              <a:rPr lang="en-US" sz="1200" kern="1200" dirty="0">
-                <a:solidFill>
-                  <a:schemeClr val="tx1"/>
-                </a:solidFill>
-                <a:effectLst/>
-                <a:latin typeface="+mn-lt"/>
-                <a:ea typeface="+mn-ea"/>
-                <a:cs typeface="+mn-cs"/>
-              </a:rPr>
-              <a:t>      </a:t>
-            </a:r>
-            <a:r>
-              <a:rPr lang="en-US" sz="1200" kern="1200" dirty="0" err="1">
-                <a:solidFill>
-                  <a:schemeClr val="tx1"/>
-                </a:solidFill>
-                <a:effectLst/>
-                <a:latin typeface="+mn-lt"/>
-                <a:ea typeface="+mn-ea"/>
-                <a:cs typeface="+mn-cs"/>
-              </a:rPr>
-              <a:t>v_x</a:t>
-            </a:r>
-            <a:r>
-              <a:rPr lang="en-US" sz="1200" kern="1200" dirty="0">
-                <a:solidFill>
-                  <a:schemeClr val="tx1"/>
-                </a:solidFill>
-                <a:effectLst/>
-                <a:latin typeface="+mn-lt"/>
-                <a:ea typeface="+mn-ea"/>
-                <a:cs typeface="+mn-cs"/>
-              </a:rPr>
-              <a:t> \\ </a:t>
-            </a:r>
-          </a:p>
-          <a:p>
-            <a:r>
-              <a:rPr lang="en-US" sz="1200" kern="1200" dirty="0">
-                <a:solidFill>
-                  <a:schemeClr val="tx1"/>
-                </a:solidFill>
-                <a:effectLst/>
-                <a:latin typeface="+mn-lt"/>
-                <a:ea typeface="+mn-ea"/>
-                <a:cs typeface="+mn-cs"/>
-              </a:rPr>
-              <a:t>      \frac{-(T_1 + T_2) \sin\phi}{m} \\</a:t>
-            </a:r>
-          </a:p>
-          <a:p>
-            <a:r>
-              <a:rPr lang="en-US" sz="1200" kern="1200" dirty="0">
-                <a:solidFill>
-                  <a:schemeClr val="tx1"/>
-                </a:solidFill>
-                <a:effectLst/>
-                <a:latin typeface="+mn-lt"/>
-                <a:ea typeface="+mn-ea"/>
-                <a:cs typeface="+mn-cs"/>
-              </a:rPr>
-              <a:t>      </a:t>
-            </a:r>
-            <a:r>
-              <a:rPr lang="en-US" sz="1200" kern="1200" dirty="0" err="1">
-                <a:solidFill>
-                  <a:schemeClr val="tx1"/>
-                </a:solidFill>
-                <a:effectLst/>
-                <a:latin typeface="+mn-lt"/>
-                <a:ea typeface="+mn-ea"/>
-                <a:cs typeface="+mn-cs"/>
-              </a:rPr>
-              <a:t>v_y</a:t>
-            </a:r>
-            <a:r>
-              <a:rPr lang="en-US" sz="1200" kern="1200" dirty="0">
-                <a:solidFill>
-                  <a:schemeClr val="tx1"/>
-                </a:solidFill>
-                <a:effectLst/>
-                <a:latin typeface="+mn-lt"/>
-                <a:ea typeface="+mn-ea"/>
-                <a:cs typeface="+mn-cs"/>
-              </a:rPr>
-              <a:t> \\</a:t>
-            </a:r>
-          </a:p>
-          <a:p>
-            <a:r>
-              <a:rPr lang="en-US" sz="1200" kern="1200" dirty="0">
-                <a:solidFill>
-                  <a:schemeClr val="tx1"/>
-                </a:solidFill>
-                <a:effectLst/>
-                <a:latin typeface="+mn-lt"/>
-                <a:ea typeface="+mn-ea"/>
-                <a:cs typeface="+mn-cs"/>
-              </a:rPr>
-              <a:t>      \frac{(T_1 + T_2) \cos\phi}{m}  - g \\</a:t>
-            </a:r>
-          </a:p>
-          <a:p>
-            <a:r>
-              <a:rPr lang="en-US" sz="1200" kern="1200" dirty="0">
-                <a:solidFill>
-                  <a:schemeClr val="tx1"/>
-                </a:solidFill>
-                <a:effectLst/>
-                <a:latin typeface="+mn-lt"/>
-                <a:ea typeface="+mn-ea"/>
-                <a:cs typeface="+mn-cs"/>
-              </a:rPr>
-              <a:t>      \omega \\</a:t>
-            </a:r>
-          </a:p>
-          <a:p>
-            <a:r>
-              <a:rPr lang="en-US" sz="1200" kern="1200" dirty="0">
-                <a:solidFill>
-                  <a:schemeClr val="tx1"/>
-                </a:solidFill>
-                <a:effectLst/>
-                <a:latin typeface="+mn-lt"/>
-                <a:ea typeface="+mn-ea"/>
-                <a:cs typeface="+mn-cs"/>
-              </a:rPr>
-              <a:t>      \frac{(T_2 - T_1) \ell}{I_{</a:t>
-            </a:r>
-            <a:r>
-              <a:rPr lang="en-US" sz="1200" kern="1200" dirty="0" err="1">
-                <a:solidFill>
-                  <a:schemeClr val="tx1"/>
-                </a:solidFill>
-                <a:effectLst/>
-                <a:latin typeface="+mn-lt"/>
-                <a:ea typeface="+mn-ea"/>
-                <a:cs typeface="+mn-cs"/>
-              </a:rPr>
-              <a:t>zz</a:t>
-            </a:r>
-            <a:r>
-              <a:rPr lang="en-US" sz="1200" kern="1200" dirty="0">
-                <a:solidFill>
-                  <a:schemeClr val="tx1"/>
-                </a:solidFill>
-                <a:effectLst/>
-                <a:latin typeface="+mn-lt"/>
-                <a:ea typeface="+mn-ea"/>
-                <a:cs typeface="+mn-cs"/>
-              </a:rPr>
-              <a:t>}}</a:t>
-            </a:r>
-          </a:p>
-          <a:p>
-            <a:r>
-              <a:rPr lang="en-US" sz="1200" kern="1200" dirty="0">
-                <a:solidFill>
-                  <a:schemeClr val="tx1"/>
-                </a:solidFill>
-                <a:effectLst/>
-                <a:latin typeface="+mn-lt"/>
-                <a:ea typeface="+mn-ea"/>
-                <a:cs typeface="+mn-cs"/>
-              </a:rPr>
-              <a:t>    \end{</a:t>
-            </a:r>
-            <a:r>
-              <a:rPr lang="en-US" sz="1200" kern="1200" dirty="0" err="1">
-                <a:solidFill>
-                  <a:schemeClr val="tx1"/>
-                </a:solidFill>
-                <a:effectLst/>
-                <a:latin typeface="+mn-lt"/>
-                <a:ea typeface="+mn-ea"/>
-                <a:cs typeface="+mn-cs"/>
-              </a:rPr>
-              <a:t>bmatrix</a:t>
-            </a:r>
-            <a:r>
-              <a:rPr lang="en-US" sz="1200" kern="1200" dirty="0">
-                <a:solidFill>
-                  <a:schemeClr val="tx1"/>
-                </a:solidFill>
-                <a:effectLst/>
-                <a:latin typeface="+mn-lt"/>
-                <a:ea typeface="+mn-ea"/>
-                <a:cs typeface="+mn-cs"/>
-              </a:rPr>
-              <a:t>}</a:t>
-            </a:r>
-          </a:p>
-          <a:p>
-            <a:endParaRPr lang="en-US" sz="1200" kern="1200" dirty="0">
-              <a:solidFill>
-                <a:schemeClr val="tx1"/>
-              </a:solidFill>
-              <a:effectLst/>
-              <a:latin typeface="+mn-lt"/>
-              <a:ea typeface="+mn-ea"/>
-              <a:cs typeface="+mn-cs"/>
-            </a:endParaRPr>
-          </a:p>
-          <a:p>
-            <a:endParaRPr lang="en-US" sz="1200" kern="1200" dirty="0">
-              <a:solidFill>
-                <a:schemeClr val="tx1"/>
-              </a:solidFill>
-              <a:effectLst/>
-              <a:latin typeface="+mn-lt"/>
-              <a:ea typeface="+mn-ea"/>
-              <a:cs typeface="+mn-cs"/>
-            </a:endParaRPr>
-          </a:p>
-          <a:p>
-            <a:r>
-              <a:rPr lang="en-US" sz="1200" kern="1200" dirty="0">
-                <a:solidFill>
-                  <a:schemeClr val="tx1"/>
-                </a:solidFill>
-                <a:effectLst/>
-                <a:latin typeface="+mn-lt"/>
-                <a:ea typeface="+mn-ea"/>
-                <a:cs typeface="+mn-cs"/>
-              </a:rPr>
-              <a:t>\</a:t>
-            </a:r>
-            <a:r>
-              <a:rPr lang="en-US" sz="1200" kern="1200" dirty="0" err="1">
-                <a:solidFill>
-                  <a:schemeClr val="tx1"/>
-                </a:solidFill>
-                <a:effectLst/>
-                <a:latin typeface="+mn-lt"/>
-                <a:ea typeface="+mn-ea"/>
-                <a:cs typeface="+mn-cs"/>
-              </a:rPr>
-              <a:t>mathbf</a:t>
-            </a:r>
-            <a:r>
-              <a:rPr lang="en-US" sz="1200" kern="1200" dirty="0">
-                <a:solidFill>
-                  <a:schemeClr val="tx1"/>
-                </a:solidFill>
-                <a:effectLst/>
-                <a:latin typeface="+mn-lt"/>
-                <a:ea typeface="+mn-ea"/>
-                <a:cs typeface="+mn-cs"/>
-              </a:rPr>
-              <a:t>{z} &amp;= \begin{</a:t>
-            </a:r>
-            <a:r>
-              <a:rPr lang="en-US" sz="1200" kern="1200" dirty="0" err="1">
-                <a:solidFill>
-                  <a:schemeClr val="tx1"/>
-                </a:solidFill>
-                <a:effectLst/>
-                <a:latin typeface="+mn-lt"/>
-                <a:ea typeface="+mn-ea"/>
-                <a:cs typeface="+mn-cs"/>
-              </a:rPr>
-              <a:t>bmatrix</a:t>
-            </a:r>
-            <a:r>
-              <a:rPr lang="en-US" sz="1200" kern="1200" dirty="0">
-                <a:solidFill>
-                  <a:schemeClr val="tx1"/>
-                </a:solidFill>
-                <a:effectLst/>
-                <a:latin typeface="+mn-lt"/>
-                <a:ea typeface="+mn-ea"/>
-                <a:cs typeface="+mn-cs"/>
-              </a:rPr>
-              <a:t>}x \\ y\end{</a:t>
-            </a:r>
-            <a:r>
-              <a:rPr lang="en-US" sz="1200" kern="1200" dirty="0" err="1">
-                <a:solidFill>
-                  <a:schemeClr val="tx1"/>
-                </a:solidFill>
-                <a:effectLst/>
-                <a:latin typeface="+mn-lt"/>
-                <a:ea typeface="+mn-ea"/>
-                <a:cs typeface="+mn-cs"/>
-              </a:rPr>
-              <a:t>bmatrix</a:t>
-            </a:r>
-            <a:r>
-              <a:rPr lang="en-US" sz="1200" kern="1200" dirty="0">
-                <a:solidFill>
-                  <a:schemeClr val="tx1"/>
-                </a:solidFill>
-                <a:effectLst/>
-                <a:latin typeface="+mn-lt"/>
-                <a:ea typeface="+mn-ea"/>
-                <a:cs typeface="+mn-cs"/>
-              </a:rPr>
-              <a:t>}\\</a:t>
-            </a:r>
-          </a:p>
-          <a:p>
-            <a:r>
-              <a:rPr lang="en-US" sz="1200" kern="1200" dirty="0">
-                <a:solidFill>
-                  <a:schemeClr val="tx1"/>
-                </a:solidFill>
-                <a:effectLst/>
-                <a:latin typeface="+mn-lt"/>
-                <a:ea typeface="+mn-ea"/>
-                <a:cs typeface="+mn-cs"/>
-              </a:rPr>
-              <a:t>x &amp;= x\\</a:t>
-            </a:r>
-          </a:p>
-          <a:p>
-            <a:r>
-              <a:rPr lang="en-US" sz="1200" kern="1200" dirty="0" err="1">
-                <a:solidFill>
-                  <a:schemeClr val="tx1"/>
-                </a:solidFill>
-                <a:effectLst/>
-                <a:latin typeface="+mn-lt"/>
-                <a:ea typeface="+mn-ea"/>
-                <a:cs typeface="+mn-cs"/>
-              </a:rPr>
-              <a:t>v_x</a:t>
-            </a:r>
-            <a:r>
-              <a:rPr lang="en-US" sz="1200" kern="1200" dirty="0">
-                <a:solidFill>
-                  <a:schemeClr val="tx1"/>
-                </a:solidFill>
-                <a:effectLst/>
-                <a:latin typeface="+mn-lt"/>
-                <a:ea typeface="+mn-ea"/>
-                <a:cs typeface="+mn-cs"/>
-              </a:rPr>
-              <a:t> &amp;= \dot x\\</a:t>
-            </a:r>
-          </a:p>
-          <a:p>
-            <a:r>
-              <a:rPr lang="en-US" sz="1200" kern="1200" dirty="0">
-                <a:solidFill>
-                  <a:schemeClr val="tx1"/>
-                </a:solidFill>
-                <a:effectLst/>
-                <a:latin typeface="+mn-lt"/>
-                <a:ea typeface="+mn-ea"/>
-                <a:cs typeface="+mn-cs"/>
-              </a:rPr>
-              <a:t>y &amp;= y\\</a:t>
-            </a:r>
-          </a:p>
-          <a:p>
-            <a:r>
-              <a:rPr lang="en-US" sz="1200" kern="1200" dirty="0" err="1">
-                <a:solidFill>
-                  <a:schemeClr val="tx1"/>
-                </a:solidFill>
-                <a:effectLst/>
-                <a:latin typeface="+mn-lt"/>
-                <a:ea typeface="+mn-ea"/>
-                <a:cs typeface="+mn-cs"/>
-              </a:rPr>
-              <a:t>v_y</a:t>
-            </a:r>
-            <a:r>
-              <a:rPr lang="en-US" sz="1200" kern="1200" dirty="0">
-                <a:solidFill>
-                  <a:schemeClr val="tx1"/>
-                </a:solidFill>
-                <a:effectLst/>
-                <a:latin typeface="+mn-lt"/>
-                <a:ea typeface="+mn-ea"/>
-                <a:cs typeface="+mn-cs"/>
-              </a:rPr>
-              <a:t> &amp;= \dot y\\</a:t>
-            </a:r>
-          </a:p>
-          <a:p>
-            <a:r>
-              <a:rPr lang="en-US" sz="1200" kern="1200" dirty="0">
-                <a:solidFill>
-                  <a:schemeClr val="tx1"/>
-                </a:solidFill>
-                <a:effectLst/>
-                <a:latin typeface="+mn-lt"/>
-                <a:ea typeface="+mn-ea"/>
-                <a:cs typeface="+mn-cs"/>
-              </a:rPr>
-              <a:t>\phi &amp;= \tan^{-1}\left(-\frac{\</a:t>
-            </a:r>
-            <a:r>
-              <a:rPr lang="en-US" sz="1200" kern="1200" dirty="0" err="1">
-                <a:solidFill>
-                  <a:schemeClr val="tx1"/>
-                </a:solidFill>
-                <a:effectLst/>
-                <a:latin typeface="+mn-lt"/>
-                <a:ea typeface="+mn-ea"/>
-                <a:cs typeface="+mn-cs"/>
-              </a:rPr>
-              <a:t>ddot</a:t>
-            </a:r>
-            <a:r>
-              <a:rPr lang="en-US" sz="1200" kern="1200" dirty="0">
-                <a:solidFill>
-                  <a:schemeClr val="tx1"/>
-                </a:solidFill>
-                <a:effectLst/>
-                <a:latin typeface="+mn-lt"/>
-                <a:ea typeface="+mn-ea"/>
-                <a:cs typeface="+mn-cs"/>
-              </a:rPr>
-              <a:t> x}{\</a:t>
-            </a:r>
-            <a:r>
-              <a:rPr lang="en-US" sz="1200" kern="1200" dirty="0" err="1">
-                <a:solidFill>
-                  <a:schemeClr val="tx1"/>
-                </a:solidFill>
-                <a:effectLst/>
-                <a:latin typeface="+mn-lt"/>
-                <a:ea typeface="+mn-ea"/>
-                <a:cs typeface="+mn-cs"/>
-              </a:rPr>
-              <a:t>ddot</a:t>
-            </a:r>
-            <a:r>
-              <a:rPr lang="en-US" sz="1200" kern="1200" dirty="0">
-                <a:solidFill>
-                  <a:schemeClr val="tx1"/>
-                </a:solidFill>
-                <a:effectLst/>
-                <a:latin typeface="+mn-lt"/>
-                <a:ea typeface="+mn-ea"/>
-                <a:cs typeface="+mn-cs"/>
-              </a:rPr>
-              <a:t> y + g}\right)\\</a:t>
-            </a:r>
-          </a:p>
-          <a:p>
-            <a:r>
-              <a:rPr lang="en-US" sz="1200" kern="1200" dirty="0">
-                <a:solidFill>
-                  <a:schemeClr val="tx1"/>
-                </a:solidFill>
-                <a:effectLst/>
-                <a:latin typeface="+mn-lt"/>
-                <a:ea typeface="+mn-ea"/>
-                <a:cs typeface="+mn-cs"/>
-              </a:rPr>
-              <a:t>\omega &amp;= \frac{\</a:t>
-            </a:r>
-            <a:r>
-              <a:rPr lang="en-US" sz="1200" kern="1200" dirty="0" err="1">
-                <a:solidFill>
-                  <a:schemeClr val="tx1"/>
-                </a:solidFill>
-                <a:effectLst/>
-                <a:latin typeface="+mn-lt"/>
-                <a:ea typeface="+mn-ea"/>
-                <a:cs typeface="+mn-cs"/>
-              </a:rPr>
-              <a:t>dddot</a:t>
-            </a:r>
-            <a:r>
-              <a:rPr lang="en-US" sz="1200" kern="1200" dirty="0">
-                <a:solidFill>
-                  <a:schemeClr val="tx1"/>
-                </a:solidFill>
-                <a:effectLst/>
-                <a:latin typeface="+mn-lt"/>
-                <a:ea typeface="+mn-ea"/>
-                <a:cs typeface="+mn-cs"/>
-              </a:rPr>
-              <a:t> y \</a:t>
-            </a:r>
-            <a:r>
-              <a:rPr lang="en-US" sz="1200" kern="1200" dirty="0" err="1">
-                <a:solidFill>
-                  <a:schemeClr val="tx1"/>
-                </a:solidFill>
-                <a:effectLst/>
-                <a:latin typeface="+mn-lt"/>
-                <a:ea typeface="+mn-ea"/>
-                <a:cs typeface="+mn-cs"/>
-              </a:rPr>
-              <a:t>ddot</a:t>
-            </a:r>
-            <a:r>
-              <a:rPr lang="en-US" sz="1200" kern="1200" dirty="0">
-                <a:solidFill>
-                  <a:schemeClr val="tx1"/>
-                </a:solidFill>
-                <a:effectLst/>
-                <a:latin typeface="+mn-lt"/>
-                <a:ea typeface="+mn-ea"/>
-                <a:cs typeface="+mn-cs"/>
-              </a:rPr>
-              <a:t> x - (\</a:t>
-            </a:r>
-            <a:r>
-              <a:rPr lang="en-US" sz="1200" kern="1200" dirty="0" err="1">
-                <a:solidFill>
-                  <a:schemeClr val="tx1"/>
-                </a:solidFill>
-                <a:effectLst/>
-                <a:latin typeface="+mn-lt"/>
-                <a:ea typeface="+mn-ea"/>
-                <a:cs typeface="+mn-cs"/>
-              </a:rPr>
-              <a:t>ddot</a:t>
-            </a:r>
-            <a:r>
-              <a:rPr lang="en-US" sz="1200" kern="1200" dirty="0">
-                <a:solidFill>
-                  <a:schemeClr val="tx1"/>
-                </a:solidFill>
-                <a:effectLst/>
-                <a:latin typeface="+mn-lt"/>
-                <a:ea typeface="+mn-ea"/>
-                <a:cs typeface="+mn-cs"/>
-              </a:rPr>
-              <a:t> y + g) \</a:t>
-            </a:r>
-            <a:r>
-              <a:rPr lang="en-US" sz="1200" kern="1200" dirty="0" err="1">
-                <a:solidFill>
-                  <a:schemeClr val="tx1"/>
-                </a:solidFill>
-                <a:effectLst/>
-                <a:latin typeface="+mn-lt"/>
-                <a:ea typeface="+mn-ea"/>
-                <a:cs typeface="+mn-cs"/>
-              </a:rPr>
-              <a:t>dddot</a:t>
-            </a:r>
-            <a:r>
-              <a:rPr lang="en-US" sz="1200" kern="1200" dirty="0">
-                <a:solidFill>
-                  <a:schemeClr val="tx1"/>
-                </a:solidFill>
-                <a:effectLst/>
-                <a:latin typeface="+mn-lt"/>
-                <a:ea typeface="+mn-ea"/>
-                <a:cs typeface="+mn-cs"/>
-              </a:rPr>
-              <a:t> x}{(\</a:t>
-            </a:r>
-            <a:r>
-              <a:rPr lang="en-US" sz="1200" kern="1200" dirty="0" err="1">
-                <a:solidFill>
-                  <a:schemeClr val="tx1"/>
-                </a:solidFill>
-                <a:effectLst/>
-                <a:latin typeface="+mn-lt"/>
-                <a:ea typeface="+mn-ea"/>
-                <a:cs typeface="+mn-cs"/>
-              </a:rPr>
-              <a:t>ddot</a:t>
-            </a:r>
-            <a:r>
-              <a:rPr lang="en-US" sz="1200" kern="1200" dirty="0">
-                <a:solidFill>
-                  <a:schemeClr val="tx1"/>
-                </a:solidFill>
-                <a:effectLst/>
-                <a:latin typeface="+mn-lt"/>
-                <a:ea typeface="+mn-ea"/>
-                <a:cs typeface="+mn-cs"/>
-              </a:rPr>
-              <a:t> y + g)^2 + \</a:t>
-            </a:r>
-            <a:r>
-              <a:rPr lang="en-US" sz="1200" kern="1200" dirty="0" err="1">
-                <a:solidFill>
-                  <a:schemeClr val="tx1"/>
-                </a:solidFill>
-                <a:effectLst/>
-                <a:latin typeface="+mn-lt"/>
-                <a:ea typeface="+mn-ea"/>
-                <a:cs typeface="+mn-cs"/>
-              </a:rPr>
-              <a:t>ddot</a:t>
-            </a:r>
-            <a:r>
-              <a:rPr lang="en-US" sz="1200" kern="1200" dirty="0">
-                <a:solidFill>
-                  <a:schemeClr val="tx1"/>
-                </a:solidFill>
-                <a:effectLst/>
-                <a:latin typeface="+mn-lt"/>
-                <a:ea typeface="+mn-ea"/>
-                <a:cs typeface="+mn-cs"/>
-              </a:rPr>
-              <a:t> x^2}</a:t>
-            </a:r>
-          </a:p>
-          <a:p>
-            <a:endParaRPr lang="en-US" sz="1200" kern="1200" dirty="0">
-              <a:solidFill>
-                <a:schemeClr val="tx1"/>
-              </a:solidFill>
-              <a:effectLst/>
-              <a:latin typeface="+mn-lt"/>
-              <a:ea typeface="+mn-ea"/>
-              <a:cs typeface="+mn-cs"/>
-            </a:endParaRPr>
-          </a:p>
-          <a:p>
-            <a:pPr marL="0" marR="0" lvl="0" indent="0" algn="l" defTabSz="914400" rtl="0" eaLnBrk="1" fontAlgn="auto" latinLnBrk="0" hangingPunct="1">
-              <a:lnSpc>
-                <a:spcPct val="100000"/>
-              </a:lnSpc>
-              <a:spcBef>
-                <a:spcPts val="0"/>
-              </a:spcBef>
-              <a:spcAft>
-                <a:spcPts val="0"/>
-              </a:spcAft>
-              <a:buClrTx/>
-              <a:buSzTx/>
-              <a:buFontTx/>
-              <a:buNone/>
-              <a:tabLst/>
-              <a:defRPr/>
+            <a:endParaRPr lang="en-US" dirty="0"/>
+          </a:p>
+        </p:txBody>
+      </p:sp>
+      <p:sp>
+        <p:nvSpPr>
+          <p:cNvPr id="4" name="Slide Number Placeholder 3"/>
+          <p:cNvSpPr>
+            <a:spLocks noGrp="1"/>
+          </p:cNvSpPr>
+          <p:nvPr>
+            <p:ph type="sldNum" sz="quarter" idx="10"/>
+          </p:nvPr>
+        </p:nvSpPr>
+        <p:spPr/>
+        <p:txBody>
+          <a:bodyPr/>
+          <a:lstStyle/>
+          <a:p>
+            <a:fld id="{63B2D7EC-928D-0645-AAE8-498D7443D60E}" type="slidenum">
+              <a:rPr lang="en-US" smtClean="0"/>
+              <a:t>27</a:t>
+            </a:fld>
+            <a:endParaRPr lang="en-US"/>
+          </a:p>
+        </p:txBody>
+      </p:sp>
+    </p:spTree>
+    <p:extLst>
+      <p:ext uri="{BB962C8B-B14F-4D97-AF65-F5344CB8AC3E}">
+        <p14:creationId xmlns:p14="http://schemas.microsoft.com/office/powerpoint/2010/main" val="240609884"/>
+      </p:ext>
+    </p:extLst>
+  </p:cSld>
+  <p:clrMapOvr>
+    <a:masterClrMapping/>
+  </p:clrMapOvr>
+</p:notes>
+</file>
+
+<file path=ppt/notesSlides/notesSlide25.xml><?xml version="1.0" encoding="utf-8"?>
+<p:notes xmlns:a="http://schemas.openxmlformats.org/drawingml/2006/main" xmlns:r="http://schemas.openxmlformats.org/officeDocument/2006/relationships" xmlns:p="http://schemas.openxmlformats.org/presentationml/2006/main">
+  <p:cSld>
+    <p:spTree>
+      <p:nvGrpSpPr>
+        <p:cNvPr id="1" name=""/>
+        <p:cNvGrpSpPr/>
+        <p:nvPr/>
+      </p:nvGrpSpPr>
+      <p:grpSpPr>
+        <a:xfrm>
+          <a:off x="0" y="0"/>
+          <a:ext cx="0" cy="0"/>
+          <a:chOff x="0" y="0"/>
+          <a:chExt cx="0" cy="0"/>
+        </a:xfrm>
+      </p:grpSpPr>
+      <p:sp>
+        <p:nvSpPr>
+          <p:cNvPr id="2" name="Slide Image Placeholder 1"/>
+          <p:cNvSpPr>
+            <a:spLocks noGrp="1" noRot="1" noChangeAspect="1"/>
+          </p:cNvSpPr>
+          <p:nvPr>
+            <p:ph type="sldImg"/>
+          </p:nvPr>
+        </p:nvSpPr>
+        <p:spPr/>
+      </p:sp>
+      <p:sp>
+        <p:nvSpPr>
+          <p:cNvPr id="3" name="Notes Placeholder 2"/>
+          <p:cNvSpPr>
+            <a:spLocks noGrp="1"/>
+          </p:cNvSpPr>
+          <p:nvPr>
+            <p:ph type="body" idx="1"/>
+          </p:nvPr>
+        </p:nvSpPr>
+        <p:spPr/>
+        <p:txBody>
+          <a:bodyPr/>
+          <a:lstStyle/>
+          <a:p>
+            <a:pPr marL="171450" indent="-171450">
+              <a:buFont typeface="Arial" panose="020B0604020202020204" pitchFamily="34" charset="0"/>
+              <a:buChar char="•"/>
             </a:pPr>
-            <a:r>
-              <a:rPr lang="en-US" sz="1200" kern="1200" dirty="0">
-                <a:solidFill>
-                  <a:schemeClr val="tx1"/>
-                </a:solidFill>
-                <a:effectLst/>
-                <a:latin typeface="+mn-lt"/>
-                <a:ea typeface="+mn-ea"/>
-                <a:cs typeface="+mn-cs"/>
-              </a:rPr>
-              <a:t>\</a:t>
-            </a:r>
-            <a:r>
-              <a:rPr lang="en-US" sz="1200" kern="1200" dirty="0" err="1">
-                <a:solidFill>
-                  <a:schemeClr val="tx1"/>
-                </a:solidFill>
-                <a:effectLst/>
-                <a:latin typeface="+mn-lt"/>
-                <a:ea typeface="+mn-ea"/>
-                <a:cs typeface="+mn-cs"/>
-              </a:rPr>
-              <a:t>mathbf</a:t>
-            </a:r>
-            <a:r>
-              <a:rPr lang="en-US" sz="1200" kern="1200" dirty="0">
-                <a:solidFill>
-                  <a:schemeClr val="tx1"/>
-                </a:solidFill>
-                <a:effectLst/>
-                <a:latin typeface="+mn-lt"/>
-                <a:ea typeface="+mn-ea"/>
-                <a:cs typeface="+mn-cs"/>
-              </a:rPr>
-              <a:t>{x} = \beta(\</a:t>
-            </a:r>
-            <a:r>
-              <a:rPr lang="en-US" sz="1200" kern="1200" dirty="0" err="1">
-                <a:solidFill>
-                  <a:schemeClr val="tx1"/>
-                </a:solidFill>
-                <a:effectLst/>
-                <a:latin typeface="+mn-lt"/>
-                <a:ea typeface="+mn-ea"/>
-                <a:cs typeface="+mn-cs"/>
-              </a:rPr>
-              <a:t>mathbf</a:t>
-            </a:r>
-            <a:r>
-              <a:rPr lang="en-US" sz="1200" kern="1200" dirty="0">
-                <a:solidFill>
-                  <a:schemeClr val="tx1"/>
-                </a:solidFill>
-                <a:effectLst/>
-                <a:latin typeface="+mn-lt"/>
-                <a:ea typeface="+mn-ea"/>
-                <a:cs typeface="+mn-cs"/>
-              </a:rPr>
-              <a:t>{z}, \dot{\</a:t>
-            </a:r>
-            <a:r>
-              <a:rPr lang="en-US" sz="1200" kern="1200" dirty="0" err="1">
-                <a:solidFill>
-                  <a:schemeClr val="tx1"/>
-                </a:solidFill>
-                <a:effectLst/>
-                <a:latin typeface="+mn-lt"/>
-                <a:ea typeface="+mn-ea"/>
-                <a:cs typeface="+mn-cs"/>
-              </a:rPr>
-              <a:t>mathbf</a:t>
-            </a:r>
-            <a:r>
-              <a:rPr lang="en-US" sz="1200" kern="1200" dirty="0">
-                <a:solidFill>
-                  <a:schemeClr val="tx1"/>
-                </a:solidFill>
-                <a:effectLst/>
-                <a:latin typeface="+mn-lt"/>
-                <a:ea typeface="+mn-ea"/>
-                <a:cs typeface="+mn-cs"/>
-              </a:rPr>
-              <a:t>{z}}, \</a:t>
-            </a:r>
-            <a:r>
-              <a:rPr lang="en-US" sz="1200" kern="1200" dirty="0" err="1">
-                <a:solidFill>
-                  <a:schemeClr val="tx1"/>
-                </a:solidFill>
-                <a:effectLst/>
-                <a:latin typeface="+mn-lt"/>
-                <a:ea typeface="+mn-ea"/>
-                <a:cs typeface="+mn-cs"/>
-              </a:rPr>
-              <a:t>ddot</a:t>
-            </a:r>
-            <a:r>
-              <a:rPr lang="en-US" sz="1200" kern="1200" dirty="0">
-                <a:solidFill>
-                  <a:schemeClr val="tx1"/>
-                </a:solidFill>
-                <a:effectLst/>
-                <a:latin typeface="+mn-lt"/>
-                <a:ea typeface="+mn-ea"/>
-                <a:cs typeface="+mn-cs"/>
-              </a:rPr>
-              <a:t>{\</a:t>
-            </a:r>
-            <a:r>
-              <a:rPr lang="en-US" sz="1200" kern="1200" dirty="0" err="1">
-                <a:solidFill>
-                  <a:schemeClr val="tx1"/>
-                </a:solidFill>
-                <a:effectLst/>
-                <a:latin typeface="+mn-lt"/>
-                <a:ea typeface="+mn-ea"/>
-                <a:cs typeface="+mn-cs"/>
-              </a:rPr>
-              <a:t>mathbf</a:t>
-            </a:r>
-            <a:r>
-              <a:rPr lang="en-US" sz="1200" kern="1200" dirty="0">
-                <a:solidFill>
-                  <a:schemeClr val="tx1"/>
-                </a:solidFill>
-                <a:effectLst/>
-                <a:latin typeface="+mn-lt"/>
-                <a:ea typeface="+mn-ea"/>
-                <a:cs typeface="+mn-cs"/>
-              </a:rPr>
-              <a:t>{z}}, \</a:t>
-            </a:r>
-            <a:r>
-              <a:rPr lang="en-US" sz="1200" kern="1200" dirty="0" err="1">
-                <a:solidFill>
-                  <a:schemeClr val="tx1"/>
-                </a:solidFill>
-                <a:effectLst/>
-                <a:latin typeface="+mn-lt"/>
-                <a:ea typeface="+mn-ea"/>
-                <a:cs typeface="+mn-cs"/>
-              </a:rPr>
-              <a:t>dddot</a:t>
-            </a:r>
-            <a:r>
-              <a:rPr lang="en-US" sz="1200" kern="1200" dirty="0">
-                <a:solidFill>
-                  <a:schemeClr val="tx1"/>
-                </a:solidFill>
-                <a:effectLst/>
-                <a:latin typeface="+mn-lt"/>
-                <a:ea typeface="+mn-ea"/>
-                <a:cs typeface="+mn-cs"/>
-              </a:rPr>
-              <a:t>{\</a:t>
-            </a:r>
-            <a:r>
-              <a:rPr lang="en-US" sz="1200" kern="1200" dirty="0" err="1">
-                <a:solidFill>
-                  <a:schemeClr val="tx1"/>
-                </a:solidFill>
-                <a:effectLst/>
-                <a:latin typeface="+mn-lt"/>
-                <a:ea typeface="+mn-ea"/>
-                <a:cs typeface="+mn-cs"/>
-              </a:rPr>
-              <a:t>mathbf</a:t>
-            </a:r>
-            <a:r>
-              <a:rPr lang="en-US" sz="1200" kern="1200" dirty="0">
-                <a:solidFill>
-                  <a:schemeClr val="tx1"/>
-                </a:solidFill>
-                <a:effectLst/>
-                <a:latin typeface="+mn-lt"/>
-                <a:ea typeface="+mn-ea"/>
-                <a:cs typeface="+mn-cs"/>
-              </a:rPr>
-              <a:t>{z}})</a:t>
-            </a:r>
-          </a:p>
-          <a:p>
-            <a:pPr marL="0" marR="0" lvl="0" indent="0" algn="l" defTabSz="914400" rtl="0" eaLnBrk="1" fontAlgn="auto" latinLnBrk="0" hangingPunct="1">
-              <a:lnSpc>
-                <a:spcPct val="100000"/>
-              </a:lnSpc>
-              <a:spcBef>
-                <a:spcPts val="0"/>
-              </a:spcBef>
-              <a:spcAft>
-                <a:spcPts val="0"/>
-              </a:spcAft>
-              <a:buClrTx/>
-              <a:buSzTx/>
-              <a:buFontTx/>
-              <a:buNone/>
-              <a:tabLst/>
-              <a:defRPr/>
-            </a:pPr>
-            <a:r>
-              <a:rPr lang="en-US" sz="1200" kern="1200" dirty="0">
-                <a:solidFill>
-                  <a:schemeClr val="tx1"/>
-                </a:solidFill>
-                <a:effectLst/>
-                <a:latin typeface="+mn-lt"/>
-                <a:ea typeface="+mn-ea"/>
-                <a:cs typeface="+mn-cs"/>
-              </a:rPr>
-              <a:t>\</a:t>
-            </a:r>
-            <a:r>
-              <a:rPr lang="en-US" sz="1200" kern="1200" dirty="0" err="1">
-                <a:solidFill>
-                  <a:schemeClr val="tx1"/>
-                </a:solidFill>
-                <a:effectLst/>
-                <a:latin typeface="+mn-lt"/>
-                <a:ea typeface="+mn-ea"/>
-                <a:cs typeface="+mn-cs"/>
-              </a:rPr>
-              <a:t>mathbf</a:t>
-            </a:r>
-            <a:r>
-              <a:rPr lang="en-US" sz="1200" kern="1200" dirty="0">
-                <a:solidFill>
-                  <a:schemeClr val="tx1"/>
-                </a:solidFill>
-                <a:effectLst/>
-                <a:latin typeface="+mn-lt"/>
-                <a:ea typeface="+mn-ea"/>
-                <a:cs typeface="+mn-cs"/>
-              </a:rPr>
-              <a:t>{u} = \gamma(\</a:t>
-            </a:r>
-            <a:r>
-              <a:rPr lang="en-US" sz="1200" kern="1200" dirty="0" err="1">
-                <a:solidFill>
-                  <a:schemeClr val="tx1"/>
-                </a:solidFill>
-                <a:effectLst/>
-                <a:latin typeface="+mn-lt"/>
-                <a:ea typeface="+mn-ea"/>
-                <a:cs typeface="+mn-cs"/>
-              </a:rPr>
-              <a:t>mathbf</a:t>
-            </a:r>
-            <a:r>
-              <a:rPr lang="en-US" sz="1200" kern="1200" dirty="0">
-                <a:solidFill>
-                  <a:schemeClr val="tx1"/>
-                </a:solidFill>
-                <a:effectLst/>
-                <a:latin typeface="+mn-lt"/>
-                <a:ea typeface="+mn-ea"/>
-                <a:cs typeface="+mn-cs"/>
-              </a:rPr>
-              <a:t>{z}, \dot{\</a:t>
-            </a:r>
-            <a:r>
-              <a:rPr lang="en-US" sz="1200" kern="1200" dirty="0" err="1">
-                <a:solidFill>
-                  <a:schemeClr val="tx1"/>
-                </a:solidFill>
-                <a:effectLst/>
-                <a:latin typeface="+mn-lt"/>
-                <a:ea typeface="+mn-ea"/>
-                <a:cs typeface="+mn-cs"/>
-              </a:rPr>
-              <a:t>mathbf</a:t>
-            </a:r>
-            <a:r>
-              <a:rPr lang="en-US" sz="1200" kern="1200" dirty="0">
-                <a:solidFill>
-                  <a:schemeClr val="tx1"/>
-                </a:solidFill>
-                <a:effectLst/>
-                <a:latin typeface="+mn-lt"/>
-                <a:ea typeface="+mn-ea"/>
-                <a:cs typeface="+mn-cs"/>
-              </a:rPr>
-              <a:t>{z}}, \</a:t>
-            </a:r>
-            <a:r>
-              <a:rPr lang="en-US" sz="1200" kern="1200" dirty="0" err="1">
-                <a:solidFill>
-                  <a:schemeClr val="tx1"/>
-                </a:solidFill>
-                <a:effectLst/>
-                <a:latin typeface="+mn-lt"/>
-                <a:ea typeface="+mn-ea"/>
-                <a:cs typeface="+mn-cs"/>
-              </a:rPr>
-              <a:t>ddot</a:t>
-            </a:r>
-            <a:r>
-              <a:rPr lang="en-US" sz="1200" kern="1200" dirty="0">
-                <a:solidFill>
-                  <a:schemeClr val="tx1"/>
-                </a:solidFill>
-                <a:effectLst/>
-                <a:latin typeface="+mn-lt"/>
-                <a:ea typeface="+mn-ea"/>
-                <a:cs typeface="+mn-cs"/>
-              </a:rPr>
-              <a:t>{\</a:t>
-            </a:r>
-            <a:r>
-              <a:rPr lang="en-US" sz="1200" kern="1200" dirty="0" err="1">
-                <a:solidFill>
-                  <a:schemeClr val="tx1"/>
-                </a:solidFill>
-                <a:effectLst/>
-                <a:latin typeface="+mn-lt"/>
-                <a:ea typeface="+mn-ea"/>
-                <a:cs typeface="+mn-cs"/>
-              </a:rPr>
-              <a:t>mathbf</a:t>
-            </a:r>
-            <a:r>
-              <a:rPr lang="en-US" sz="1200" kern="1200" dirty="0">
-                <a:solidFill>
-                  <a:schemeClr val="tx1"/>
-                </a:solidFill>
-                <a:effectLst/>
-                <a:latin typeface="+mn-lt"/>
-                <a:ea typeface="+mn-ea"/>
-                <a:cs typeface="+mn-cs"/>
-              </a:rPr>
-              <a:t>{z}}, \</a:t>
-            </a:r>
-            <a:r>
-              <a:rPr lang="en-US" sz="1200" kern="1200" dirty="0" err="1">
-                <a:solidFill>
-                  <a:schemeClr val="tx1"/>
-                </a:solidFill>
-                <a:effectLst/>
-                <a:latin typeface="+mn-lt"/>
-                <a:ea typeface="+mn-ea"/>
-                <a:cs typeface="+mn-cs"/>
-              </a:rPr>
-              <a:t>dddot</a:t>
-            </a:r>
-            <a:r>
-              <a:rPr lang="en-US" sz="1200" kern="1200" dirty="0">
-                <a:solidFill>
-                  <a:schemeClr val="tx1"/>
-                </a:solidFill>
-                <a:effectLst/>
-                <a:latin typeface="+mn-lt"/>
-                <a:ea typeface="+mn-ea"/>
-                <a:cs typeface="+mn-cs"/>
-              </a:rPr>
-              <a:t>{\</a:t>
-            </a:r>
-            <a:r>
-              <a:rPr lang="en-US" sz="1200" kern="1200" dirty="0" err="1">
-                <a:solidFill>
-                  <a:schemeClr val="tx1"/>
-                </a:solidFill>
-                <a:effectLst/>
-                <a:latin typeface="+mn-lt"/>
-                <a:ea typeface="+mn-ea"/>
-                <a:cs typeface="+mn-cs"/>
-              </a:rPr>
-              <a:t>mathbf</a:t>
-            </a:r>
-            <a:r>
-              <a:rPr lang="en-US" sz="1200" kern="1200" dirty="0">
-                <a:solidFill>
-                  <a:schemeClr val="tx1"/>
-                </a:solidFill>
-                <a:effectLst/>
-                <a:latin typeface="+mn-lt"/>
-                <a:ea typeface="+mn-ea"/>
-                <a:cs typeface="+mn-cs"/>
-              </a:rPr>
-              <a:t>{z}}, \</a:t>
-            </a:r>
-            <a:r>
-              <a:rPr lang="en-US" sz="1200" kern="1200" dirty="0" err="1">
-                <a:solidFill>
-                  <a:schemeClr val="tx1"/>
-                </a:solidFill>
-                <a:effectLst/>
-                <a:latin typeface="+mn-lt"/>
-                <a:ea typeface="+mn-ea"/>
-                <a:cs typeface="+mn-cs"/>
-              </a:rPr>
-              <a:t>ddddot</a:t>
-            </a:r>
-            <a:r>
-              <a:rPr lang="en-US" sz="1200" kern="1200" dirty="0">
-                <a:solidFill>
-                  <a:schemeClr val="tx1"/>
-                </a:solidFill>
-                <a:effectLst/>
-                <a:latin typeface="+mn-lt"/>
-                <a:ea typeface="+mn-ea"/>
-                <a:cs typeface="+mn-cs"/>
-              </a:rPr>
-              <a:t>{\</a:t>
-            </a:r>
-            <a:r>
-              <a:rPr lang="en-US" sz="1200" kern="1200" dirty="0" err="1">
-                <a:solidFill>
-                  <a:schemeClr val="tx1"/>
-                </a:solidFill>
-                <a:effectLst/>
-                <a:latin typeface="+mn-lt"/>
-                <a:ea typeface="+mn-ea"/>
-                <a:cs typeface="+mn-cs"/>
-              </a:rPr>
-              <a:t>mathbf</a:t>
-            </a:r>
-            <a:r>
-              <a:rPr lang="en-US" sz="1200" kern="1200" dirty="0">
-                <a:solidFill>
-                  <a:schemeClr val="tx1"/>
-                </a:solidFill>
-                <a:effectLst/>
-                <a:latin typeface="+mn-lt"/>
-                <a:ea typeface="+mn-ea"/>
-                <a:cs typeface="+mn-cs"/>
-              </a:rPr>
-              <a:t>{z}})</a:t>
-            </a:r>
-          </a:p>
-          <a:p>
-            <a:pPr marL="0" marR="0" lvl="0" indent="0" algn="l" defTabSz="914400" rtl="0" eaLnBrk="1" fontAlgn="auto" latinLnBrk="0" hangingPunct="1">
-              <a:lnSpc>
-                <a:spcPct val="100000"/>
-              </a:lnSpc>
-              <a:spcBef>
-                <a:spcPts val="0"/>
-              </a:spcBef>
-              <a:spcAft>
-                <a:spcPts val="0"/>
-              </a:spcAft>
-              <a:buClrTx/>
-              <a:buSzTx/>
-              <a:buFontTx/>
-              <a:buNone/>
-              <a:tabLst/>
-              <a:defRPr/>
-            </a:pPr>
-            <a:endParaRPr lang="en-US" sz="1200" kern="1200" dirty="0">
-              <a:solidFill>
-                <a:schemeClr val="tx1"/>
-              </a:solidFill>
-              <a:effectLst/>
-              <a:latin typeface="+mn-lt"/>
-              <a:ea typeface="+mn-ea"/>
-              <a:cs typeface="+mn-cs"/>
-            </a:endParaRPr>
-          </a:p>
-          <a:p>
-            <a:endParaRPr lang="en-US" sz="1200" kern="1200" dirty="0">
-              <a:solidFill>
-                <a:schemeClr val="tx1"/>
-              </a:solidFill>
-              <a:effectLst/>
-              <a:latin typeface="+mn-lt"/>
-              <a:ea typeface="+mn-ea"/>
-              <a:cs typeface="+mn-cs"/>
-            </a:endParaRPr>
-          </a:p>
+            <a:endParaRPr lang="en-US" dirty="0"/>
+          </a:p>
+        </p:txBody>
+      </p:sp>
+      <p:sp>
+        <p:nvSpPr>
+          <p:cNvPr id="4" name="Slide Number Placeholder 3"/>
+          <p:cNvSpPr>
+            <a:spLocks noGrp="1"/>
+          </p:cNvSpPr>
+          <p:nvPr>
+            <p:ph type="sldNum" sz="quarter" idx="5"/>
+          </p:nvPr>
+        </p:nvSpPr>
+        <p:spPr/>
+        <p:txBody>
+          <a:bodyPr/>
+          <a:lstStyle/>
+          <a:p>
+            <a:fld id="{63B2D7EC-928D-0645-AAE8-498D7443D60E}" type="slidenum">
+              <a:rPr lang="en-US" smtClean="0"/>
+              <a:t>28</a:t>
+            </a:fld>
+            <a:endParaRPr lang="en-US"/>
+          </a:p>
+        </p:txBody>
+      </p:sp>
+    </p:spTree>
+    <p:extLst>
+      <p:ext uri="{BB962C8B-B14F-4D97-AF65-F5344CB8AC3E}">
+        <p14:creationId xmlns:p14="http://schemas.microsoft.com/office/powerpoint/2010/main" val="2324825307"/>
+      </p:ext>
+    </p:extLst>
+  </p:cSld>
+  <p:clrMapOvr>
+    <a:masterClrMapping/>
+  </p:clrMapOvr>
+</p:notes>
+</file>
+
+<file path=ppt/notesSlides/notesSlide26.xml><?xml version="1.0" encoding="utf-8"?>
+<p:notes xmlns:a="http://schemas.openxmlformats.org/drawingml/2006/main" xmlns:r="http://schemas.openxmlformats.org/officeDocument/2006/relationships" xmlns:p="http://schemas.openxmlformats.org/presentationml/2006/main">
+  <p:cSld>
+    <p:spTree>
+      <p:nvGrpSpPr>
+        <p:cNvPr id="1" name=""/>
+        <p:cNvGrpSpPr/>
+        <p:nvPr/>
+      </p:nvGrpSpPr>
+      <p:grpSpPr>
+        <a:xfrm>
+          <a:off x="0" y="0"/>
+          <a:ext cx="0" cy="0"/>
+          <a:chOff x="0" y="0"/>
+          <a:chExt cx="0" cy="0"/>
+        </a:xfrm>
+      </p:grpSpPr>
+      <p:sp>
+        <p:nvSpPr>
+          <p:cNvPr id="2" name="Slide Image Placeholder 1"/>
+          <p:cNvSpPr>
+            <a:spLocks noGrp="1" noRot="1" noChangeAspect="1"/>
+          </p:cNvSpPr>
+          <p:nvPr>
+            <p:ph type="sldImg"/>
+          </p:nvPr>
+        </p:nvSpPr>
+        <p:spPr/>
+      </p:sp>
+      <p:sp>
+        <p:nvSpPr>
+          <p:cNvPr id="3" name="Notes Placeholder 2"/>
+          <p:cNvSpPr>
+            <a:spLocks noGrp="1"/>
+          </p:cNvSpPr>
+          <p:nvPr>
+            <p:ph type="body" idx="1"/>
+          </p:nvPr>
+        </p:nvSpPr>
+        <p:spPr/>
+        <p:txBody>
+          <a:bodyPr/>
+          <a:lstStyle/>
           <a:p>
             <a:endParaRPr lang="en-US" dirty="0"/>
           </a:p>
@@ -7500,962 +2656,6 @@
           <a:bodyPr/>
           <a:lstStyle/>
           <a:p>
-            <a:endParaRPr lang="en-US" sz="1200" kern="1200" dirty="0">
-              <a:solidFill>
-                <a:schemeClr val="tx1"/>
-              </a:solidFill>
-              <a:effectLst/>
-              <a:latin typeface="+mn-lt"/>
-              <a:ea typeface="+mn-ea"/>
-              <a:cs typeface="+mn-cs"/>
-            </a:endParaRPr>
-          </a:p>
-          <a:p>
-            <a:r>
-              <a:rPr lang="en-US" sz="1200" kern="1200" dirty="0">
-                <a:solidFill>
-                  <a:schemeClr val="tx1"/>
-                </a:solidFill>
-                <a:effectLst/>
-                <a:latin typeface="+mn-lt"/>
-                <a:ea typeface="+mn-ea"/>
-                <a:cs typeface="+mn-cs"/>
-              </a:rPr>
-              <a:t>\begin{</a:t>
-            </a:r>
-            <a:r>
-              <a:rPr lang="en-US" sz="1200" kern="1200" dirty="0" err="1">
-                <a:solidFill>
-                  <a:schemeClr val="tx1"/>
-                </a:solidFill>
-                <a:effectLst/>
-                <a:latin typeface="+mn-lt"/>
-                <a:ea typeface="+mn-ea"/>
-                <a:cs typeface="+mn-cs"/>
-              </a:rPr>
-              <a:t>alignat</a:t>
-            </a:r>
-            <a:r>
-              <a:rPr lang="en-US" sz="1200" kern="1200" dirty="0">
-                <a:solidFill>
-                  <a:schemeClr val="tx1"/>
-                </a:solidFill>
-                <a:effectLst/>
-                <a:latin typeface="+mn-lt"/>
-                <a:ea typeface="+mn-ea"/>
-                <a:cs typeface="+mn-cs"/>
-              </a:rPr>
-              <a:t>*}{3}</a:t>
-            </a:r>
-          </a:p>
-          <a:p>
-            <a:r>
-              <a:rPr lang="en-US" sz="1200" kern="1200" dirty="0">
-                <a:solidFill>
-                  <a:schemeClr val="tx1"/>
-                </a:solidFill>
-                <a:effectLst/>
-                <a:latin typeface="+mn-lt"/>
-                <a:ea typeface="+mn-ea"/>
-                <a:cs typeface="+mn-cs"/>
-              </a:rPr>
-              <a:t>\min_{\</a:t>
-            </a:r>
-            <a:r>
-              <a:rPr lang="en-US" sz="1200" kern="1200" dirty="0" err="1">
-                <a:solidFill>
-                  <a:schemeClr val="tx1"/>
-                </a:solidFill>
-                <a:effectLst/>
-                <a:latin typeface="+mn-lt"/>
-                <a:ea typeface="+mn-ea"/>
-                <a:cs typeface="+mn-cs"/>
-              </a:rPr>
-              <a:t>uc</a:t>
-            </a:r>
-            <a:r>
-              <a:rPr lang="en-US" sz="1200" kern="1200" dirty="0">
-                <a:solidFill>
-                  <a:schemeClr val="tx1"/>
-                </a:solidFill>
-                <a:effectLst/>
-                <a:latin typeface="+mn-lt"/>
-                <a:ea typeface="+mn-ea"/>
-                <a:cs typeface="+mn-cs"/>
-              </a:rPr>
-              <a:t>} &amp;  &amp; \quad &amp;h(\x(</a:t>
-            </a:r>
-            <a:r>
-              <a:rPr lang="en-US" sz="1200" kern="1200" dirty="0" err="1">
-                <a:solidFill>
-                  <a:schemeClr val="tx1"/>
-                </a:solidFill>
-                <a:effectLst/>
-                <a:latin typeface="+mn-lt"/>
-                <a:ea typeface="+mn-ea"/>
-                <a:cs typeface="+mn-cs"/>
-              </a:rPr>
-              <a:t>t_f</a:t>
-            </a:r>
-            <a:r>
-              <a:rPr lang="en-US" sz="1200" kern="1200" dirty="0">
-                <a:solidFill>
-                  <a:schemeClr val="tx1"/>
-                </a:solidFill>
-                <a:effectLst/>
-                <a:latin typeface="+mn-lt"/>
-                <a:ea typeface="+mn-ea"/>
-                <a:cs typeface="+mn-cs"/>
-              </a:rPr>
-              <a:t>), </a:t>
-            </a:r>
-            <a:r>
-              <a:rPr lang="en-US" sz="1200" kern="1200" dirty="0" err="1">
-                <a:solidFill>
-                  <a:schemeClr val="tx1"/>
-                </a:solidFill>
-                <a:effectLst/>
-                <a:latin typeface="+mn-lt"/>
-                <a:ea typeface="+mn-ea"/>
-                <a:cs typeface="+mn-cs"/>
-              </a:rPr>
-              <a:t>t_f</a:t>
-            </a:r>
-            <a:r>
-              <a:rPr lang="en-US" sz="1200" kern="1200" dirty="0">
-                <a:solidFill>
-                  <a:schemeClr val="tx1"/>
-                </a:solidFill>
-                <a:effectLst/>
-                <a:latin typeface="+mn-lt"/>
-                <a:ea typeface="+mn-ea"/>
-                <a:cs typeface="+mn-cs"/>
-              </a:rPr>
-              <a:t>) + \</a:t>
-            </a:r>
-            <a:r>
-              <a:rPr lang="en-US" sz="1200" kern="1200" dirty="0" err="1">
-                <a:solidFill>
-                  <a:schemeClr val="tx1"/>
-                </a:solidFill>
-                <a:effectLst/>
-                <a:latin typeface="+mn-lt"/>
-                <a:ea typeface="+mn-ea"/>
-                <a:cs typeface="+mn-cs"/>
-              </a:rPr>
-              <a:t>int</a:t>
-            </a:r>
-            <a:r>
-              <a:rPr lang="en-US" sz="1200" kern="1200" dirty="0">
-                <a:solidFill>
-                  <a:schemeClr val="tx1"/>
-                </a:solidFill>
-                <a:effectLst/>
-                <a:latin typeface="+mn-lt"/>
-                <a:ea typeface="+mn-ea"/>
-                <a:cs typeface="+mn-cs"/>
-              </a:rPr>
-              <a:t>_{t_0}^{</a:t>
-            </a:r>
-            <a:r>
-              <a:rPr lang="en-US" sz="1200" kern="1200" dirty="0" err="1">
-                <a:solidFill>
-                  <a:schemeClr val="tx1"/>
-                </a:solidFill>
-                <a:effectLst/>
-                <a:latin typeface="+mn-lt"/>
-                <a:ea typeface="+mn-ea"/>
-                <a:cs typeface="+mn-cs"/>
-              </a:rPr>
-              <a:t>t_f</a:t>
-            </a:r>
-            <a:r>
-              <a:rPr lang="en-US" sz="1200" kern="1200" dirty="0">
-                <a:solidFill>
-                  <a:schemeClr val="tx1"/>
-                </a:solidFill>
-                <a:effectLst/>
-                <a:latin typeface="+mn-lt"/>
-                <a:ea typeface="+mn-ea"/>
-                <a:cs typeface="+mn-cs"/>
-              </a:rPr>
-              <a:t>}g(\x(t), \</a:t>
-            </a:r>
-            <a:r>
-              <a:rPr lang="en-US" sz="1200" kern="1200" dirty="0" err="1">
-                <a:solidFill>
-                  <a:schemeClr val="tx1"/>
-                </a:solidFill>
-                <a:effectLst/>
-                <a:latin typeface="+mn-lt"/>
-                <a:ea typeface="+mn-ea"/>
-                <a:cs typeface="+mn-cs"/>
-              </a:rPr>
-              <a:t>uc</a:t>
-            </a:r>
-            <a:r>
-              <a:rPr lang="en-US" sz="1200" kern="1200" dirty="0">
-                <a:solidFill>
-                  <a:schemeClr val="tx1"/>
-                </a:solidFill>
-                <a:effectLst/>
-                <a:latin typeface="+mn-lt"/>
-                <a:ea typeface="+mn-ea"/>
-                <a:cs typeface="+mn-cs"/>
-              </a:rPr>
-              <a:t>(t), t)\, </a:t>
-            </a:r>
-            <a:r>
-              <a:rPr lang="en-US" sz="1200" kern="1200" dirty="0" err="1">
-                <a:solidFill>
-                  <a:schemeClr val="tx1"/>
-                </a:solidFill>
-                <a:effectLst/>
-                <a:latin typeface="+mn-lt"/>
-                <a:ea typeface="+mn-ea"/>
-                <a:cs typeface="+mn-cs"/>
-              </a:rPr>
-              <a:t>dt</a:t>
-            </a:r>
-            <a:r>
-              <a:rPr lang="en-US" sz="1200" kern="1200" dirty="0">
-                <a:solidFill>
-                  <a:schemeClr val="tx1"/>
-                </a:solidFill>
-                <a:effectLst/>
-                <a:latin typeface="+mn-lt"/>
-                <a:ea typeface="+mn-ea"/>
-                <a:cs typeface="+mn-cs"/>
-              </a:rPr>
-              <a:t> \\  </a:t>
-            </a:r>
-          </a:p>
-          <a:p>
-            <a:r>
-              <a:rPr lang="en-US" sz="1200" kern="1200" dirty="0">
-                <a:solidFill>
-                  <a:schemeClr val="tx1"/>
-                </a:solidFill>
-                <a:effectLst/>
-                <a:latin typeface="+mn-lt"/>
-                <a:ea typeface="+mn-ea"/>
-                <a:cs typeface="+mn-cs"/>
-              </a:rPr>
-              <a:t>\text{subject to}&amp;  &amp; \quad &amp; \dot\x(t) = \ad(\x(t), \</a:t>
-            </a:r>
-            <a:r>
-              <a:rPr lang="en-US" sz="1200" kern="1200" dirty="0" err="1">
-                <a:solidFill>
-                  <a:schemeClr val="tx1"/>
-                </a:solidFill>
-                <a:effectLst/>
-                <a:latin typeface="+mn-lt"/>
-                <a:ea typeface="+mn-ea"/>
-                <a:cs typeface="+mn-cs"/>
-              </a:rPr>
-              <a:t>uc</a:t>
-            </a:r>
-            <a:r>
-              <a:rPr lang="en-US" sz="1200" kern="1200" dirty="0">
-                <a:solidFill>
-                  <a:schemeClr val="tx1"/>
-                </a:solidFill>
-                <a:effectLst/>
-                <a:latin typeface="+mn-lt"/>
-                <a:ea typeface="+mn-ea"/>
-                <a:cs typeface="+mn-cs"/>
-              </a:rPr>
-              <a:t>(t), t)\\</a:t>
-            </a:r>
-          </a:p>
-          <a:p>
-            <a:r>
-              <a:rPr lang="en-US" sz="1200" kern="1200" dirty="0">
-                <a:solidFill>
-                  <a:schemeClr val="tx1"/>
-                </a:solidFill>
-                <a:effectLst/>
-                <a:latin typeface="+mn-lt"/>
-                <a:ea typeface="+mn-ea"/>
-                <a:cs typeface="+mn-cs"/>
-              </a:rPr>
-              <a:t>&amp;  &amp;\quad &amp;  \x(t) \in \</a:t>
-            </a:r>
-            <a:r>
-              <a:rPr lang="en-US" sz="1200" kern="1200" dirty="0" err="1">
-                <a:solidFill>
-                  <a:schemeClr val="tx1"/>
-                </a:solidFill>
-                <a:effectLst/>
-                <a:latin typeface="+mn-lt"/>
-                <a:ea typeface="+mn-ea"/>
-                <a:cs typeface="+mn-cs"/>
-              </a:rPr>
-              <a:t>mathcal</a:t>
-            </a:r>
-            <a:r>
-              <a:rPr lang="en-US" sz="1200" kern="1200" dirty="0">
-                <a:solidFill>
-                  <a:schemeClr val="tx1"/>
-                </a:solidFill>
-                <a:effectLst/>
-                <a:latin typeface="+mn-lt"/>
-                <a:ea typeface="+mn-ea"/>
-                <a:cs typeface="+mn-cs"/>
-              </a:rPr>
-              <a:t> X, \quad \</a:t>
-            </a:r>
-            <a:r>
-              <a:rPr lang="en-US" sz="1200" kern="1200" dirty="0" err="1">
-                <a:solidFill>
-                  <a:schemeClr val="tx1"/>
-                </a:solidFill>
-                <a:effectLst/>
-                <a:latin typeface="+mn-lt"/>
-                <a:ea typeface="+mn-ea"/>
-                <a:cs typeface="+mn-cs"/>
-              </a:rPr>
-              <a:t>uc</a:t>
-            </a:r>
-            <a:r>
-              <a:rPr lang="en-US" sz="1200" kern="1200" dirty="0">
-                <a:solidFill>
-                  <a:schemeClr val="tx1"/>
-                </a:solidFill>
-                <a:effectLst/>
-                <a:latin typeface="+mn-lt"/>
-                <a:ea typeface="+mn-ea"/>
-                <a:cs typeface="+mn-cs"/>
-              </a:rPr>
-              <a:t>(t) \in \</a:t>
-            </a:r>
-            <a:r>
-              <a:rPr lang="en-US" sz="1200" kern="1200" dirty="0" err="1">
-                <a:solidFill>
-                  <a:schemeClr val="tx1"/>
-                </a:solidFill>
-                <a:effectLst/>
-                <a:latin typeface="+mn-lt"/>
-                <a:ea typeface="+mn-ea"/>
-                <a:cs typeface="+mn-cs"/>
-              </a:rPr>
-              <a:t>mathcal</a:t>
-            </a:r>
-            <a:r>
-              <a:rPr lang="en-US" sz="1200" kern="1200" dirty="0">
-                <a:solidFill>
-                  <a:schemeClr val="tx1"/>
-                </a:solidFill>
-                <a:effectLst/>
-                <a:latin typeface="+mn-lt"/>
-                <a:ea typeface="+mn-ea"/>
-                <a:cs typeface="+mn-cs"/>
-              </a:rPr>
-              <a:t> U</a:t>
-            </a:r>
-          </a:p>
-          <a:p>
-            <a:r>
-              <a:rPr lang="en-US" sz="1200" kern="1200" dirty="0">
-                <a:solidFill>
-                  <a:schemeClr val="tx1"/>
-                </a:solidFill>
-                <a:effectLst/>
-                <a:latin typeface="+mn-lt"/>
-                <a:ea typeface="+mn-ea"/>
-                <a:cs typeface="+mn-cs"/>
-              </a:rPr>
-              <a:t>\end{</a:t>
-            </a:r>
-            <a:r>
-              <a:rPr lang="en-US" sz="1200" kern="1200" dirty="0" err="1">
-                <a:solidFill>
-                  <a:schemeClr val="tx1"/>
-                </a:solidFill>
-                <a:effectLst/>
-                <a:latin typeface="+mn-lt"/>
-                <a:ea typeface="+mn-ea"/>
-                <a:cs typeface="+mn-cs"/>
-              </a:rPr>
-              <a:t>alignat</a:t>
-            </a:r>
-            <a:r>
-              <a:rPr lang="en-US" sz="1200" kern="1200" dirty="0">
-                <a:solidFill>
-                  <a:schemeClr val="tx1"/>
-                </a:solidFill>
-                <a:effectLst/>
-                <a:latin typeface="+mn-lt"/>
-                <a:ea typeface="+mn-ea"/>
-                <a:cs typeface="+mn-cs"/>
-              </a:rPr>
-              <a:t>*}</a:t>
-            </a:r>
-          </a:p>
-          <a:p>
-            <a:endParaRPr lang="en-US" sz="1200" kern="1200" dirty="0">
-              <a:solidFill>
-                <a:schemeClr val="tx1"/>
-              </a:solidFill>
-              <a:effectLst/>
-              <a:latin typeface="+mn-lt"/>
-              <a:ea typeface="+mn-ea"/>
-              <a:cs typeface="+mn-cs"/>
-            </a:endParaRPr>
-          </a:p>
-          <a:p>
-            <a:endParaRPr lang="en-US" sz="1200" kern="1200" dirty="0">
-              <a:solidFill>
-                <a:schemeClr val="tx1"/>
-              </a:solidFill>
-              <a:effectLst/>
-              <a:latin typeface="+mn-lt"/>
-              <a:ea typeface="+mn-ea"/>
-              <a:cs typeface="+mn-cs"/>
-            </a:endParaRPr>
-          </a:p>
-          <a:p>
-            <a:r>
-              <a:rPr lang="en-US" sz="1200" kern="1200" dirty="0">
-                <a:solidFill>
-                  <a:schemeClr val="tx1"/>
-                </a:solidFill>
-                <a:effectLst/>
-                <a:latin typeface="+mn-lt"/>
-                <a:ea typeface="+mn-ea"/>
-                <a:cs typeface="+mn-cs"/>
-              </a:rPr>
-              <a:t>\</a:t>
-            </a:r>
-            <a:r>
-              <a:rPr lang="en-US" sz="1200" kern="1200" dirty="0" err="1">
-                <a:solidFill>
-                  <a:schemeClr val="tx1"/>
-                </a:solidFill>
-                <a:effectLst/>
-                <a:latin typeface="+mn-lt"/>
-                <a:ea typeface="+mn-ea"/>
-                <a:cs typeface="+mn-cs"/>
-              </a:rPr>
-              <a:t>documentclass</a:t>
-            </a:r>
-            <a:r>
-              <a:rPr lang="en-US" sz="1200" kern="1200" dirty="0">
-                <a:solidFill>
-                  <a:schemeClr val="tx1"/>
-                </a:solidFill>
-                <a:effectLst/>
-                <a:latin typeface="+mn-lt"/>
-                <a:ea typeface="+mn-ea"/>
-                <a:cs typeface="+mn-cs"/>
-              </a:rPr>
-              <a:t>[10pt]{article}</a:t>
-            </a:r>
-          </a:p>
-          <a:p>
-            <a:r>
-              <a:rPr lang="en-US" sz="1200" kern="1200" dirty="0">
-                <a:solidFill>
-                  <a:schemeClr val="tx1"/>
-                </a:solidFill>
-                <a:effectLst/>
-                <a:latin typeface="+mn-lt"/>
-                <a:ea typeface="+mn-ea"/>
-                <a:cs typeface="+mn-cs"/>
-              </a:rPr>
-              <a:t>\</a:t>
-            </a:r>
-            <a:r>
-              <a:rPr lang="en-US" sz="1200" kern="1200" dirty="0" err="1">
-                <a:solidFill>
-                  <a:schemeClr val="tx1"/>
-                </a:solidFill>
-                <a:effectLst/>
-                <a:latin typeface="+mn-lt"/>
-                <a:ea typeface="+mn-ea"/>
-                <a:cs typeface="+mn-cs"/>
-              </a:rPr>
-              <a:t>usepackage</a:t>
-            </a:r>
-            <a:r>
-              <a:rPr lang="en-US" sz="1200" kern="1200" dirty="0">
-                <a:solidFill>
-                  <a:schemeClr val="tx1"/>
-                </a:solidFill>
-                <a:effectLst/>
-                <a:latin typeface="+mn-lt"/>
-                <a:ea typeface="+mn-ea"/>
-                <a:cs typeface="+mn-cs"/>
-              </a:rPr>
-              <a:t>[</a:t>
-            </a:r>
-            <a:r>
-              <a:rPr lang="en-US" sz="1200" kern="1200" dirty="0" err="1">
-                <a:solidFill>
-                  <a:schemeClr val="tx1"/>
-                </a:solidFill>
-                <a:effectLst/>
-                <a:latin typeface="+mn-lt"/>
-                <a:ea typeface="+mn-ea"/>
-                <a:cs typeface="+mn-cs"/>
-              </a:rPr>
-              <a:t>usenames</a:t>
-            </a:r>
-            <a:r>
-              <a:rPr lang="en-US" sz="1200" kern="1200" dirty="0">
-                <a:solidFill>
-                  <a:schemeClr val="tx1"/>
-                </a:solidFill>
-                <a:effectLst/>
-                <a:latin typeface="+mn-lt"/>
-                <a:ea typeface="+mn-ea"/>
-                <a:cs typeface="+mn-cs"/>
-              </a:rPr>
-              <a:t>]{color} %used for font color</a:t>
-            </a:r>
-          </a:p>
-          <a:p>
-            <a:r>
-              <a:rPr lang="en-US" sz="1200" kern="1200" dirty="0">
-                <a:solidFill>
-                  <a:schemeClr val="tx1"/>
-                </a:solidFill>
-                <a:effectLst/>
-                <a:latin typeface="+mn-lt"/>
-                <a:ea typeface="+mn-ea"/>
-                <a:cs typeface="+mn-cs"/>
-              </a:rPr>
-              <a:t>\</a:t>
-            </a:r>
-            <a:r>
-              <a:rPr lang="en-US" sz="1200" kern="1200" dirty="0" err="1">
-                <a:solidFill>
-                  <a:schemeClr val="tx1"/>
-                </a:solidFill>
-                <a:effectLst/>
-                <a:latin typeface="+mn-lt"/>
-                <a:ea typeface="+mn-ea"/>
-                <a:cs typeface="+mn-cs"/>
-              </a:rPr>
-              <a:t>usepackage</a:t>
-            </a:r>
-            <a:r>
-              <a:rPr lang="en-US" sz="1200" kern="1200" dirty="0">
-                <a:solidFill>
-                  <a:schemeClr val="tx1"/>
-                </a:solidFill>
-                <a:effectLst/>
-                <a:latin typeface="+mn-lt"/>
-                <a:ea typeface="+mn-ea"/>
-                <a:cs typeface="+mn-cs"/>
-              </a:rPr>
-              <a:t>{</a:t>
-            </a:r>
-            <a:r>
-              <a:rPr lang="en-US" sz="1200" kern="1200" dirty="0" err="1">
-                <a:solidFill>
-                  <a:schemeClr val="tx1"/>
-                </a:solidFill>
-                <a:effectLst/>
-                <a:latin typeface="+mn-lt"/>
-                <a:ea typeface="+mn-ea"/>
-                <a:cs typeface="+mn-cs"/>
-              </a:rPr>
-              <a:t>amssymb</a:t>
-            </a:r>
-            <a:r>
-              <a:rPr lang="en-US" sz="1200" kern="1200" dirty="0">
-                <a:solidFill>
-                  <a:schemeClr val="tx1"/>
-                </a:solidFill>
-                <a:effectLst/>
-                <a:latin typeface="+mn-lt"/>
-                <a:ea typeface="+mn-ea"/>
-                <a:cs typeface="+mn-cs"/>
-              </a:rPr>
-              <a:t>} %</a:t>
-            </a:r>
-            <a:r>
-              <a:rPr lang="en-US" sz="1200" kern="1200" dirty="0" err="1">
-                <a:solidFill>
-                  <a:schemeClr val="tx1"/>
-                </a:solidFill>
-                <a:effectLst/>
-                <a:latin typeface="+mn-lt"/>
-                <a:ea typeface="+mn-ea"/>
-                <a:cs typeface="+mn-cs"/>
-              </a:rPr>
-              <a:t>maths</a:t>
-            </a:r>
-            <a:endParaRPr lang="en-US" sz="1200" kern="1200" dirty="0">
-              <a:solidFill>
-                <a:schemeClr val="tx1"/>
-              </a:solidFill>
-              <a:effectLst/>
-              <a:latin typeface="+mn-lt"/>
-              <a:ea typeface="+mn-ea"/>
-              <a:cs typeface="+mn-cs"/>
-            </a:endParaRPr>
-          </a:p>
-          <a:p>
-            <a:r>
-              <a:rPr lang="en-US" sz="1200" kern="1200" dirty="0">
-                <a:solidFill>
-                  <a:schemeClr val="tx1"/>
-                </a:solidFill>
-                <a:effectLst/>
-                <a:latin typeface="+mn-lt"/>
-                <a:ea typeface="+mn-ea"/>
-                <a:cs typeface="+mn-cs"/>
-              </a:rPr>
-              <a:t>\</a:t>
-            </a:r>
-            <a:r>
-              <a:rPr lang="en-US" sz="1200" kern="1200" dirty="0" err="1">
-                <a:solidFill>
-                  <a:schemeClr val="tx1"/>
-                </a:solidFill>
-                <a:effectLst/>
-                <a:latin typeface="+mn-lt"/>
-                <a:ea typeface="+mn-ea"/>
-                <a:cs typeface="+mn-cs"/>
-              </a:rPr>
-              <a:t>usepackage</a:t>
-            </a:r>
-            <a:r>
-              <a:rPr lang="en-US" sz="1200" kern="1200" dirty="0">
-                <a:solidFill>
-                  <a:schemeClr val="tx1"/>
-                </a:solidFill>
-                <a:effectLst/>
-                <a:latin typeface="+mn-lt"/>
-                <a:ea typeface="+mn-ea"/>
-                <a:cs typeface="+mn-cs"/>
-              </a:rPr>
-              <a:t>{</a:t>
-            </a:r>
-            <a:r>
-              <a:rPr lang="en-US" sz="1200" kern="1200" dirty="0" err="1">
-                <a:solidFill>
-                  <a:schemeClr val="tx1"/>
-                </a:solidFill>
-                <a:effectLst/>
-                <a:latin typeface="+mn-lt"/>
-                <a:ea typeface="+mn-ea"/>
-                <a:cs typeface="+mn-cs"/>
-              </a:rPr>
-              <a:t>amsmath</a:t>
-            </a:r>
-            <a:r>
-              <a:rPr lang="en-US" sz="1200" kern="1200" dirty="0">
-                <a:solidFill>
-                  <a:schemeClr val="tx1"/>
-                </a:solidFill>
-                <a:effectLst/>
-                <a:latin typeface="+mn-lt"/>
-                <a:ea typeface="+mn-ea"/>
-                <a:cs typeface="+mn-cs"/>
-              </a:rPr>
-              <a:t>} %</a:t>
-            </a:r>
-            <a:r>
-              <a:rPr lang="en-US" sz="1200" kern="1200" dirty="0" err="1">
-                <a:solidFill>
-                  <a:schemeClr val="tx1"/>
-                </a:solidFill>
-                <a:effectLst/>
-                <a:latin typeface="+mn-lt"/>
-                <a:ea typeface="+mn-ea"/>
-                <a:cs typeface="+mn-cs"/>
-              </a:rPr>
-              <a:t>maths</a:t>
-            </a:r>
-            <a:endParaRPr lang="en-US" sz="1200" kern="1200" dirty="0">
-              <a:solidFill>
-                <a:schemeClr val="tx1"/>
-              </a:solidFill>
-              <a:effectLst/>
-              <a:latin typeface="+mn-lt"/>
-              <a:ea typeface="+mn-ea"/>
-              <a:cs typeface="+mn-cs"/>
-            </a:endParaRPr>
-          </a:p>
-          <a:p>
-            <a:r>
-              <a:rPr lang="en-US" sz="1200" kern="1200" dirty="0">
-                <a:solidFill>
-                  <a:schemeClr val="tx1"/>
-                </a:solidFill>
-                <a:effectLst/>
-                <a:latin typeface="+mn-lt"/>
-                <a:ea typeface="+mn-ea"/>
-                <a:cs typeface="+mn-cs"/>
-              </a:rPr>
-              <a:t>\</a:t>
-            </a:r>
-            <a:r>
-              <a:rPr lang="en-US" sz="1200" kern="1200" dirty="0" err="1">
-                <a:solidFill>
-                  <a:schemeClr val="tx1"/>
-                </a:solidFill>
-                <a:effectLst/>
-                <a:latin typeface="+mn-lt"/>
-                <a:ea typeface="+mn-ea"/>
-                <a:cs typeface="+mn-cs"/>
-              </a:rPr>
-              <a:t>usepackage</a:t>
-            </a:r>
-            <a:r>
-              <a:rPr lang="en-US" sz="1200" kern="1200" dirty="0">
-                <a:solidFill>
-                  <a:schemeClr val="tx1"/>
-                </a:solidFill>
-                <a:effectLst/>
-                <a:latin typeface="+mn-lt"/>
-                <a:ea typeface="+mn-ea"/>
-                <a:cs typeface="+mn-cs"/>
-              </a:rPr>
-              <a:t>[utf8]{</a:t>
-            </a:r>
-            <a:r>
-              <a:rPr lang="en-US" sz="1200" kern="1200" dirty="0" err="1">
-                <a:solidFill>
-                  <a:schemeClr val="tx1"/>
-                </a:solidFill>
-                <a:effectLst/>
-                <a:latin typeface="+mn-lt"/>
-                <a:ea typeface="+mn-ea"/>
-                <a:cs typeface="+mn-cs"/>
-              </a:rPr>
-              <a:t>inputenc</a:t>
-            </a:r>
-            <a:r>
-              <a:rPr lang="en-US" sz="1200" kern="1200" dirty="0">
-                <a:solidFill>
-                  <a:schemeClr val="tx1"/>
-                </a:solidFill>
-                <a:effectLst/>
-                <a:latin typeface="+mn-lt"/>
-                <a:ea typeface="+mn-ea"/>
-                <a:cs typeface="+mn-cs"/>
-              </a:rPr>
-              <a:t>} %useful to type directly diacritic characters</a:t>
-            </a:r>
-          </a:p>
-          <a:p>
-            <a:pPr lvl="1"/>
-            <a:r>
-              <a:rPr lang="en-US" sz="1200" kern="1200" dirty="0">
-                <a:solidFill>
-                  <a:schemeClr val="tx1"/>
-                </a:solidFill>
-                <a:effectLst/>
-                <a:latin typeface="+mn-lt"/>
-                <a:ea typeface="+mn-ea"/>
-                <a:cs typeface="+mn-cs"/>
-              </a:rPr>
-              <a:t>\</a:t>
-            </a:r>
-            <a:r>
-              <a:rPr lang="en-US" sz="1200" kern="1200" dirty="0" err="1">
-                <a:solidFill>
-                  <a:schemeClr val="tx1"/>
-                </a:solidFill>
-                <a:effectLst/>
-                <a:latin typeface="+mn-lt"/>
-                <a:ea typeface="+mn-ea"/>
-                <a:cs typeface="+mn-cs"/>
-              </a:rPr>
-              <a:t>newcommand</a:t>
-            </a:r>
-            <a:r>
-              <a:rPr lang="en-US" sz="1200" kern="1200" dirty="0">
-                <a:solidFill>
-                  <a:schemeClr val="tx1"/>
-                </a:solidFill>
-                <a:effectLst/>
-                <a:latin typeface="+mn-lt"/>
-                <a:ea typeface="+mn-ea"/>
-                <a:cs typeface="+mn-cs"/>
-              </a:rPr>
-              <a:t>{\</a:t>
-            </a:r>
-            <a:r>
-              <a:rPr lang="en-US" sz="1200" kern="1200" dirty="0" err="1">
-                <a:solidFill>
-                  <a:schemeClr val="tx1"/>
-                </a:solidFill>
-                <a:effectLst/>
-                <a:latin typeface="+mn-lt"/>
-                <a:ea typeface="+mn-ea"/>
-                <a:cs typeface="+mn-cs"/>
-              </a:rPr>
-              <a:t>uc</a:t>
-            </a:r>
-            <a:r>
-              <a:rPr lang="en-US" sz="1200" kern="1200" dirty="0">
-                <a:solidFill>
-                  <a:schemeClr val="tx1"/>
-                </a:solidFill>
-                <a:effectLst/>
-                <a:latin typeface="+mn-lt"/>
-                <a:ea typeface="+mn-ea"/>
-                <a:cs typeface="+mn-cs"/>
-              </a:rPr>
-              <a:t>}{\</a:t>
-            </a:r>
-            <a:r>
-              <a:rPr lang="en-US" sz="1200" kern="1200" dirty="0" err="1">
-                <a:solidFill>
-                  <a:schemeClr val="tx1"/>
-                </a:solidFill>
-                <a:effectLst/>
-                <a:latin typeface="+mn-lt"/>
-                <a:ea typeface="+mn-ea"/>
-                <a:cs typeface="+mn-cs"/>
-              </a:rPr>
-              <a:t>mathbf</a:t>
-            </a:r>
-            <a:r>
-              <a:rPr lang="en-US" sz="1200" kern="1200" dirty="0">
-                <a:solidFill>
-                  <a:schemeClr val="tx1"/>
-                </a:solidFill>
-                <a:effectLst/>
-                <a:latin typeface="+mn-lt"/>
-                <a:ea typeface="+mn-ea"/>
-                <a:cs typeface="+mn-cs"/>
-              </a:rPr>
-              <a:t>{u}}</a:t>
-            </a:r>
-          </a:p>
-          <a:p>
-            <a:pPr lvl="1"/>
-            <a:r>
-              <a:rPr lang="en-US" sz="1200" kern="1200" dirty="0">
-                <a:solidFill>
-                  <a:schemeClr val="tx1"/>
-                </a:solidFill>
-                <a:effectLst/>
-                <a:latin typeface="+mn-lt"/>
-                <a:ea typeface="+mn-ea"/>
-                <a:cs typeface="+mn-cs"/>
-              </a:rPr>
-              <a:t>\</a:t>
-            </a:r>
-            <a:r>
-              <a:rPr lang="en-US" sz="1200" kern="1200" dirty="0" err="1">
-                <a:solidFill>
-                  <a:schemeClr val="tx1"/>
-                </a:solidFill>
-                <a:effectLst/>
-                <a:latin typeface="+mn-lt"/>
-                <a:ea typeface="+mn-ea"/>
-                <a:cs typeface="+mn-cs"/>
-              </a:rPr>
-              <a:t>newcommand</a:t>
-            </a:r>
-            <a:r>
-              <a:rPr lang="en-US" sz="1200" kern="1200" dirty="0">
-                <a:solidFill>
-                  <a:schemeClr val="tx1"/>
-                </a:solidFill>
-                <a:effectLst/>
-                <a:latin typeface="+mn-lt"/>
-                <a:ea typeface="+mn-ea"/>
-                <a:cs typeface="+mn-cs"/>
-              </a:rPr>
-              <a:t>{\x}{\</a:t>
-            </a:r>
-            <a:r>
-              <a:rPr lang="en-US" sz="1200" kern="1200" dirty="0" err="1">
-                <a:solidFill>
-                  <a:schemeClr val="tx1"/>
-                </a:solidFill>
-                <a:effectLst/>
-                <a:latin typeface="+mn-lt"/>
-                <a:ea typeface="+mn-ea"/>
-                <a:cs typeface="+mn-cs"/>
-              </a:rPr>
-              <a:t>mathbf</a:t>
-            </a:r>
-            <a:r>
-              <a:rPr lang="en-US" sz="1200" kern="1200" dirty="0">
-                <a:solidFill>
-                  <a:schemeClr val="tx1"/>
-                </a:solidFill>
-                <a:effectLst/>
-                <a:latin typeface="+mn-lt"/>
-                <a:ea typeface="+mn-ea"/>
-                <a:cs typeface="+mn-cs"/>
-              </a:rPr>
-              <a:t>{x}}</a:t>
-            </a:r>
-          </a:p>
-          <a:p>
-            <a:pPr lvl="1"/>
-            <a:r>
-              <a:rPr lang="en-US" sz="1200" kern="1200" dirty="0">
-                <a:solidFill>
-                  <a:schemeClr val="tx1"/>
-                </a:solidFill>
-                <a:effectLst/>
-                <a:latin typeface="+mn-lt"/>
-                <a:ea typeface="+mn-ea"/>
-                <a:cs typeface="+mn-cs"/>
-              </a:rPr>
-              <a:t>\</a:t>
-            </a:r>
-            <a:r>
-              <a:rPr lang="en-US" sz="1200" kern="1200" dirty="0" err="1">
-                <a:solidFill>
-                  <a:schemeClr val="tx1"/>
-                </a:solidFill>
-                <a:effectLst/>
-                <a:latin typeface="+mn-lt"/>
-                <a:ea typeface="+mn-ea"/>
-                <a:cs typeface="+mn-cs"/>
-              </a:rPr>
-              <a:t>newcommand</a:t>
-            </a:r>
-            <a:r>
-              <a:rPr lang="en-US" sz="1200" kern="1200" dirty="0">
-                <a:solidFill>
-                  <a:schemeClr val="tx1"/>
-                </a:solidFill>
-                <a:effectLst/>
-                <a:latin typeface="+mn-lt"/>
-                <a:ea typeface="+mn-ea"/>
-                <a:cs typeface="+mn-cs"/>
-              </a:rPr>
-              <a:t>{\ad}{\</a:t>
-            </a:r>
-            <a:r>
-              <a:rPr lang="en-US" sz="1200" kern="1200" dirty="0" err="1">
-                <a:solidFill>
-                  <a:schemeClr val="tx1"/>
-                </a:solidFill>
-                <a:effectLst/>
-                <a:latin typeface="+mn-lt"/>
-                <a:ea typeface="+mn-ea"/>
-                <a:cs typeface="+mn-cs"/>
-              </a:rPr>
-              <a:t>mathbf</a:t>
-            </a:r>
-            <a:r>
-              <a:rPr lang="en-US" sz="1200" kern="1200" dirty="0">
-                <a:solidFill>
-                  <a:schemeClr val="tx1"/>
-                </a:solidFill>
-                <a:effectLst/>
-                <a:latin typeface="+mn-lt"/>
-                <a:ea typeface="+mn-ea"/>
-                <a:cs typeface="+mn-cs"/>
-              </a:rPr>
-              <a:t>{a}}</a:t>
-            </a:r>
-          </a:p>
-          <a:p>
             <a:endParaRPr lang="en-US" dirty="0"/>
           </a:p>
         </p:txBody>
@@ -8540,172 +2740,6 @@
           <a:bodyPr/>
           <a:lstStyle/>
           <a:p>
-            <a:pPr marL="0" marR="0" indent="0" algn="l" defTabSz="914400" rtl="0" eaLnBrk="1" fontAlgn="auto" latinLnBrk="0" hangingPunct="1">
-              <a:lnSpc>
-                <a:spcPct val="100000"/>
-              </a:lnSpc>
-              <a:spcBef>
-                <a:spcPts val="0"/>
-              </a:spcBef>
-              <a:spcAft>
-                <a:spcPts val="0"/>
-              </a:spcAft>
-              <a:buClrTx/>
-              <a:buSzTx/>
-              <a:buFontTx/>
-              <a:buNone/>
-              <a:tabLst/>
-              <a:defRPr/>
-            </a:pPr>
-            <a:endParaRPr lang="en-US" sz="1200" kern="1200" dirty="0">
-              <a:solidFill>
-                <a:schemeClr val="tx1"/>
-              </a:solidFill>
-              <a:effectLst/>
-              <a:latin typeface="+mn-lt"/>
-              <a:ea typeface="+mn-ea"/>
-              <a:cs typeface="+mn-cs"/>
-            </a:endParaRPr>
-          </a:p>
-          <a:p>
-            <a:pPr marL="0" marR="0" indent="0" algn="l" defTabSz="914400" rtl="0" eaLnBrk="1" fontAlgn="auto" latinLnBrk="0" hangingPunct="1">
-              <a:lnSpc>
-                <a:spcPct val="100000"/>
-              </a:lnSpc>
-              <a:spcBef>
-                <a:spcPts val="0"/>
-              </a:spcBef>
-              <a:spcAft>
-                <a:spcPts val="0"/>
-              </a:spcAft>
-              <a:buClrTx/>
-              <a:buSzTx/>
-              <a:buFontTx/>
-              <a:buNone/>
-              <a:tabLst/>
-              <a:defRPr/>
-            </a:pPr>
-            <a:endParaRPr lang="en-US" sz="1200" kern="1200" dirty="0">
-              <a:solidFill>
-                <a:schemeClr val="tx1"/>
-              </a:solidFill>
-              <a:effectLst/>
-              <a:latin typeface="+mn-lt"/>
-              <a:ea typeface="+mn-ea"/>
-              <a:cs typeface="+mn-cs"/>
-            </a:endParaRPr>
-          </a:p>
-          <a:p>
-            <a:pPr marL="0" marR="0" indent="0" algn="l" defTabSz="914400" rtl="0" eaLnBrk="1" fontAlgn="auto" latinLnBrk="0" hangingPunct="1">
-              <a:lnSpc>
-                <a:spcPct val="100000"/>
-              </a:lnSpc>
-              <a:spcBef>
-                <a:spcPts val="0"/>
-              </a:spcBef>
-              <a:spcAft>
-                <a:spcPts val="0"/>
-              </a:spcAft>
-              <a:buClrTx/>
-              <a:buSzTx/>
-              <a:buFontTx/>
-              <a:buNone/>
-              <a:tabLst/>
-              <a:defRPr/>
-            </a:pPr>
-            <a:r>
-              <a:rPr lang="en-US" sz="1200" kern="1200" dirty="0">
-                <a:solidFill>
-                  <a:schemeClr val="tx1"/>
-                </a:solidFill>
-                <a:effectLst/>
-                <a:latin typeface="+mn-lt"/>
-                <a:ea typeface="+mn-ea"/>
-                <a:cs typeface="+mn-cs"/>
-              </a:rPr>
-              <a:t>\</a:t>
-            </a:r>
-            <a:r>
-              <a:rPr lang="en-US" sz="1200" kern="1200" dirty="0" err="1">
-                <a:solidFill>
-                  <a:schemeClr val="tx1"/>
-                </a:solidFill>
-                <a:effectLst/>
-                <a:latin typeface="+mn-lt"/>
-                <a:ea typeface="+mn-ea"/>
-                <a:cs typeface="+mn-cs"/>
-              </a:rPr>
-              <a:t>uc</a:t>
-            </a:r>
-            <a:r>
-              <a:rPr lang="en-US" sz="1200" kern="1200" dirty="0">
-                <a:solidFill>
-                  <a:schemeClr val="tx1"/>
-                </a:solidFill>
-                <a:effectLst/>
-                <a:latin typeface="+mn-lt"/>
-                <a:ea typeface="+mn-ea"/>
-                <a:cs typeface="+mn-cs"/>
-              </a:rPr>
-              <a:t>^*(t) = \</a:t>
-            </a:r>
-            <a:r>
-              <a:rPr lang="en-US" sz="1200" kern="1200" dirty="0" err="1">
-                <a:solidFill>
-                  <a:schemeClr val="tx1"/>
-                </a:solidFill>
-                <a:effectLst/>
-                <a:latin typeface="+mn-lt"/>
-                <a:ea typeface="+mn-ea"/>
-                <a:cs typeface="+mn-cs"/>
-              </a:rPr>
-              <a:t>mathbf</a:t>
-            </a:r>
-            <a:r>
-              <a:rPr lang="en-US" sz="1200" kern="1200" dirty="0">
-                <a:solidFill>
-                  <a:schemeClr val="tx1"/>
-                </a:solidFill>
-                <a:effectLst/>
-                <a:latin typeface="+mn-lt"/>
-                <a:ea typeface="+mn-ea"/>
-                <a:cs typeface="+mn-cs"/>
-              </a:rPr>
-              <a:t>{f}(\x(t_0),t)</a:t>
-            </a:r>
-          </a:p>
-          <a:p>
-            <a:pPr marL="0" marR="0" indent="0" algn="l" defTabSz="914400" rtl="0" eaLnBrk="1" fontAlgn="auto" latinLnBrk="0" hangingPunct="1">
-              <a:lnSpc>
-                <a:spcPct val="100000"/>
-              </a:lnSpc>
-              <a:spcBef>
-                <a:spcPts val="0"/>
-              </a:spcBef>
-              <a:spcAft>
-                <a:spcPts val="0"/>
-              </a:spcAft>
-              <a:buClrTx/>
-              <a:buSzTx/>
-              <a:buFontTx/>
-              <a:buNone/>
-              <a:tabLst/>
-              <a:defRPr/>
-            </a:pPr>
-            <a:r>
-              <a:rPr lang="is-IS" sz="1200" kern="1200" dirty="0">
-                <a:solidFill>
-                  <a:schemeClr val="tx1"/>
-                </a:solidFill>
-                <a:effectLst/>
-                <a:latin typeface="+mn-lt"/>
-                <a:ea typeface="+mn-ea"/>
-                <a:cs typeface="+mn-cs"/>
-              </a:rPr>
-              <a:t>\uc^*(t) = \pi(\x(t),t)</a:t>
-            </a:r>
-          </a:p>
-          <a:p>
             <a:endParaRPr lang="en-US" dirty="0"/>
           </a:p>
         </p:txBody>
@@ -8795,240 +2829,9 @@
               <a:spcAft>
                 <a:spcPts val="0"/>
               </a:spcAft>
-              <a:buClr>
-                <a:schemeClr val="dk1"/>
-              </a:buClr>
-              <a:buSzPts val="1100"/>
-              <a:buFont typeface="Arial"/>
               <a:buNone/>
             </a:pPr>
-            <a:r>
-              <a:rPr lang="en"/>
-              <a:t>\begin{align*}</a:t>
-            </a:r>
-            <a:endParaRPr/>
-          </a:p>
-          <a:p>
-            <a:pPr marL="0" lvl="0" indent="0" algn="l" rtl="0">
-              <a:spcBef>
-                <a:spcPts val="0"/>
-              </a:spcBef>
-              <a:spcAft>
-                <a:spcPts val="0"/>
-              </a:spcAft>
-              <a:buClr>
-                <a:schemeClr val="dk1"/>
-              </a:buClr>
-              <a:buSzPts val="1100"/>
-              <a:buFont typeface="Arial"/>
-              <a:buNone/>
-            </a:pPr>
-            <a:r>
-              <a:rPr lang="en"/>
-              <a:t>\min\limits_u\quad</a:t>
-            </a:r>
-            <a:endParaRPr/>
-          </a:p>
-          <a:p>
-            <a:pPr marL="0" lvl="0" indent="0" algn="l" rtl="0">
-              <a:spcBef>
-                <a:spcPts val="0"/>
-              </a:spcBef>
-              <a:spcAft>
-                <a:spcPts val="0"/>
-              </a:spcAft>
-              <a:buClr>
-                <a:schemeClr val="dk1"/>
-              </a:buClr>
-              <a:buSzPts val="1100"/>
-              <a:buFont typeface="Arial"/>
-              <a:buNone/>
-            </a:pPr>
-            <a:r>
-              <a:rPr lang="en"/>
-              <a:t>&amp; h(x(T),T)+\int_0^Tg(x(t),u(t),t)dt</a:t>
-            </a:r>
-            <a:endParaRPr/>
-          </a:p>
-          <a:p>
-            <a:pPr marL="0" lvl="0" indent="0" algn="l" rtl="0">
-              <a:spcBef>
-                <a:spcPts val="0"/>
-              </a:spcBef>
-              <a:spcAft>
-                <a:spcPts val="0"/>
-              </a:spcAft>
-              <a:buClr>
-                <a:schemeClr val="dk1"/>
-              </a:buClr>
-              <a:buSzPts val="1100"/>
-              <a:buFont typeface="Arial"/>
-              <a:buNone/>
-            </a:pPr>
-            <a:r>
-              <a:rPr lang="en"/>
-              <a:t>\\</a:t>
-            </a:r>
-            <a:endParaRPr/>
-          </a:p>
-          <a:p>
-            <a:pPr marL="0" lvl="0" indent="0" algn="l" rtl="0">
-              <a:spcBef>
-                <a:spcPts val="0"/>
-              </a:spcBef>
-              <a:spcAft>
-                <a:spcPts val="0"/>
-              </a:spcAft>
-              <a:buClr>
-                <a:schemeClr val="dk1"/>
-              </a:buClr>
-              <a:buSzPts val="1100"/>
-              <a:buFont typeface="Arial"/>
-              <a:buNone/>
-            </a:pPr>
-            <a:r>
-              <a:rPr lang="en"/>
-              <a:t>\text{s.t.} \quad \</a:t>
-            </a:r>
-            <a:endParaRPr/>
-          </a:p>
-          <a:p>
-            <a:pPr marL="0" lvl="0" indent="0" algn="l" rtl="0">
-              <a:spcBef>
-                <a:spcPts val="0"/>
-              </a:spcBef>
-              <a:spcAft>
-                <a:spcPts val="0"/>
-              </a:spcAft>
-              <a:buClr>
-                <a:schemeClr val="dk1"/>
-              </a:buClr>
-              <a:buSzPts val="1100"/>
-              <a:buFont typeface="Arial"/>
-              <a:buNone/>
-            </a:pPr>
-            <a:r>
-              <a:rPr lang="en"/>
-              <a:t>&amp; \dot{x}(t)=f(x(t),u(t),t),</a:t>
-            </a:r>
-            <a:endParaRPr/>
-          </a:p>
-          <a:p>
-            <a:pPr marL="0" lvl="0" indent="0" algn="l" rtl="0">
-              <a:spcBef>
-                <a:spcPts val="0"/>
-              </a:spcBef>
-              <a:spcAft>
-                <a:spcPts val="0"/>
-              </a:spcAft>
-              <a:buClr>
-                <a:schemeClr val="dk1"/>
-              </a:buClr>
-              <a:buSzPts val="1100"/>
-              <a:buFont typeface="Arial"/>
-              <a:buNone/>
-            </a:pPr>
-            <a:r>
-              <a:rPr lang="en"/>
-              <a:t>\\</a:t>
-            </a:r>
-            <a:endParaRPr/>
-          </a:p>
-          <a:p>
-            <a:pPr marL="0" lvl="0" indent="0" algn="l" rtl="0">
-              <a:spcBef>
-                <a:spcPts val="0"/>
-              </a:spcBef>
-              <a:spcAft>
-                <a:spcPts val="0"/>
-              </a:spcAft>
-              <a:buClr>
-                <a:schemeClr val="dk1"/>
-              </a:buClr>
-              <a:buSzPts val="1100"/>
-              <a:buFont typeface="Arial"/>
-              <a:buNone/>
-            </a:pPr>
-            <a:r>
-              <a:rPr lang="en"/>
-              <a:t>&amp;x(t)\in\mathcal{X},\quad </a:t>
-            </a:r>
-            <a:endParaRPr/>
-          </a:p>
-          <a:p>
-            <a:pPr marL="0" lvl="0" indent="0" algn="l" rtl="0">
-              <a:spcBef>
-                <a:spcPts val="0"/>
-              </a:spcBef>
-              <a:spcAft>
-                <a:spcPts val="0"/>
-              </a:spcAft>
-              <a:buClr>
-                <a:schemeClr val="dk1"/>
-              </a:buClr>
-              <a:buSzPts val="1100"/>
-              <a:buFont typeface="Arial"/>
-              <a:buNone/>
-            </a:pPr>
-            <a:r>
-              <a:rPr lang="en"/>
-              <a:t>\\</a:t>
-            </a:r>
-            <a:endParaRPr/>
-          </a:p>
-          <a:p>
-            <a:pPr marL="0" lvl="0" indent="0" algn="l" rtl="0">
-              <a:spcBef>
-                <a:spcPts val="0"/>
-              </a:spcBef>
-              <a:spcAft>
-                <a:spcPts val="0"/>
-              </a:spcAft>
-              <a:buClr>
-                <a:schemeClr val="dk1"/>
-              </a:buClr>
-              <a:buSzPts val="1100"/>
-              <a:buFont typeface="Arial"/>
-              <a:buNone/>
-            </a:pPr>
-            <a:r>
-              <a:rPr lang="en"/>
-              <a:t>&amp;u(t)\in\mathcal{U}.</a:t>
-            </a:r>
-            <a:endParaRPr/>
-          </a:p>
-          <a:p>
-            <a:pPr marL="0" lvl="0" indent="0" algn="l" rtl="0">
-              <a:spcBef>
-                <a:spcPts val="0"/>
-              </a:spcBef>
-              <a:spcAft>
-                <a:spcPts val="0"/>
-              </a:spcAft>
-              <a:buClr>
-                <a:schemeClr val="dk1"/>
-              </a:buClr>
-              <a:buSzPts val="1100"/>
-              <a:buFont typeface="Arial"/>
-              <a:buNone/>
-            </a:pPr>
-            <a:r>
-              <a:rPr lang="en"/>
-              <a:t>\end{align*}</a:t>
-            </a:r>
-            <a:endParaRPr/>
-          </a:p>
-          <a:p>
-            <a:pPr marL="0" lvl="0" indent="0" algn="l" rtl="0">
-              <a:spcBef>
-                <a:spcPts val="0"/>
-              </a:spcBef>
-              <a:spcAft>
-                <a:spcPts val="0"/>
-              </a:spcAft>
-              <a:buNone/>
-            </a:pPr>
-            <a:endParaRPr/>
+            <a:endParaRPr dirty="0"/>
           </a:p>
         </p:txBody>
       </p:sp>
@@ -9132,27 +2935,7 @@
               </a:spcAft>
               <a:buNone/>
             </a:pPr>
-            <a:r>
-              <a:rPr lang="en"/>
-              <a:t>\min\limits_{x\in\mathbb{R}^n}\ \ f(x)</a:t>
-            </a:r>
-            <a:endParaRPr/>
-          </a:p>
-          <a:p>
-            <a:pPr marL="0" lvl="0" indent="0" algn="l" rtl="0">
-              <a:spcBef>
-                <a:spcPts val="0"/>
-              </a:spcBef>
-              <a:spcAft>
-                <a:spcPts val="0"/>
-              </a:spcAft>
-              <a:buNone/>
-            </a:pPr>
-            <a:r>
-              <a:rPr lang="en"/>
-              <a:t>\nabla f(x)</a:t>
-            </a:r>
-            <a:endParaRPr/>
+            <a:endParaRPr dirty="0"/>
           </a:p>
         </p:txBody>
       </p:sp>
@@ -9249,149 +3032,6 @@
           <a:bodyPr/>
           <a:lstStyle/>
           <a:p>
-            <a:br>
-              <a:rPr lang="en-US" sz="1200" kern="1200" dirty="0">
-                <a:solidFill>
-                  <a:schemeClr val="tx1"/>
-                </a:solidFill>
-                <a:effectLst/>
-                <a:latin typeface="+mn-lt"/>
-                <a:ea typeface="+mn-ea"/>
-                <a:cs typeface="+mn-cs"/>
-              </a:rPr>
-            </a:br>
-            <a:endParaRPr lang="en-US" sz="1200" kern="1200" dirty="0">
-              <a:solidFill>
-                <a:schemeClr val="tx1"/>
-              </a:solidFill>
-              <a:effectLst/>
-              <a:latin typeface="+mn-lt"/>
-              <a:ea typeface="+mn-ea"/>
-              <a:cs typeface="+mn-cs"/>
-            </a:endParaRPr>
-          </a:p>
-          <a:p>
-            <a:r>
-              <a:rPr lang="en-US" sz="1200" kern="1200" dirty="0">
-                <a:solidFill>
-                  <a:schemeClr val="tx1"/>
-                </a:solidFill>
-                <a:effectLst/>
-                <a:latin typeface="+mn-lt"/>
-                <a:ea typeface="+mn-ea"/>
-                <a:cs typeface="+mn-cs"/>
-              </a:rPr>
-              <a:t>f(\x^*) \</a:t>
-            </a:r>
-            <a:r>
-              <a:rPr lang="en-US" sz="1200" kern="1200" dirty="0" err="1">
-                <a:solidFill>
-                  <a:schemeClr val="tx1"/>
-                </a:solidFill>
-                <a:effectLst/>
-                <a:latin typeface="+mn-lt"/>
-                <a:ea typeface="+mn-ea"/>
-                <a:cs typeface="+mn-cs"/>
-              </a:rPr>
-              <a:t>leq</a:t>
-            </a:r>
-            <a:r>
-              <a:rPr lang="en-US" sz="1200" kern="1200" dirty="0">
-                <a:solidFill>
-                  <a:schemeClr val="tx1"/>
-                </a:solidFill>
-                <a:effectLst/>
-                <a:latin typeface="+mn-lt"/>
-                <a:ea typeface="+mn-ea"/>
-                <a:cs typeface="+mn-cs"/>
-              </a:rPr>
-              <a:t> f(\x), \</a:t>
-            </a:r>
-            <a:r>
-              <a:rPr lang="en-US" sz="1200" kern="1200" dirty="0" err="1">
-                <a:solidFill>
-                  <a:schemeClr val="tx1"/>
-                </a:solidFill>
-                <a:effectLst/>
-                <a:latin typeface="+mn-lt"/>
-                <a:ea typeface="+mn-ea"/>
-                <a:cs typeface="+mn-cs"/>
-              </a:rPr>
-              <a:t>qquad</a:t>
-            </a:r>
-            <a:r>
-              <a:rPr lang="en-US" sz="1200" kern="1200" dirty="0">
-                <a:solidFill>
-                  <a:schemeClr val="tx1"/>
-                </a:solidFill>
-                <a:effectLst/>
-                <a:latin typeface="+mn-lt"/>
-                <a:ea typeface="+mn-ea"/>
-                <a:cs typeface="+mn-cs"/>
-              </a:rPr>
-              <a:t> \</a:t>
-            </a:r>
-            <a:r>
-              <a:rPr lang="en-US" sz="1200" kern="1200" dirty="0" err="1">
-                <a:solidFill>
-                  <a:schemeClr val="tx1"/>
-                </a:solidFill>
-                <a:effectLst/>
-                <a:latin typeface="+mn-lt"/>
-                <a:ea typeface="+mn-ea"/>
-                <a:cs typeface="+mn-cs"/>
-              </a:rPr>
-              <a:t>forall</a:t>
-            </a:r>
-            <a:r>
-              <a:rPr lang="en-US" sz="1200" kern="1200" dirty="0">
-                <a:solidFill>
-                  <a:schemeClr val="tx1"/>
-                </a:solidFill>
-                <a:effectLst/>
-                <a:latin typeface="+mn-lt"/>
-                <a:ea typeface="+mn-ea"/>
-                <a:cs typeface="+mn-cs"/>
-              </a:rPr>
-              <a:t> \x \, \big \vert \|\x - \x^*\| &lt; \epsilon</a:t>
-            </a:r>
-          </a:p>
-          <a:p>
-            <a:endParaRPr lang="en-US" dirty="0"/>
-          </a:p>
-          <a:p>
-            <a:r>
-              <a:rPr lang="en-US" dirty="0"/>
-              <a:t>f(\x^*) \</a:t>
-            </a:r>
-            <a:r>
-              <a:rPr lang="en-US" dirty="0" err="1"/>
-              <a:t>leq</a:t>
-            </a:r>
-            <a:r>
-              <a:rPr lang="en-US" dirty="0"/>
-              <a:t> f(\x), \</a:t>
-            </a:r>
-            <a:r>
-              <a:rPr lang="en-US" dirty="0" err="1"/>
-              <a:t>qquad</a:t>
-            </a:r>
-            <a:r>
-              <a:rPr lang="en-US" dirty="0"/>
-              <a:t> \</a:t>
-            </a:r>
-            <a:r>
-              <a:rPr lang="en-US" dirty="0" err="1"/>
-              <a:t>forall</a:t>
-            </a:r>
-            <a:r>
-              <a:rPr lang="en-US" dirty="0"/>
-              <a:t> \x \in \</a:t>
-            </a:r>
-            <a:r>
-              <a:rPr lang="en-US" dirty="0" err="1"/>
-              <a:t>reals^n</a:t>
-            </a:r>
             <a:endParaRPr lang="en-US" dirty="0"/>
           </a:p>
         </p:txBody>
@@ -9561,7 +3201,7 @@
           <a:p>
             <a:fld id="{92F1E40C-A8C6-754D-96E6-8A14688F5938}" type="datetime1">
               <a:rPr lang="en-US" smtClean="0"/>
-              <a:t>12/20/2025</a:t>
+              <a:t>8/13/26</a:t>
             </a:fld>
             <a:endParaRPr lang="en-US" dirty="0"/>
           </a:p>
@@ -9779,7 +3419,7 @@
           <a:p>
             <a:fld id="{B527ED27-A453-6045-89F2-E93DA9185582}" type="datetime1">
               <a:rPr lang="en-US" smtClean="0"/>
-              <a:t>12/20/2025</a:t>
+              <a:t>8/13/26</a:t>
             </a:fld>
             <a:endParaRPr lang="en-US"/>
           </a:p>
@@ -9961,7 +3601,7 @@
           <a:p>
             <a:fld id="{BDCA3F60-E12D-B047-AC45-252533FF897C}" type="datetime1">
               <a:rPr lang="en-US" smtClean="0"/>
-              <a:t>12/20/2025</a:t>
+              <a:t>8/13/26</a:t>
             </a:fld>
             <a:endParaRPr lang="en-US"/>
           </a:p>
@@ -10138,7 +3778,7 @@
           <a:p>
             <a:fld id="{158D8B51-FBA5-9848-8E33-BA212B7EC661}" type="datetime1">
               <a:rPr lang="en-US" smtClean="0"/>
-              <a:t>12/20/2025</a:t>
+              <a:t>8/13/26</a:t>
             </a:fld>
             <a:endParaRPr lang="en-US"/>
           </a:p>
@@ -10443,7 +4083,7 @@
           <a:p>
             <a:fld id="{59604B5B-6773-9342-BF28-57026B66297B}" type="datetime1">
               <a:rPr lang="en-US" smtClean="0"/>
-              <a:t>12/20/2025</a:t>
+              <a:t>8/13/26</a:t>
             </a:fld>
             <a:endParaRPr lang="en-US"/>
           </a:p>
@@ -10676,7 +4316,7 @@
           <a:p>
             <a:fld id="{CA933ECE-829A-494C-BAA4-A8197829C9AD}" type="datetime1">
               <a:rPr lang="en-US" smtClean="0"/>
-              <a:t>12/20/2025</a:t>
+              <a:t>8/13/26</a:t>
             </a:fld>
             <a:endParaRPr lang="en-US"/>
           </a:p>
@@ -11044,7 +4684,7 @@
           <a:p>
             <a:fld id="{D922AA7A-8C29-A849-9F1A-77E7D0A8266D}" type="datetime1">
               <a:rPr lang="en-US" smtClean="0"/>
-              <a:t>12/20/2025</a:t>
+              <a:t>8/13/26</a:t>
             </a:fld>
             <a:endParaRPr lang="en-US"/>
           </a:p>
@@ -11165,7 +4805,7 @@
           <a:p>
             <a:fld id="{38788885-67F4-414D-AEB5-B926150838E0}" type="datetime1">
               <a:rPr lang="en-US" smtClean="0"/>
-              <a:t>12/20/2025</a:t>
+              <a:t>8/13/26</a:t>
             </a:fld>
             <a:endParaRPr lang="en-US"/>
           </a:p>
@@ -11264,7 +4904,7 @@
           <a:p>
             <a:fld id="{8CF35B1E-6F1E-314E-AED1-9A16359AB2BA}" type="datetime1">
               <a:rPr lang="en-US" smtClean="0"/>
-              <a:t>12/20/2025</a:t>
+              <a:t>8/13/26</a:t>
             </a:fld>
             <a:endParaRPr lang="en-US"/>
           </a:p>
@@ -11543,7 +5183,7 @@
           <a:p>
             <a:fld id="{2BD052E8-CCC0-CE44-854D-E7A85541A386}" type="datetime1">
               <a:rPr lang="en-US" smtClean="0"/>
-              <a:t>12/20/2025</a:t>
+              <a:t>8/13/26</a:t>
             </a:fld>
             <a:endParaRPr lang="en-US"/>
           </a:p>
@@ -11799,7 +5439,7 @@
           <a:p>
             <a:fld id="{C3CD4517-3FE5-2243-A7FF-8BB6E1859726}" type="datetime1">
               <a:rPr lang="en-US" smtClean="0"/>
-              <a:t>12/20/2025</a:t>
+              <a:t>8/13/26</a:t>
             </a:fld>
             <a:endParaRPr lang="en-US"/>
           </a:p>
@@ -12014,7 +5654,7 @@
           <a:p>
             <a:fld id="{9A0242F7-FB53-534C-9064-BEB50DEC5148}" type="datetime1">
               <a:rPr lang="en-US" smtClean="0"/>
-              <a:t>12/20/2025</a:t>
+              <a:t>8/13/26</a:t>
             </a:fld>
             <a:endParaRPr lang="en-US"/>
           </a:p>
@@ -12566,7 +6206,7 @@
                     <m:sSup>
                       <m:sSupPr>
                         <m:ctrlPr>
-                          <a:rPr lang="en-US" i="1" dirty="0">
+                          <a:rPr lang="en-US" b="1" dirty="0">
                             <a:latin typeface="Cambria Math" panose="02040503050406030204" pitchFamily="18" charset="0"/>
                           </a:rPr>
                         </m:ctrlPr>
@@ -12673,7 +6313,7 @@
                     <m:sSup>
                       <m:sSupPr>
                         <m:ctrlPr>
-                          <a:rPr lang="en-US" i="1" dirty="0">
+                          <a:rPr lang="en-US" b="1" dirty="0">
                             <a:latin typeface="Cambria Math" panose="02040503050406030204" pitchFamily="18" charset="0"/>
                           </a:rPr>
                         </m:ctrlPr>
@@ -12737,7 +6377,7 @@
                     <m:sSup>
                       <m:sSupPr>
                         <m:ctrlPr>
-                          <a:rPr lang="en-US" i="1" dirty="0">
+                          <a:rPr lang="en-US" b="1" dirty="0">
                             <a:latin typeface="Cambria Math" panose="02040503050406030204" pitchFamily="18" charset="0"/>
                           </a:rPr>
                         </m:ctrlPr>
@@ -12835,7 +6475,7 @@
           <a:p>
             <a:fld id="{78C78AF5-9322-9C4C-BF5D-6E9B25DD6F1B}" type="datetime1">
               <a:rPr lang="en-US" smtClean="0"/>
-              <a:t>12/20/2025</a:t>
+              <a:t>8/13/26</a:t>
             </a:fld>
             <a:endParaRPr lang="en-US"/>
           </a:p>
@@ -13278,7 +6918,7 @@
           <a:p>
             <a:fld id="{A316837E-B9F1-4841-A1AD-D1240901F5A4}" type="datetime1">
               <a:rPr lang="en-US" smtClean="0"/>
-              <a:t>12/20/2025</a:t>
+              <a:t>8/13/26</a:t>
             </a:fld>
             <a:endParaRPr lang="en-US"/>
           </a:p>
@@ -13500,7 +7140,7 @@
                     <m:sSup>
                       <m:sSupPr>
                         <m:ctrlPr>
-                          <a:rPr lang="en-US" i="1" dirty="0">
+                          <a:rPr lang="en-US" b="1" dirty="0">
                             <a:latin typeface="Cambria Math" panose="02040503050406030204" pitchFamily="18" charset="0"/>
                           </a:rPr>
                         </m:ctrlPr>
@@ -13702,7 +7342,7 @@
           <a:p>
             <a:fld id="{C8130406-0066-D644-A6E6-C67523710C37}" type="datetime1">
               <a:rPr lang="en-US" smtClean="0"/>
-              <a:t>12/20/2025</a:t>
+              <a:t>8/13/26</a:t>
             </a:fld>
             <a:endParaRPr lang="en-US"/>
           </a:p>
@@ -14033,8 +7673,9 @@
                     <m:sSup>
                       <m:sSupPr>
                         <m:ctrlPr>
-                          <a:rPr lang="en-US" b="0" i="1" smtClean="0">
-                            <a:latin typeface="Cambria Math" panose="02040503050406030204" pitchFamily="18" charset="0"/>
+                          <a:rPr lang="en-US" b="1" i="0" smtClean="0">
+                            <a:latin typeface="Source Sans Pro" panose="020B0503030403020204" pitchFamily="34" charset="0"/>
+                            <a:ea typeface="Source Sans Pro" panose="020B0503030403020204" pitchFamily="34" charset="0"/>
                           </a:rPr>
                         </m:ctrlPr>
                       </m:sSupPr>
@@ -14073,8 +7714,9 @@
                     <m:sSup>
                       <m:sSupPr>
                         <m:ctrlPr>
-                          <a:rPr lang="en-US" i="1">
-                            <a:latin typeface="Cambria Math" panose="02040503050406030204" pitchFamily="18" charset="0"/>
+                          <a:rPr lang="en-US" b="1" i="0">
+                            <a:latin typeface="Source Sans Pro" panose="020B0503030403020204" pitchFamily="34" charset="0"/>
+                            <a:ea typeface="Source Sans Pro" panose="020B0503030403020204" pitchFamily="34" charset="0"/>
                           </a:rPr>
                         </m:ctrlPr>
                       </m:sSupPr>
@@ -14083,7 +7725,7 @@
                           <m:rPr>
                             <m:nor/>
                           </m:rPr>
-                          <a:rPr lang="en-US" b="1">
+                          <a:rPr lang="en-US" b="1" i="0">
                             <a:latin typeface="Source Sans Pro" panose="020B0503030403020204" pitchFamily="34" charset="0"/>
                             <a:ea typeface="Source Sans Pro" panose="020B0503030403020204" pitchFamily="34" charset="0"/>
                           </a:rPr>
@@ -14108,8 +7750,9 @@
                     <m:sSup>
                       <m:sSupPr>
                         <m:ctrlPr>
-                          <a:rPr lang="en-US" i="1" smtClean="0">
-                            <a:latin typeface="Cambria Math" panose="02040503050406030204" pitchFamily="18" charset="0"/>
+                          <a:rPr lang="en-US" b="1" i="0">
+                            <a:latin typeface="Source Sans Pro" panose="020B0503030403020204" pitchFamily="34" charset="0"/>
+                            <a:ea typeface="Source Sans Pro" panose="020B0503030403020204" pitchFamily="34" charset="0"/>
                           </a:rPr>
                         </m:ctrlPr>
                       </m:sSupPr>
@@ -14118,7 +7761,7 @@
                           <m:rPr>
                             <m:nor/>
                           </m:rPr>
-                          <a:rPr lang="en-US" b="1">
+                          <a:rPr lang="en-US" b="1" i="0">
                             <a:latin typeface="Source Sans Pro" panose="020B0503030403020204" pitchFamily="34" charset="0"/>
                             <a:ea typeface="Source Sans Pro" panose="020B0503030403020204" pitchFamily="34" charset="0"/>
                           </a:rPr>
@@ -14270,7 +7913,7 @@
           <a:p>
             <a:fld id="{244C03E2-978F-9A40-9D1A-61FF5584D334}" type="datetime1">
               <a:rPr lang="en-US" smtClean="0"/>
-              <a:t>12/20/2025</a:t>
+              <a:t>8/13/26</a:t>
             </a:fld>
             <a:endParaRPr lang="en-US"/>
           </a:p>
@@ -14765,7 +8408,7 @@
                     <m:sSub>
                       <m:sSubPr>
                         <m:ctrlPr>
-                          <a:rPr lang="en-US" sz="2800" b="1" i="1" smtClean="0">
+                          <a:rPr lang="en-US" sz="2800" b="1" i="0" smtClean="0">
                             <a:latin typeface="Cambria Math" panose="02040503050406030204" pitchFamily="18" charset="0"/>
                           </a:rPr>
                         </m:ctrlPr>
@@ -15038,7 +8681,7 @@
                     <m:d>
                       <m:dPr>
                         <m:ctrlPr>
-                          <a:rPr lang="en-US" i="1">
+                          <a:rPr lang="en-US" b="1" i="0" smtClean="0">
                             <a:latin typeface="Cambria Math" panose="02040503050406030204" pitchFamily="18" charset="0"/>
                             <a:ea typeface="Cambria Math" panose="02040503050406030204" pitchFamily="18" charset="0"/>
                           </a:rPr>
@@ -15159,7 +8802,7 @@
           <a:p>
             <a:fld id="{7C8352FB-38EE-2043-BD8E-0537E8EC19DC}" type="datetime1">
               <a:rPr lang="en-US" smtClean="0"/>
-              <a:t>12/20/2025</a:t>
+              <a:t>8/13/26</a:t>
             </a:fld>
             <a:endParaRPr lang="en-US"/>
           </a:p>
@@ -15710,21 +9353,7 @@
                         <a:latin typeface="Cambria Math" panose="02040503050406030204" pitchFamily="18" charset="0"/>
                         <a:ea typeface="Source Sans Pro" panose="020B0503030403020204" pitchFamily="34" charset="0"/>
                       </a:rPr>
-                      <m:t>&gt;</m:t>
-                    </m:r>
-                    <m:r>
-                      <a:rPr lang="en-US" sz="2667" b="0" i="1" smtClean="0">
-                        <a:latin typeface="Cambria Math" panose="02040503050406030204" pitchFamily="18" charset="0"/>
-                        <a:ea typeface="Source Sans Pro" panose="020B0503030403020204" pitchFamily="34" charset="0"/>
-                      </a:rPr>
-                      <m:t>0</m:t>
-                    </m:r>
-                    <m:r>
-                      <a:rPr lang="en-US" sz="2667" b="0" i="1" smtClean="0">
-                        <a:latin typeface="Cambria Math" panose="02040503050406030204" pitchFamily="18" charset="0"/>
-                        <a:ea typeface="Source Sans Pro" panose="020B0503030403020204" pitchFamily="34" charset="0"/>
-                      </a:rPr>
-                      <m:t> </m:t>
+                      <m:t>&gt;0 </m:t>
                     </m:r>
                   </m:oMath>
                 </a14:m>
@@ -16323,7 +9952,7 @@
           <a:p>
             <a:fld id="{01B51B1E-4FD3-3243-8FA1-0E9C6D2E162D}" type="datetime1">
               <a:rPr lang="en-US" smtClean="0"/>
-              <a:t>12/20/2025</a:t>
+              <a:t>8/13/26</a:t>
             </a:fld>
             <a:endParaRPr lang="en-US"/>
           </a:p>
@@ -16481,7 +10110,7 @@
           <a:p>
             <a:fld id="{FDAF407C-353C-6A4E-A48D-4F7DC9F41855}" type="datetime1">
               <a:rPr lang="en-US" smtClean="0"/>
-              <a:t>12/20/2025</a:t>
+              <a:t>8/13/26</a:t>
             </a:fld>
             <a:endParaRPr lang="en-US"/>
           </a:p>
@@ -17091,7 +10720,7 @@
           <a:p>
             <a:fld id="{25801F29-6C31-344B-B84F-C31A4AAD0C8E}" type="datetime1">
               <a:rPr lang="en-US" smtClean="0"/>
-              <a:t>12/20/2025</a:t>
+              <a:t>8/13/26</a:t>
             </a:fld>
             <a:endParaRPr lang="en-US"/>
           </a:p>
@@ -17481,7 +11110,7 @@
           <a:p>
             <a:fld id="{7AAB2889-ADEE-4849-BD1B-2E9F6013DF3D}" type="datetime1">
               <a:rPr lang="en-US" smtClean="0"/>
-              <a:t>12/20/2025</a:t>
+              <a:t>8/13/26</a:t>
             </a:fld>
             <a:endParaRPr lang="en-US"/>
           </a:p>
@@ -17620,10 +11249,7 @@
                     <a:pPr/>
                     <a14:m>
                       <m:oMathPara xmlns:m="http://schemas.openxmlformats.org/officeDocument/2006/math">
-                        <m:oMathParaPr>
-                          <m:jc m:val="centerGroup"/>
-                        </m:oMathParaPr>
-                        <m:oMath xmlns:m="http://schemas.openxmlformats.org/officeDocument/2006/math">
+                        <m:oMath>
                           <m:r>
                             <m:rPr>
                               <m:sty m:val="p"/>
@@ -17687,7 +11313,7 @@
                               <m:sSub>
                                 <m:sSubPr>
                                   <m:ctrlPr>
-                                    <a:rPr lang="en-US" sz="2000" b="0" i="1" smtClean="0">
+                                    <a:rPr lang="en-US" sz="2000" i="1">
                                       <a:latin typeface="Cambria Math" panose="02040503050406030204" pitchFamily="18" charset="0"/>
                                     </a:rPr>
                                   </m:ctrlPr>
@@ -17720,7 +11346,7 @@
                               <m:d>
                                 <m:dPr>
                                   <m:ctrlPr>
-                                    <a:rPr lang="en-US" sz="2000" b="0" i="1" smtClean="0">
+                                    <a:rPr lang="en-US" sz="2000" b="1">
                                       <a:latin typeface="Cambria Math" panose="02040503050406030204" pitchFamily="18" charset="0"/>
                                     </a:rPr>
                                   </m:ctrlPr>
@@ -17895,7 +11521,7 @@
                           <m:accPr>
                             <m:chr m:val="̇"/>
                             <m:ctrlPr>
-                              <a:rPr lang="en-US" sz="2000" i="1" smtClean="0">
+                              <a:rPr lang="en-US" sz="2000" b="1">
                                 <a:latin typeface="Cambria Math" panose="02040503050406030204" pitchFamily="18" charset="0"/>
                               </a:rPr>
                             </m:ctrlPr>
@@ -17936,7 +11562,7 @@
                         <m:d>
                           <m:dPr>
                             <m:ctrlPr>
-                              <a:rPr lang="en-US" sz="2000" b="0" i="1" smtClean="0">
+                              <a:rPr lang="en-US" sz="2000" b="1">
                                 <a:latin typeface="Cambria Math" panose="02040503050406030204" pitchFamily="18" charset="0"/>
                               </a:rPr>
                             </m:ctrlPr>
@@ -18033,7 +11659,7 @@
                           <m:rPr>
                             <m:nor/>
                           </m:rPr>
-                          <a:rPr lang="en-US" sz="2000" dirty="0"/>
+                          <a:rPr lang="en-US" sz="2000" i="0" dirty="0"/>
                           <m:t>[</m:t>
                         </m:r>
                         <m:sSub>
@@ -18070,7 +11696,7 @@
                         <m:sSub>
                           <m:sSubPr>
                             <m:ctrlPr>
-                              <a:rPr lang="en-US" sz="2000" i="1" smtClean="0">
+                              <a:rPr lang="en-US" sz="2000" i="1">
                                 <a:solidFill>
                                   <a:schemeClr val="tx1"/>
                                 </a:solidFill>
@@ -18105,7 +11731,7 @@
                           <m:rPr>
                             <m:nor/>
                           </m:rPr>
-                          <a:rPr lang="en-US" sz="2000" dirty="0"/>
+                          <a:rPr lang="en-US" sz="2000" i="0" dirty="0"/>
                           <m:t>]</m:t>
                         </m:r>
                       </m:oMath>
@@ -18339,7 +11965,7 @@
                         <m:rPr>
                           <m:nor/>
                         </m:rPr>
-                        <a:rPr lang="en-US" sz="2000" dirty="0"/>
+                        <a:rPr lang="en-US" sz="2000" i="0" dirty="0"/>
                         <m:t>[</m:t>
                       </m:r>
                       <m:sSub>
@@ -18371,13 +11997,13 @@
                         <m:rPr>
                           <m:nor/>
                         </m:rPr>
-                        <a:rPr lang="en-US" sz="2000" dirty="0"/>
+                        <a:rPr lang="en-US" sz="2000" i="0" dirty="0"/>
                         <m:t>, </m:t>
                       </m:r>
                       <m:sSub>
                         <m:sSubPr>
                           <m:ctrlPr>
-                            <a:rPr lang="en-US" sz="2000" i="1" smtClean="0">
+                            <a:rPr lang="en-US" sz="2000" i="1">
                               <a:solidFill>
                                 <a:schemeClr val="tx1"/>
                               </a:solidFill>
@@ -18412,7 +12038,7 @@
                         <m:rPr>
                           <m:nor/>
                         </m:rPr>
-                        <a:rPr lang="en-US" sz="2000" dirty="0"/>
+                        <a:rPr lang="en-US" sz="2000" i="0" dirty="0"/>
                         <m:t>]</m:t>
                       </m:r>
                     </m:oMath>
@@ -18969,7 +12595,7 @@
                     <m:sSub>
                       <m:sSubPr>
                         <m:ctrlPr>
-                          <a:rPr lang="en-US" b="0" i="1" smtClean="0">
+                          <a:rPr lang="en-US" b="1" i="0" smtClean="0">
                             <a:solidFill>
                               <a:schemeClr val="tx1"/>
                             </a:solidFill>
@@ -19058,7 +12684,7 @@
                     <m:sSub>
                       <m:sSubPr>
                         <m:ctrlPr>
-                          <a:rPr lang="en-US" b="0" i="1" smtClean="0">
+                          <a:rPr lang="en-US" b="1" i="0" smtClean="0">
                             <a:solidFill>
                               <a:schemeClr val="tx1"/>
                             </a:solidFill>
@@ -19288,7 +12914,7 @@
                     <m:sSub>
                       <m:sSubPr>
                         <m:ctrlPr>
-                          <a:rPr lang="en-US" i="1">
+                          <a:rPr lang="en-US" b="1" i="0">
                             <a:latin typeface="Cambria Math" panose="02040503050406030204" pitchFamily="18" charset="0"/>
                           </a:rPr>
                         </m:ctrlPr>
@@ -19402,7 +13028,7 @@
                             </a:solidFill>
                             <a:latin typeface="Cambria Math" panose="02040503050406030204" pitchFamily="18" charset="0"/>
                           </a:rPr>
-                          <m:t>h</m:t>
+                          <m:t>ℎ</m:t>
                         </m:r>
                       </m:e>
                       <m:sub>
@@ -19696,14 +13322,11 @@
                       <a:pPr/>
                       <a14:m>
                         <m:oMathPara xmlns:m="http://schemas.openxmlformats.org/officeDocument/2006/math">
-                          <m:oMathParaPr>
-                            <m:jc m:val="centerGroup"/>
-                          </m:oMathParaPr>
-                          <m:oMath xmlns:m="http://schemas.openxmlformats.org/officeDocument/2006/math">
+                          <m:oMath>
                             <m:sSub>
                               <m:sSubPr>
                                 <m:ctrlPr>
-                                  <a:rPr lang="en-US" sz="2000" b="0" i="1" smtClean="0">
+                                  <a:rPr lang="en-US" sz="2000" b="0" i="0" smtClean="0">
                                     <a:solidFill>
                                       <a:srgbClr val="FF0000"/>
                                     </a:solidFill>
@@ -19738,7 +13361,7 @@
                                 <m:sSub>
                                   <m:sSubPr>
                                     <m:ctrlPr>
-                                      <a:rPr lang="en-US" sz="2000" b="0" i="1" smtClean="0">
+                                      <a:rPr lang="en-US" sz="2000" b="1" i="0" smtClean="0">
                                         <a:solidFill>
                                           <a:srgbClr val="FF0000"/>
                                         </a:solidFill>
@@ -19781,7 +13404,7 @@
                                 <m:sSub>
                                   <m:sSubPr>
                                     <m:ctrlPr>
-                                      <a:rPr lang="en-US" sz="2000" b="1" i="1" smtClean="0">
+                                      <a:rPr lang="en-US" sz="2000" b="1" i="0" smtClean="0">
                                         <a:solidFill>
                                           <a:srgbClr val="FF0000"/>
                                         </a:solidFill>
@@ -19898,7 +13521,7 @@
                                         </a:solidFill>
                                         <a:latin typeface="Cambria Math" panose="02040503050406030204" pitchFamily="18" charset="0"/>
                                       </a:rPr>
-                                      <m:t>h</m:t>
+                                      <m:t>ℎ</m:t>
                                     </m:r>
                                   </m:e>
                                   <m:sub>
@@ -19934,7 +13557,7 @@
                                 <m:sSub>
                                   <m:sSubPr>
                                     <m:ctrlPr>
-                                      <a:rPr lang="en-US" sz="2000" b="0" i="1" smtClean="0">
+                                      <a:rPr lang="en-US" sz="2000" b="1" i="0" smtClean="0">
                                         <a:solidFill>
                                           <a:srgbClr val="FF0000"/>
                                         </a:solidFill>
@@ -19977,7 +13600,7 @@
                                 <m:sSub>
                                   <m:sSubPr>
                                     <m:ctrlPr>
-                                      <a:rPr lang="en-US" sz="2000" b="0" i="1" smtClean="0">
+                                      <a:rPr lang="en-US" sz="2000" b="1" i="0" smtClean="0">
                                         <a:solidFill>
                                           <a:srgbClr val="FF0000"/>
                                         </a:solidFill>
@@ -20151,14 +13774,11 @@
                       <a:pPr/>
                       <a14:m>
                         <m:oMathPara xmlns:m="http://schemas.openxmlformats.org/officeDocument/2006/math">
-                          <m:oMathParaPr>
-                            <m:jc m:val="centerGroup"/>
-                          </m:oMathParaPr>
-                          <m:oMath xmlns:m="http://schemas.openxmlformats.org/officeDocument/2006/math">
+                          <m:oMath>
                             <m:sSub>
                               <m:sSubPr>
                                 <m:ctrlPr>
-                                  <a:rPr lang="en-US" sz="2000" b="1" i="1" smtClean="0">
+                                  <a:rPr lang="en-US" sz="2000" b="1" i="0" smtClean="0">
                                     <a:solidFill>
                                       <a:srgbClr val="FF0000"/>
                                     </a:solidFill>
@@ -20210,7 +13830,7 @@
                             <m:sSub>
                               <m:sSubPr>
                                 <m:ctrlPr>
-                                  <a:rPr lang="en-US" sz="2000" b="0" i="1" smtClean="0">
+                                  <a:rPr lang="en-US" sz="2000" b="1" i="0" smtClean="0">
                                     <a:solidFill>
                                       <a:srgbClr val="FF0000"/>
                                     </a:solidFill>
@@ -20269,7 +13889,7 @@
                                     </a:solidFill>
                                     <a:latin typeface="Cambria Math" panose="02040503050406030204" pitchFamily="18" charset="0"/>
                                   </a:rPr>
-                                  <m:t>h</m:t>
+                                  <m:t>ℎ</m:t>
                                 </m:r>
                               </m:e>
                               <m:sub>
@@ -20308,7 +13928,7 @@
                                 <m:sSub>
                                   <m:sSubPr>
                                     <m:ctrlPr>
-                                      <a:rPr lang="en-US" sz="2000" b="0" i="1" smtClean="0">
+                                      <a:rPr lang="en-US" sz="2000" b="1" i="0" smtClean="0">
                                         <a:solidFill>
                                           <a:srgbClr val="FF0000"/>
                                         </a:solidFill>
@@ -20351,7 +13971,7 @@
                                 <m:sSub>
                                   <m:sSubPr>
                                     <m:ctrlPr>
-                                      <a:rPr lang="en-US" sz="2000" b="0" i="1" smtClean="0">
+                                      <a:rPr lang="en-US" sz="2000" b="1" i="0" smtClean="0">
                                         <a:solidFill>
                                           <a:srgbClr val="FF0000"/>
                                         </a:solidFill>
@@ -20624,14 +14244,11 @@
                   <a:pPr/>
                   <a14:m>
                     <m:oMathPara xmlns:m="http://schemas.openxmlformats.org/officeDocument/2006/math">
-                      <m:oMathParaPr>
-                        <m:jc m:val="centerGroup"/>
-                      </m:oMathParaPr>
-                      <m:oMath xmlns:m="http://schemas.openxmlformats.org/officeDocument/2006/math">
+                      <m:oMath>
                         <m:sSub>
                           <m:sSubPr>
                             <m:ctrlPr>
-                              <a:rPr lang="en-US" sz="2000" i="1" smtClean="0">
+                              <a:rPr lang="en-US" sz="2000" b="1" i="0">
                                 <a:solidFill>
                                   <a:srgbClr val="FF0000"/>
                                 </a:solidFill>
@@ -20728,7 +14345,7 @@
                         <m:sSub>
                           <m:sSubPr>
                             <m:ctrlPr>
-                              <a:rPr lang="en-US" sz="2000" i="1">
+                              <a:rPr lang="en-US" sz="2000" b="1">
                                 <a:solidFill>
                                   <a:srgbClr val="FF0000"/>
                                 </a:solidFill>
@@ -20771,7 +14388,7 @@
                         <m:sSub>
                           <m:sSubPr>
                             <m:ctrlPr>
-                              <a:rPr lang="en-US" sz="2000" i="1">
+                              <a:rPr lang="en-US" sz="2000" b="1">
                                 <a:solidFill>
                                   <a:srgbClr val="FF0000"/>
                                 </a:solidFill>
@@ -20951,7 +14568,7 @@
                     <m:sSub>
                       <m:sSubPr>
                         <m:ctrlPr>
-                          <a:rPr lang="en-US" sz="2000" i="1">
+                          <a:rPr lang="en-US" sz="2000" b="1">
                             <a:latin typeface="Cambria Math" panose="02040503050406030204" pitchFamily="18" charset="0"/>
                           </a:rPr>
                         </m:ctrlPr>
@@ -21053,7 +14670,7 @@
                     <m:sSub>
                       <m:sSubPr>
                         <m:ctrlPr>
-                          <a:rPr lang="en-US" sz="2000" i="1">
+                          <a:rPr lang="en-US" sz="2000" b="1">
                             <a:latin typeface="Cambria Math" panose="02040503050406030204" pitchFamily="18" charset="0"/>
                           </a:rPr>
                         </m:ctrlPr>
@@ -21732,7 +15349,7 @@
           <a:p>
             <a:fld id="{8F4EB140-66C0-834B-B2A0-5D3CF07FF8D6}" type="datetime1">
               <a:rPr lang="en-US" smtClean="0"/>
-              <a:t>12/20/2025</a:t>
+              <a:t>8/13/26</a:t>
             </a:fld>
             <a:endParaRPr lang="en-US"/>
           </a:p>
@@ -21885,7 +15502,7 @@
           <a:p>
             <a:fld id="{A558A9F6-D5E6-2845-9990-457223861935}" type="datetime1">
               <a:rPr lang="en-US" smtClean="0"/>
-              <a:t>12/20/2025</a:t>
+              <a:t>8/13/26</a:t>
             </a:fld>
             <a:endParaRPr lang="en-US"/>
           </a:p>
@@ -22032,7 +15649,7 @@
           <a:p>
             <a:fld id="{F6E77B72-7A09-6149-999A-2FAF0B67FEE5}" type="datetime1">
               <a:rPr lang="en-US" smtClean="0"/>
-              <a:t>12/20/2025</a:t>
+              <a:t>8/13/26</a:t>
             </a:fld>
             <a:endParaRPr lang="en-US"/>
           </a:p>
@@ -22496,7 +16113,7 @@
           <a:p>
             <a:fld id="{6872BBC9-B1A8-7944-954D-A93518F969C2}" type="datetime1">
               <a:rPr lang="en-US" smtClean="0"/>
-              <a:t>12/20/2025</a:t>
+              <a:t>8/13/26</a:t>
             </a:fld>
             <a:endParaRPr lang="en-US"/>
           </a:p>
@@ -22853,7 +16470,7 @@
           <a:p>
             <a:fld id="{2F8CC95D-8D0F-3F43-AAA8-FF941A7064E9}" type="datetime1">
               <a:rPr lang="en-US" smtClean="0"/>
-              <a:t>12/20/2025</a:t>
+              <a:t>8/13/26</a:t>
             </a:fld>
             <a:endParaRPr lang="en-US"/>
           </a:p>
@@ -23477,7 +17094,7 @@
           <a:p>
             <a:fld id="{5119D5F2-4B65-1645-AC65-6D0C31C1675B}" type="datetime1">
               <a:rPr lang="en-US" smtClean="0"/>
-              <a:t>12/20/2025</a:t>
+              <a:t>8/13/26</a:t>
             </a:fld>
             <a:endParaRPr lang="en-US"/>
           </a:p>
@@ -23702,7 +17319,7 @@
           <a:p>
             <a:fld id="{6477D967-9D3E-204E-A1B6-386FE8694FE1}" type="datetime1">
               <a:rPr lang="en-US" smtClean="0"/>
-              <a:t>12/20/2025</a:t>
+              <a:t>8/13/26</a:t>
             </a:fld>
             <a:endParaRPr lang="en-US"/>
           </a:p>
@@ -24094,7 +17711,7 @@
           <a:p>
             <a:fld id="{46FEC6CA-F607-C346-81CB-38157FFDBF61}" type="datetime1">
               <a:rPr lang="en-US" smtClean="0"/>
-              <a:t>12/20/2025</a:t>
+              <a:t>8/13/26</a:t>
             </a:fld>
             <a:endParaRPr lang="en-US"/>
           </a:p>
@@ -24245,16 +17862,13 @@
                 <a:pPr/>
                 <a14:m>
                   <m:oMathPara xmlns:m="http://schemas.openxmlformats.org/officeDocument/2006/math">
-                    <m:oMathParaPr>
-                      <m:jc m:val="centerGroup"/>
-                    </m:oMathParaPr>
-                    <m:oMath xmlns:m="http://schemas.openxmlformats.org/officeDocument/2006/math">
+                    <m:oMath>
                       <m:acc>
                         <m:accPr>
                           <m:chr m:val="̇"/>
                           <m:ctrlPr>
-                            <a:rPr lang="en-US" b="1" i="1" smtClean="0">
-                              <a:latin typeface="Cambria Math" panose="02040503050406030204" pitchFamily="18" charset="0"/>
+                            <a:rPr lang="en-US" b="1">
+                              <a:latin typeface="Cambria Math" charset="0"/>
                             </a:rPr>
                           </m:ctrlPr>
                         </m:accPr>
@@ -24397,10 +18011,7 @@
                 <a:pPr/>
                 <a14:m>
                   <m:oMathPara xmlns:m="http://schemas.openxmlformats.org/officeDocument/2006/math">
-                    <m:oMathParaPr>
-                      <m:jc m:val="centerGroup"/>
-                    </m:oMathParaPr>
-                    <m:oMath xmlns:m="http://schemas.openxmlformats.org/officeDocument/2006/math">
+                    <m:oMath>
                       <m:r>
                         <a:rPr lang="en-US" b="1" i="0" dirty="0" smtClean="0">
                           <a:latin typeface="Cambria Math" panose="02040503050406030204" pitchFamily="18" charset="0"/>
@@ -24410,7 +18021,7 @@
                       <m:d>
                         <m:dPr>
                           <m:ctrlPr>
-                            <a:rPr lang="en-US" b="1" i="1" dirty="0" smtClean="0">
+                            <a:rPr lang="en-US" b="0" i="1" dirty="0" smtClean="0">
                               <a:latin typeface="Cambria Math" panose="02040503050406030204" pitchFamily="18" charset="0"/>
                             </a:rPr>
                           </m:ctrlPr>
@@ -24591,10 +18202,7 @@
                 <a:pPr/>
                 <a14:m>
                   <m:oMathPara xmlns:m="http://schemas.openxmlformats.org/officeDocument/2006/math">
-                    <m:oMathParaPr>
-                      <m:jc m:val="centerGroup"/>
-                    </m:oMathParaPr>
-                    <m:oMath xmlns:m="http://schemas.openxmlformats.org/officeDocument/2006/math">
+                    <m:oMath>
                       <m:r>
                         <a:rPr lang="en-US" sz="2400" b="0" i="1" smtClean="0">
                           <a:latin typeface="Cambria Math" panose="02040503050406030204" pitchFamily="18" charset="0"/>
@@ -24610,8 +18218,9 @@
                       <m:d>
                         <m:dPr>
                           <m:ctrlPr>
-                            <a:rPr lang="en-US" sz="2400" i="1">
+                            <a:rPr lang="en-US" sz="2400" i="1" dirty="0">
                               <a:latin typeface="Cambria Math" panose="02040503050406030204" pitchFamily="18" charset="0"/>
+                              <a:ea typeface="Source Sans Pro" panose="020B0503030403020204" pitchFamily="34" charset="0"/>
                             </a:rPr>
                           </m:ctrlPr>
                         </m:dPr>
@@ -24715,8 +18324,9 @@
                       <m:d>
                         <m:dPr>
                           <m:ctrlPr>
-                            <a:rPr lang="en-US" sz="2400" i="1">
+                            <a:rPr lang="en-US" sz="2400" i="1" dirty="0" smtClean="0">
                               <a:latin typeface="Cambria Math" panose="02040503050406030204" pitchFamily="18" charset="0"/>
+                              <a:ea typeface="Source Sans Pro" panose="020B0503030403020204" pitchFamily="34" charset="0"/>
                             </a:rPr>
                           </m:ctrlPr>
                         </m:dPr>
@@ -24763,7 +18373,7 @@
                                 <m:d>
                                   <m:dPr>
                                     <m:ctrlPr>
-                                      <a:rPr lang="en-US" sz="2400" b="1" i="1">
+                                      <a:rPr lang="en-US" sz="2400" i="1">
                                         <a:latin typeface="Cambria Math" panose="02040503050406030204" pitchFamily="18" charset="0"/>
                                       </a:rPr>
                                     </m:ctrlPr>
@@ -24787,7 +18397,7 @@
                                   <m:accPr>
                                     <m:chr m:val="̇"/>
                                     <m:ctrlPr>
-                                      <a:rPr lang="en-US" sz="2400" b="0" i="1" smtClean="0">
+                                      <a:rPr lang="en-US" sz="2400" b="1" i="0" smtClean="0">
                                         <a:latin typeface="Cambria Math" panose="02040503050406030204" pitchFamily="18" charset="0"/>
                                       </a:rPr>
                                     </m:ctrlPr>
@@ -24804,7 +18414,7 @@
                                 <m:d>
                                   <m:dPr>
                                     <m:ctrlPr>
-                                      <a:rPr lang="en-US" sz="2400" b="0" i="1" smtClean="0">
+                                      <a:rPr lang="en-US" sz="2400" i="1">
                                         <a:latin typeface="Cambria Math" panose="02040503050406030204" pitchFamily="18" charset="0"/>
                                       </a:rPr>
                                     </m:ctrlPr>
@@ -24827,7 +18437,7 @@
                                 <m:sSup>
                                   <m:sSupPr>
                                     <m:ctrlPr>
-                                      <a:rPr lang="en-US" sz="2400" b="0" i="1" smtClean="0">
+                                      <a:rPr lang="en-US" sz="2400" b="1" i="0" smtClean="0">
                                         <a:latin typeface="Cambria Math" panose="02040503050406030204" pitchFamily="18" charset="0"/>
                                       </a:rPr>
                                     </m:ctrlPr>
@@ -24905,7 +18515,7 @@
                                 <m:d>
                                   <m:dPr>
                                     <m:ctrlPr>
-                                      <a:rPr lang="en-US" sz="2400" b="1" i="1">
+                                      <a:rPr lang="en-US" sz="2400" i="1">
                                         <a:latin typeface="Cambria Math" panose="02040503050406030204" pitchFamily="18" charset="0"/>
                                       </a:rPr>
                                     </m:ctrlPr>
@@ -24929,7 +18539,7 @@
                                   <m:accPr>
                                     <m:chr m:val="̇"/>
                                     <m:ctrlPr>
-                                      <a:rPr lang="en-US" sz="2400" i="1">
+                                      <a:rPr lang="en-US" sz="2400" b="1">
                                         <a:latin typeface="Cambria Math" panose="02040503050406030204" pitchFamily="18" charset="0"/>
                                       </a:rPr>
                                     </m:ctrlPr>
@@ -24969,7 +18579,7 @@
                                 <m:sSup>
                                   <m:sSupPr>
                                     <m:ctrlPr>
-                                      <a:rPr lang="en-US" sz="2400" i="1">
+                                      <a:rPr lang="en-US" sz="2400" b="1">
                                         <a:latin typeface="Cambria Math" panose="02040503050406030204" pitchFamily="18" charset="0"/>
                                       </a:rPr>
                                     </m:ctrlPr>
@@ -25623,7 +19233,7 @@
                 <a:ext cx="10515600" cy="4836432"/>
               </a:xfrm>
               <a:blipFill>
-                <a:blip r:embed="rId2"/>
+                <a:blip r:embed="rId3"/>
                 <a:stretch>
                   <a:fillRect l="-1327" t="-2094"/>
                 </a:stretch>
@@ -25667,7 +19277,7 @@
           <a:p>
             <a:fld id="{7131D1B5-6150-834F-8719-00E4D409F1E9}" type="datetime1">
               <a:rPr lang="en-US" smtClean="0"/>
-              <a:t>12/20/2025</a:t>
+              <a:t>8/13/26</a:t>
             </a:fld>
             <a:endParaRPr lang="en-US"/>
           </a:p>
@@ -25903,10 +19513,7 @@
                           <a:pPr/>
                           <a14:m>
                             <m:oMathPara xmlns:m="http://schemas.openxmlformats.org/officeDocument/2006/math">
-                              <m:oMathParaPr>
-                                <m:jc m:val="centerGroup"/>
-                              </m:oMathParaPr>
-                              <m:oMath xmlns:m="http://schemas.openxmlformats.org/officeDocument/2006/math">
+                              <m:oMath>
                                 <m:r>
                                   <a:rPr lang="en-US" b="0" i="1" smtClean="0">
                                     <a:solidFill>
@@ -26144,10 +19751,7 @@
                           <a:pPr/>
                           <a14:m>
                             <m:oMathPara xmlns:m="http://schemas.openxmlformats.org/officeDocument/2006/math">
-                              <m:oMathParaPr>
-                                <m:jc m:val="centerGroup"/>
-                              </m:oMathParaPr>
-                              <m:oMath xmlns:m="http://schemas.openxmlformats.org/officeDocument/2006/math">
+                              <m:oMath>
                                 <m:r>
                                   <a:rPr lang="en-US" b="0" i="1" smtClean="0">
                                     <a:solidFill>
@@ -26227,7 +19831,7 @@
                                   <m:accPr>
                                     <m:chr m:val="̇"/>
                                     <m:ctrlPr>
-                                      <a:rPr lang="en-US" b="0" i="1" smtClean="0">
+                                      <a:rPr lang="en-US" b="1" i="0" smtClean="0">
                                         <a:solidFill>
                                           <a:schemeClr val="tx1"/>
                                         </a:solidFill>
@@ -26307,7 +19911,7 @@
                                 <m:sSup>
                                   <m:sSupPr>
                                     <m:ctrlPr>
-                                      <a:rPr lang="en-US" b="0" i="1" smtClean="0">
+                                      <a:rPr lang="en-US" b="1" i="0" smtClean="0">
                                         <a:solidFill>
                                           <a:schemeClr val="tx1"/>
                                         </a:solidFill>
@@ -26485,10 +20089,7 @@
                           </a:pPr>
                           <a14:m>
                             <m:oMathPara xmlns:m="http://schemas.openxmlformats.org/officeDocument/2006/math">
-                              <m:oMathParaPr>
-                                <m:jc m:val="centerGroup"/>
-                              </m:oMathParaPr>
-                              <m:oMath xmlns:m="http://schemas.openxmlformats.org/officeDocument/2006/math">
+                              <m:oMath>
                                 <m:r>
                                   <a:rPr lang="en-US" b="0" i="1" smtClean="0">
                                     <a:solidFill>
@@ -26742,10 +20343,7 @@
                           </a:pPr>
                           <a14:m>
                             <m:oMathPara xmlns:m="http://schemas.openxmlformats.org/officeDocument/2006/math">
-                              <m:oMathParaPr>
-                                <m:jc m:val="centerGroup"/>
-                              </m:oMathParaPr>
-                              <m:oMath xmlns:m="http://schemas.openxmlformats.org/officeDocument/2006/math">
+                              <m:oMath>
                                 <m:r>
                                   <a:rPr lang="en-US" b="0" i="1" smtClean="0">
                                     <a:solidFill>
@@ -26825,7 +20423,7 @@
                                   <m:accPr>
                                     <m:chr m:val="̇"/>
                                     <m:ctrlPr>
-                                      <a:rPr lang="en-US" b="0" i="1" smtClean="0">
+                                      <a:rPr lang="en-US" b="1" i="0" smtClean="0">
                                         <a:solidFill>
                                           <a:schemeClr val="tx1"/>
                                         </a:solidFill>
@@ -26905,7 +20503,7 @@
                                 <m:sSup>
                                   <m:sSupPr>
                                     <m:ctrlPr>
-                                      <a:rPr lang="en-US" b="0" i="1" smtClean="0">
+                                      <a:rPr lang="en-US" b="1" i="0" smtClean="0">
                                         <a:solidFill>
                                           <a:schemeClr val="tx1"/>
                                         </a:solidFill>
@@ -27278,7 +20876,7 @@
                           <a:tailEnd type="none" w="med" len="med"/>
                         </a:lnB>
                         <a:blipFill>
-                          <a:blip r:embed="rId3"/>
+                          <a:blip r:embed="rId4"/>
                           <a:stretch>
                             <a:fillRect l="-365" t="-100000" r="-100000" b="-112903"/>
                           </a:stretch>
@@ -27331,7 +20929,7 @@
                           <a:tailEnd type="none" w="med" len="med"/>
                         </a:lnB>
                         <a:blipFill>
-                          <a:blip r:embed="rId3"/>
+                          <a:blip r:embed="rId4"/>
                           <a:stretch>
                             <a:fillRect l="-100365" t="-100000" b="-112903"/>
                           </a:stretch>
@@ -27391,7 +20989,7 @@
                           <a:tailEnd type="none" w="med" len="med"/>
                         </a:lnB>
                         <a:blipFill>
-                          <a:blip r:embed="rId3"/>
+                          <a:blip r:embed="rId4"/>
                           <a:stretch>
                             <a:fillRect l="-365" t="-187879" r="-100000" b="-6061"/>
                           </a:stretch>
@@ -27444,7 +21042,7 @@
                           <a:tailEnd type="none" w="med" len="med"/>
                         </a:lnB>
                         <a:blipFill>
-                          <a:blip r:embed="rId3"/>
+                          <a:blip r:embed="rId4"/>
                           <a:stretch>
                             <a:fillRect l="-100365" t="-187879" b="-6061"/>
                           </a:stretch>
@@ -27550,7 +21148,7 @@
                       <m:sSubPr>
                         <m:ctrlPr>
                           <a:rPr lang="en-US" b="0" i="1" smtClean="0">
-                            <a:latin typeface="Cambria Math" panose="02040503050406030204" pitchFamily="18" charset="0"/>
+                            <a:latin typeface="Cambria Math" charset="0"/>
                           </a:rPr>
                         </m:ctrlPr>
                       </m:sSubPr>
@@ -27749,7 +21347,7 @@
           <a:p>
             <a:fld id="{DBEF010D-FCA2-DF49-B0A4-DD2756CA2D5A}" type="datetime1">
               <a:rPr lang="en-US" smtClean="0"/>
-              <a:t>12/20/2025</a:t>
+              <a:t>8/13/26</a:t>
             </a:fld>
             <a:endParaRPr lang="en-US"/>
           </a:p>
@@ -28042,8 +21640,8 @@
                       <m:accPr>
                         <m:chr m:val="̇"/>
                         <m:ctrlPr>
-                          <a:rPr lang="en-US" b="1" i="1">
-                            <a:latin typeface="Cambria Math" panose="02040503050406030204" pitchFamily="18" charset="0"/>
+                          <a:rPr lang="en-US" b="1">
+                            <a:latin typeface="Cambria Math" charset="0"/>
                           </a:rPr>
                         </m:ctrlPr>
                       </m:accPr>
@@ -28163,7 +21761,7 @@
           <a:p>
             <a:fld id="{2934AAE9-04FD-CB45-854B-6852133496E2}" type="datetime1">
               <a:rPr lang="en-US" smtClean="0"/>
-              <a:t>12/20/2025</a:t>
+              <a:t>8/13/26</a:t>
             </a:fld>
             <a:endParaRPr lang="en-US"/>
           </a:p>
@@ -28298,7 +21896,7 @@
           <a:p>
             <a:fld id="{E547EE16-0816-D044-A37E-71775BA4A1F1}" type="datetime1">
               <a:rPr lang="en-US" smtClean="0"/>
-              <a:t>12/20/2025</a:t>
+              <a:t>8/13/26</a:t>
             </a:fld>
             <a:endParaRPr lang="en-US"/>
           </a:p>
@@ -28850,7 +22448,7 @@
           <a:p>
             <a:fld id="{4216A95E-AB9C-BD49-BFA6-1690E5EDA05E}" type="datetime1">
               <a:rPr lang="en-US" smtClean="0"/>
-              <a:t>12/20/2025</a:t>
+              <a:t>8/13/26</a:t>
             </a:fld>
             <a:endParaRPr lang="en-US"/>
           </a:p>
@@ -28995,7 +22593,7 @@
           <a:p>
             <a:fld id="{AE20E449-DFC1-B94E-84D3-7CC812E71CD1}" type="datetime1">
               <a:rPr lang="en-US" smtClean="0"/>
-              <a:t>12/20/2025</a:t>
+              <a:t>8/13/26</a:t>
             </a:fld>
             <a:endParaRPr lang="en-US"/>
           </a:p>
@@ -29417,7 +23015,7 @@
           <a:p>
             <a:fld id="{FE0578AC-D93B-B04C-95DA-D3098DBD7392}" type="datetime1">
               <a:rPr lang="en-US" smtClean="0"/>
-              <a:t>12/20/2025</a:t>
+              <a:t>8/13/26</a:t>
             </a:fld>
             <a:endParaRPr lang="en-US"/>
           </a:p>
@@ -29699,15 +23297,12 @@
                 </a:pPr>
                 <a14:m>
                   <m:oMathPara xmlns:m="http://schemas.openxmlformats.org/officeDocument/2006/math">
-                    <m:oMathParaPr>
-                      <m:jc m:val="centerGroup"/>
-                    </m:oMathParaPr>
-                    <m:oMath xmlns:m="http://schemas.openxmlformats.org/officeDocument/2006/math">
+                    <m:oMath>
                       <m:acc>
                         <m:accPr>
                           <m:chr m:val="̇"/>
                           <m:ctrlPr>
-                            <a:rPr lang="ar-AE" sz="2400" i="1" smtClean="0">
+                            <a:rPr lang="ar-AE" sz="2400" b="1">
                               <a:latin typeface="Cambria Math" panose="02040503050406030204" pitchFamily="18" charset="0"/>
                             </a:rPr>
                           </m:ctrlPr>
@@ -29748,7 +23343,7 @@
                       <m:d>
                         <m:dPr>
                           <m:ctrlPr>
-                            <a:rPr lang="ar-AE" sz="2400" i="1">
+                            <a:rPr lang="ar-AE" sz="2400" b="1">
                               <a:latin typeface="Cambria Math" panose="02040503050406030204" pitchFamily="18" charset="0"/>
                             </a:rPr>
                           </m:ctrlPr>
@@ -30321,7 +23916,7 @@
           <a:p>
             <a:fld id="{12243579-7CC2-564A-BBA4-170E8F71940E}" type="datetime1">
               <a:rPr lang="en-US" smtClean="0"/>
-              <a:t>12/20/2025</a:t>
+              <a:t>8/13/26</a:t>
             </a:fld>
             <a:endParaRPr lang="en-US"/>
           </a:p>
@@ -30463,7 +24058,7 @@
                       <m:dPr>
                         <m:ctrlPr>
                           <a:rPr lang="en-US" b="0" i="1" smtClean="0">
-                            <a:latin typeface="Cambria Math" panose="02040503050406030204" pitchFamily="18" charset="0"/>
+                            <a:latin typeface="Cambria Math" charset="0"/>
                           </a:rPr>
                         </m:ctrlPr>
                       </m:dPr>
@@ -30486,7 +24081,7 @@
                       <m:sSupPr>
                         <m:ctrlPr>
                           <a:rPr lang="en-US" b="0" i="1" smtClean="0">
-                            <a:latin typeface="Cambria Math" panose="02040503050406030204" pitchFamily="18" charset="0"/>
+                            <a:latin typeface="Cambria Math" charset="0"/>
                           </a:rPr>
                         </m:ctrlPr>
                       </m:sSupPr>
@@ -30523,7 +24118,7 @@
                       <m:dPr>
                         <m:ctrlPr>
                           <a:rPr lang="en-US" b="0" i="1" smtClean="0">
-                            <a:latin typeface="Cambria Math" panose="02040503050406030204" pitchFamily="18" charset="0"/>
+                            <a:latin typeface="Cambria Math" charset="0"/>
                           </a:rPr>
                         </m:ctrlPr>
                       </m:dPr>
@@ -30546,7 +24141,7 @@
                       <m:sSupPr>
                         <m:ctrlPr>
                           <a:rPr lang="en-US" b="0" i="1" smtClean="0">
-                            <a:latin typeface="Cambria Math" panose="02040503050406030204" pitchFamily="18" charset="0"/>
+                            <a:latin typeface="Cambria Math" charset="0"/>
                           </a:rPr>
                         </m:ctrlPr>
                       </m:sSupPr>
@@ -30607,7 +24202,7 @@
                           <m:sSubPr>
                             <m:ctrlPr>
                               <a:rPr lang="en-US" b="0" i="1" smtClean="0">
-                                <a:latin typeface="Cambria Math" panose="02040503050406030204" pitchFamily="18" charset="0"/>
+                                <a:latin typeface="Cambria Math" charset="0"/>
                               </a:rPr>
                             </m:ctrlPr>
                           </m:sSubPr>
@@ -30639,8 +24234,8 @@
                     <m:sSub>
                       <m:sSubPr>
                         <m:ctrlPr>
-                          <a:rPr lang="en-US" b="0" i="1" smtClean="0">
-                            <a:latin typeface="Cambria Math" panose="02040503050406030204" pitchFamily="18" charset="0"/>
+                          <a:rPr lang="en-US" b="1" i="0" smtClean="0">
+                            <a:latin typeface="Cambria Math" charset="0"/>
                           </a:rPr>
                         </m:ctrlPr>
                       </m:sSubPr>
@@ -30891,7 +24486,7 @@
           <a:p>
             <a:fld id="{A0DAD57B-E737-2F4B-BA1B-0F7627405AB3}" type="datetime1">
               <a:rPr lang="en-US" smtClean="0"/>
-              <a:t>12/20/2025</a:t>
+              <a:t>8/13/26</a:t>
             </a:fld>
             <a:endParaRPr lang="en-US"/>
           </a:p>
@@ -31468,7 +25063,7 @@
           <a:p>
             <a:fld id="{46B7A754-4A20-AB40-8A1E-0EE0F8DB6619}" type="datetime1">
               <a:rPr lang="en-US" smtClean="0"/>
-              <a:t>12/20/2025</a:t>
+              <a:t>8/13/26</a:t>
             </a:fld>
             <a:endParaRPr lang="en-US"/>
           </a:p>
@@ -32257,7 +25852,7 @@
           <a:p>
             <a:fld id="{8ED1BE37-6F56-FF4E-AC70-421AF8653656}" type="datetime1">
               <a:rPr lang="en-US" smtClean="0"/>
-              <a:t>12/20/2025</a:t>
+              <a:t>8/13/26</a:t>
             </a:fld>
             <a:endParaRPr lang="en-US"/>
           </a:p>
@@ -33611,7 +27206,7 @@
           <a:p>
             <a:fld id="{C3CAB6A5-54DE-E54E-8680-C85926C93651}" type="datetime1">
               <a:rPr lang="en-US" smtClean="0"/>
-              <a:t>12/20/2025</a:t>
+              <a:t>8/13/26</a:t>
             </a:fld>
             <a:endParaRPr lang="en-US"/>
           </a:p>
